--- a/outputs/rewards_punishments_comparison.pptx
+++ b/outputs/rewards_punishments_comparison.pptx
@@ -2,13 +2,13 @@
 <file path=ppt/presentation.xml><?xml version="1.0" encoding="utf-8"?>
 <p:presentation xmlns:p="http://schemas.openxmlformats.org/presentationml/2006/main">
   <p:sldMasterIdLst>
-    <p:sldMasterId xmlns:r="http://schemas.openxmlformats.org/officeDocument/2006/relationships" id="2147483648" r:id="R683cf78b3ea94381"/>
+    <p:sldMasterId xmlns:r="http://schemas.openxmlformats.org/officeDocument/2006/relationships" id="2147483648" r:id="R7f5e9d2417f7492f"/>
   </p:sldMasterIdLst>
   <p:notesMasterIdLst>
-    <p:notesMasterId xmlns:r="http://schemas.openxmlformats.org/officeDocument/2006/relationships" r:id="Rc115a8c0d4d24757"/>
+    <p:notesMasterId xmlns:r="http://schemas.openxmlformats.org/officeDocument/2006/relationships" r:id="R1efd6c1f994f4ec9"/>
   </p:notesMasterIdLst>
   <p:sldIdLst>
-    <p:sldId xmlns:r="http://schemas.openxmlformats.org/officeDocument/2006/relationships" id="256" r:id="R3d8248295b1948c4"/>
+    <p:sldId xmlns:r="http://schemas.openxmlformats.org/officeDocument/2006/relationships" id="256" r:id="R2eb2428e19584c05"/>
   </p:sldIdLst>
   <p:sldSz cx="12192000" cy="6858000"/>
   <p:notesSz cx="6858000" cy="9144000"/>
@@ -462,7 +462,47 @@
           </a:p>
           <a:p xmlns:a="http://schemas.openxmlformats.org/drawingml/2006/main">
             <a:r>
-              <a:t>Run results: all four mapped to Rewards_and_punishments with one event; BERT frame scores old/new were 0.9691/0.9716 for Case 1 and 0.9715/0.9787 for Case 2; combined scores old/new were 0.9969/0.9972 and 0.9972/0.9979.</a:t>
+              <a:t/>
+            </a:r>
+          </a:p>
+          <a:p xmlns:a="http://schemas.openxmlformats.org/drawingml/2006/main">
+            <a:r>
+              <a:t>[Full extracted elements]</a:t>
+            </a:r>
+          </a:p>
+          <a:p xmlns:a="http://schemas.openxmlformats.org/drawingml/2006/main">
+            <a:r>
+              <a:t>Case 1 old: {"Agent":"the agent","Response_action":"Benefit (EI ERB) claim, the agent does not issue the access code","Reason":"fraudulent activity is suspected on an EI or EI Emergency Response Benefit (EI ERB) claim, the agent does not issue the access code","Result":"EI Emergency Response Benefit (EI ERB) claim, the agent does not issue the access code"}</a:t>
+            </a:r>
+          </a:p>
+          <a:p xmlns:a="http://schemas.openxmlformats.org/drawingml/2006/main">
+            <a:r>
+              <a:t>Case 1 revised: {"Agent":"the agent","Response_action":"Benefit (EI ERB) claim, the agent must not issue an access code","Reason":"fraud is suspected on an Employment Insurance (EI) or EI Emergency Response Benefit (EI ERB) claim, the agent must not issue an access code","Result":"EI Emergency Response Benefit (EI ERB) claim, the agent must not issue an access code"}</a:t>
+            </a:r>
+          </a:p>
+          <a:p xmlns:a="http://schemas.openxmlformats.org/drawingml/2006/main">
+            <a:r>
+              <a:t>Case 2 old: {"Response_action":"Benefit (EI ERB) claim are processed by a specialized team","Reason":"EI Emergency Response","Result":"EI Emergency Response"}</a:t>
+            </a:r>
+          </a:p>
+          <a:p xmlns:a="http://schemas.openxmlformats.org/drawingml/2006/main">
+            <a:r>
+              <a:t>Case 2 revised: {"Response_action":"Benefit (EI ERB) claim are processed by a specialized team","Reason":"EI Emergency Response","Result":"EI Emergency Response"}</a:t>
+            </a:r>
+          </a:p>
+          <a:p xmlns:a="http://schemas.openxmlformats.org/drawingml/2006/main">
+            <a:r>
+              <a:t/>
+            </a:r>
+          </a:p>
+          <a:p xmlns:a="http://schemas.openxmlformats.org/drawingml/2006/main">
+            <a:r>
+              <a:t>[Conclusion]</a:t>
+            </a:r>
+          </a:p>
+          <a:p xmlns:a="http://schemas.openxmlformats.org/drawingml/2006/main">
+            <a:r>
+              <a:t>The new sentences improve frame confidence and demo readability, but they do not materially improve element coverage or resolve weak spans.</a:t>
             </a:r>
           </a:p>
         </p:txBody>
@@ -530,7 +570,7 @@
   </p:cSld>
   <p:clrMap bg1="lt1" tx1="dk1" bg2="lt2" tx2="dk2" accent1="accent1" accent2="accent2" accent3="accent3" accent4="accent4" accent5="accent5" accent6="accent6" hlink="hlink" folHlink="folHlink"/>
   <p:sldLayoutIdLst>
-    <p:sldLayoutId xmlns:r="http://schemas.openxmlformats.org/officeDocument/2006/relationships" id="2147483649" r:id="Rbbc39d0ea19f4bad"/>
+    <p:sldLayoutId xmlns:r="http://schemas.openxmlformats.org/officeDocument/2006/relationships" id="2147483649" r:id="Rb57089c2cad648a4"/>
   </p:sldLayoutIdLst>
   <p:txStyles>
     <p:titleStyle>
@@ -1078,10 +1118,10 @@
       </p:grpSpPr>
       <p:sp>
         <p:nvSpPr>
-          <p:cNvPr id="43" name="title">
-            <a:extLst xmlns:a="http://schemas.openxmlformats.org/drawingml/2006/main">
-              <a:ext uri="{FF2B5EF4-FFF2-40B4-BE49-F238E27FC236}">
-                <a16:creationId xmlns:a16="http://schemas.microsoft.com/office/drawing/2014/main" id="{3BA650E6-DC3A-42BD-956F-B2C9722BD8D7}"/>
+          <p:cNvPr id="72" name="title">
+            <a:extLst xmlns:a="http://schemas.openxmlformats.org/drawingml/2006/main">
+              <a:ext uri="{FF2B5EF4-FFF2-40B4-BE49-F238E27FC236}">
+                <a16:creationId xmlns:a16="http://schemas.microsoft.com/office/drawing/2014/main" id="{0C3AD0D0-E2CE-4CE8-A50F-92CE2D0832B1}"/>
               </a:ext>
             </a:extLst>
           </p:cNvPr>
@@ -1127,7 +1167,7 @@
                 <a:ea typeface="Helvetica Neue"/>
                 <a:cs typeface="Helvetica Neue"/>
               </a:rPr>
-              <a:t>LLM revisions preserve frame mapping and improve confidence</a:t>
+              <a:t>Element spans are clearer in Case 1, but extraction quality is not fixed</a:t>
             </a:r>
           </a:p>
         </p:txBody>
@@ -1137,7 +1177,7 @@
           <p:cNvPr id="2" name="subtitle">
             <a:extLst xmlns:a="http://schemas.openxmlformats.org/drawingml/2006/main">
               <a:ext uri="{FF2B5EF4-FFF2-40B4-BE49-F238E27FC236}">
-                <a16:creationId xmlns:a16="http://schemas.microsoft.com/office/drawing/2014/main" id="{51D54761-8E54-4530-8DEF-01B2F8C5817C}"/>
+                <a16:creationId xmlns:a16="http://schemas.microsoft.com/office/drawing/2014/main" id="{1CE3D2FA-6CBD-416D-8A53-2F4CB8ECC401}"/>
               </a:ext>
             </a:extLst>
           </p:cNvPr>
@@ -1149,7 +1189,7 @@
         <p:spPr>
           <a:xfrm xmlns:a="http://schemas.openxmlformats.org/drawingml/2006/main">
             <a:off x="400050" y="990600"/>
-            <a:ext cx="10668000" cy="342900"/>
+            <a:ext cx="10858500" cy="400050"/>
           </a:xfrm>
           <a:prstGeom xmlns:a="http://schemas.openxmlformats.org/drawingml/2006/main" prst="rect">
             <a:avLst/>
@@ -1183,91 +1223,35 @@
                 <a:ea typeface="Helvetica Neue"/>
                 <a:cs typeface="Helvetica Neue"/>
               </a:rPr>
-              <a:t>Rewards_and_punishments · old demo text vs revised photo text · run through framenet_mapper.map_text</a:t>
-            </a:r>
-          </a:p>
-        </p:txBody>
-      </p:sp>
-      <p:sp>
-        <p:nvSpPr>
-          <p:cNvPr id="3" name="Case 1-header">
-            <a:extLst xmlns:a="http://schemas.openxmlformats.org/drawingml/2006/main">
-              <a:ext uri="{FF2B5EF4-FFF2-40B4-BE49-F238E27FC236}">
-                <a16:creationId xmlns:a16="http://schemas.microsoft.com/office/drawing/2014/main" id="{E2B35886-A558-43B6-98CC-FEC6B916FF7D}"/>
-              </a:ext>
-            </a:extLst>
-          </p:cNvPr>
-          <p:cNvSpPr>
-            <a:spLocks xmlns:a="http://schemas.openxmlformats.org/drawingml/2006/main" noGrp="1"/>
-          </p:cNvSpPr>
-          <p:nvPr/>
-        </p:nvSpPr>
-        <p:spPr>
-          <a:xfrm xmlns:a="http://schemas.openxmlformats.org/drawingml/2006/main">
-            <a:off x="400050" y="1485900"/>
-            <a:ext cx="7239000" cy="266700"/>
-          </a:xfrm>
-          <a:prstGeom xmlns:a="http://schemas.openxmlformats.org/drawingml/2006/main" prst="rect">
-            <a:avLst/>
-          </a:prstGeom>
-          <a:noFill xmlns:a="http://schemas.openxmlformats.org/drawingml/2006/main"/>
-          <a:ln xmlns:a="http://schemas.openxmlformats.org/drawingml/2006/main" w="0">
-            <a:noFill/>
-            <a:prstDash val="solid"/>
-          </a:ln>
-        </p:spPr>
-        <p:txBody>
-          <a:bodyPr xmlns:a="http://schemas.openxmlformats.org/drawingml/2006/main" anchor="t"/>
-          <a:lstStyle xmlns:a="http://schemas.openxmlformats.org/drawingml/2006/main"/>
-          <a:p xmlns:a="http://schemas.openxmlformats.org/drawingml/2006/main">
-            <a:pPr algn="l">
-              <a:defRPr sz="1800" b="1">
-                <a:solidFill>
-                  <a:srgbClr val="000000"/>
-                </a:solidFill>
-                <a:latin typeface="Helvetica Neue"/>
-                <a:ea typeface="Helvetica Neue"/>
-                <a:cs typeface="Helvetica Neue"/>
-              </a:defRPr>
-            </a:pPr>
-            <a:r>
-              <a:rPr sz="1800" b="1">
-                <a:solidFill>
-                  <a:srgbClr val="000000"/>
-                </a:solidFill>
-                <a:latin typeface="Helvetica Neue"/>
-                <a:ea typeface="Helvetica Neue"/>
-                <a:cs typeface="Helvetica Neue"/>
-              </a:rPr>
-              <a:t>Case 1: Fraud/access-code scenario</a:t>
-            </a:r>
-          </a:p>
-        </p:txBody>
-      </p:sp>
-      <p:sp>
-        <p:nvSpPr>
-          <p:cNvPr id="4" name="Case 1-old-panel">
-            <a:extLst xmlns:a="http://schemas.openxmlformats.org/drawingml/2006/main">
-              <a:ext uri="{FF2B5EF4-FFF2-40B4-BE49-F238E27FC236}">
-                <a16:creationId xmlns:a16="http://schemas.microsoft.com/office/drawing/2014/main" id="{17BB2A6F-10D8-4BD0-AEF3-5A7739803F99}"/>
-              </a:ext>
-            </a:extLst>
-          </p:cNvPr>
-          <p:cNvSpPr>
-            <a:spLocks xmlns:a="http://schemas.openxmlformats.org/drawingml/2006/main" noGrp="1"/>
-          </p:cNvSpPr>
-          <p:nvPr/>
-        </p:nvSpPr>
-        <p:spPr>
-          <a:xfrm xmlns:a="http://schemas.openxmlformats.org/drawingml/2006/main">
-            <a:off x="400050" y="1885950"/>
-            <a:ext cx="3524250" cy="1257300"/>
+              <a:t>Rewards_and_punishments · old vs LLM-revised examples · frame mapping remains stable; element coverage does not increase</a:t>
+            </a:r>
+          </a:p>
+        </p:txBody>
+      </p:sp>
+      <p:sp>
+        <p:nvSpPr>
+          <p:cNvPr id="3" name="left-panel">
+            <a:extLst xmlns:a="http://schemas.openxmlformats.org/drawingml/2006/main">
+              <a:ext uri="{FF2B5EF4-FFF2-40B4-BE49-F238E27FC236}">
+                <a16:creationId xmlns:a16="http://schemas.microsoft.com/office/drawing/2014/main" id="{06ECD91A-467F-4CB3-B927-71DB3E21B053}"/>
+              </a:ext>
+            </a:extLst>
+          </p:cNvPr>
+          <p:cNvSpPr>
+            <a:spLocks xmlns:a="http://schemas.openxmlformats.org/drawingml/2006/main" noGrp="1"/>
+          </p:cNvSpPr>
+          <p:nvPr/>
+        </p:nvSpPr>
+        <p:spPr>
+          <a:xfrm xmlns:a="http://schemas.openxmlformats.org/drawingml/2006/main">
+            <a:off x="400050" y="1676400"/>
+            <a:ext cx="3695700" cy="4267200"/>
           </a:xfrm>
           <a:prstGeom xmlns:a="http://schemas.openxmlformats.org/drawingml/2006/main" prst="rect">
             <a:avLst/>
           </a:prstGeom>
           <a:solidFill xmlns:a="http://schemas.openxmlformats.org/drawingml/2006/main">
-            <a:srgbClr val="F2F2F2"/>
+            <a:srgbClr val="F7F7F7"/>
           </a:solidFill>
           <a:ln xmlns:a="http://schemas.openxmlformats.org/drawingml/2006/main" w="9525">
             <a:solidFill>
@@ -1279,22 +1263,22 @@
       </p:sp>
       <p:sp>
         <p:nvSpPr>
-          <p:cNvPr id="5" name="Case 1-old-label">
-            <a:extLst xmlns:a="http://schemas.openxmlformats.org/drawingml/2006/main">
-              <a:ext uri="{FF2B5EF4-FFF2-40B4-BE49-F238E27FC236}">
-                <a16:creationId xmlns:a16="http://schemas.microsoft.com/office/drawing/2014/main" id="{F9305C56-7072-404F-9D4A-6E0E1048D48C}"/>
-              </a:ext>
-            </a:extLst>
-          </p:cNvPr>
-          <p:cNvSpPr>
-            <a:spLocks xmlns:a="http://schemas.openxmlformats.org/drawingml/2006/main" noGrp="1"/>
-          </p:cNvSpPr>
-          <p:nvPr/>
-        </p:nvSpPr>
-        <p:spPr>
-          <a:xfrm xmlns:a="http://schemas.openxmlformats.org/drawingml/2006/main">
-            <a:off x="571500" y="2019300"/>
-            <a:ext cx="3143250" cy="209550"/>
+          <p:cNvPr id="4" name="left-panel-title">
+            <a:extLst xmlns:a="http://schemas.openxmlformats.org/drawingml/2006/main">
+              <a:ext uri="{FF2B5EF4-FFF2-40B4-BE49-F238E27FC236}">
+                <a16:creationId xmlns:a16="http://schemas.microsoft.com/office/drawing/2014/main" id="{78583B3D-A881-4E29-B9AA-80521BC7B03E}"/>
+              </a:ext>
+            </a:extLst>
+          </p:cNvPr>
+          <p:cNvSpPr>
+            <a:spLocks xmlns:a="http://schemas.openxmlformats.org/drawingml/2006/main" noGrp="1"/>
+          </p:cNvSpPr>
+          <p:nvPr/>
+        </p:nvSpPr>
+        <p:spPr>
+          <a:xfrm xmlns:a="http://schemas.openxmlformats.org/drawingml/2006/main">
+            <a:off x="533400" y="1885950"/>
+            <a:ext cx="3333750" cy="266700"/>
           </a:xfrm>
           <a:prstGeom xmlns:a="http://schemas.openxmlformats.org/drawingml/2006/main" prst="rect">
             <a:avLst/>
@@ -1310,7 +1294,7 @@
           <a:lstStyle xmlns:a="http://schemas.openxmlformats.org/drawingml/2006/main"/>
           <a:p xmlns:a="http://schemas.openxmlformats.org/drawingml/2006/main">
             <a:pPr algn="l">
-              <a:defRPr sz="1200" b="1">
+              <a:defRPr sz="1800" b="1">
                 <a:solidFill>
                   <a:srgbClr val="000000"/>
                 </a:solidFill>
@@ -1320,7 +1304,7 @@
               </a:defRPr>
             </a:pPr>
             <a:r>
-              <a:rPr sz="1200" b="1">
+              <a:rPr sz="1800" b="1">
                 <a:solidFill>
                   <a:srgbClr val="000000"/>
                 </a:solidFill>
@@ -1328,29 +1312,29 @@
                 <a:ea typeface="Helvetica Neue"/>
                 <a:cs typeface="Helvetica Neue"/>
               </a:rPr>
-              <a:t>Original demo text</a:t>
-            </a:r>
-          </a:p>
-        </p:txBody>
-      </p:sp>
-      <p:sp>
-        <p:nvSpPr>
-          <p:cNvPr id="6" name="Case 1-old-text">
-            <a:extLst xmlns:a="http://schemas.openxmlformats.org/drawingml/2006/main">
-              <a:ext uri="{FF2B5EF4-FFF2-40B4-BE49-F238E27FC236}">
-                <a16:creationId xmlns:a16="http://schemas.microsoft.com/office/drawing/2014/main" id="{9A5C907C-5262-48C9-9622-CE75887329DC}"/>
-              </a:ext>
-            </a:extLst>
-          </p:cNvPr>
-          <p:cNvSpPr>
-            <a:spLocks xmlns:a="http://schemas.openxmlformats.org/drawingml/2006/main" noGrp="1"/>
-          </p:cNvSpPr>
-          <p:nvPr/>
-        </p:nvSpPr>
-        <p:spPr>
-          <a:xfrm xmlns:a="http://schemas.openxmlformats.org/drawingml/2006/main">
-            <a:off x="571500" y="2286000"/>
-            <a:ext cx="3143250" cy="781050"/>
+              <a:t>What changed in the actual run</a:t>
+            </a:r>
+          </a:p>
+        </p:txBody>
+      </p:sp>
+      <p:sp>
+        <p:nvSpPr>
+          <p:cNvPr id="5" name="Case 1 · fraud/access-code-title">
+            <a:extLst xmlns:a="http://schemas.openxmlformats.org/drawingml/2006/main">
+              <a:ext uri="{FF2B5EF4-FFF2-40B4-BE49-F238E27FC236}">
+                <a16:creationId xmlns:a16="http://schemas.microsoft.com/office/drawing/2014/main" id="{9F9CD7DF-5ECC-4743-A74C-D2E10FC33610}"/>
+              </a:ext>
+            </a:extLst>
+          </p:cNvPr>
+          <p:cNvSpPr>
+            <a:spLocks xmlns:a="http://schemas.openxmlformats.org/drawingml/2006/main" noGrp="1"/>
+          </p:cNvSpPr>
+          <p:nvPr/>
+        </p:nvSpPr>
+        <p:spPr>
+          <a:xfrm xmlns:a="http://schemas.openxmlformats.org/drawingml/2006/main">
+            <a:off x="533400" y="2362200"/>
+            <a:ext cx="3429000" cy="266700"/>
           </a:xfrm>
           <a:prstGeom xmlns:a="http://schemas.openxmlformats.org/drawingml/2006/main" prst="rect">
             <a:avLst/>
@@ -1366,9 +1350,9 @@
           <a:lstStyle xmlns:a="http://schemas.openxmlformats.org/drawingml/2006/main"/>
           <a:p xmlns:a="http://schemas.openxmlformats.org/drawingml/2006/main">
             <a:pPr algn="l">
-              <a:defRPr sz="1200" b="0">
-                <a:solidFill>
-                  <a:srgbClr val="222222"/>
+              <a:defRPr sz="1575" b="1">
+                <a:solidFill>
+                  <a:srgbClr val="000000"/>
                 </a:solidFill>
                 <a:latin typeface="Helvetica Neue"/>
                 <a:ea typeface="Helvetica Neue"/>
@@ -1376,37 +1360,37 @@
               </a:defRPr>
             </a:pPr>
             <a:r>
-              <a:rPr sz="1200" b="0">
-                <a:solidFill>
-                  <a:srgbClr val="222222"/>
+              <a:rPr sz="1575" b="1">
+                <a:solidFill>
+                  <a:srgbClr val="000000"/>
                 </a:solidFill>
                 <a:latin typeface="Helvetica Neue"/>
                 <a:ea typeface="Helvetica Neue"/>
                 <a:cs typeface="Helvetica Neue"/>
               </a:rPr>
-              <a:t>If fraudulent activity is suspected on an EI or EI Emergency Response Benefit (EI ERB) claim, the agent does not issue the access code.</a:t>
-            </a:r>
-          </a:p>
-        </p:txBody>
-      </p:sp>
-      <p:sp>
-        <p:nvSpPr>
-          <p:cNvPr id="7" name="Case 1-arrow">
-            <a:extLst xmlns:a="http://schemas.openxmlformats.org/drawingml/2006/main">
-              <a:ext uri="{FF2B5EF4-FFF2-40B4-BE49-F238E27FC236}">
-                <a16:creationId xmlns:a16="http://schemas.microsoft.com/office/drawing/2014/main" id="{9F4D28C7-326C-4C44-91C3-F1810E78BD77}"/>
-              </a:ext>
-            </a:extLst>
-          </p:cNvPr>
-          <p:cNvSpPr>
-            <a:spLocks xmlns:a="http://schemas.openxmlformats.org/drawingml/2006/main" noGrp="1"/>
-          </p:cNvSpPr>
-          <p:nvPr/>
-        </p:nvSpPr>
-        <p:spPr>
-          <a:xfrm xmlns:a="http://schemas.openxmlformats.org/drawingml/2006/main">
-            <a:off x="4057650" y="2343150"/>
-            <a:ext cx="342900" cy="342900"/>
+              <a:t>Case 1 · fraud/access-code</a:t>
+            </a:r>
+          </a:p>
+        </p:txBody>
+      </p:sp>
+      <p:sp>
+        <p:nvSpPr>
+          <p:cNvPr id="6" name="Case 1 · fraud/access-code-Frame-label">
+            <a:extLst xmlns:a="http://schemas.openxmlformats.org/drawingml/2006/main">
+              <a:ext uri="{FF2B5EF4-FFF2-40B4-BE49-F238E27FC236}">
+                <a16:creationId xmlns:a16="http://schemas.microsoft.com/office/drawing/2014/main" id="{D4E3B478-9C4C-4991-8E48-79234F3F0A0B}"/>
+              </a:ext>
+            </a:extLst>
+          </p:cNvPr>
+          <p:cNvSpPr>
+            <a:spLocks xmlns:a="http://schemas.openxmlformats.org/drawingml/2006/main" noGrp="1"/>
+          </p:cNvSpPr>
+          <p:nvPr/>
+        </p:nvSpPr>
+        <p:spPr>
+          <a:xfrm xmlns:a="http://schemas.openxmlformats.org/drawingml/2006/main">
+            <a:off x="685800" y="2762250"/>
+            <a:ext cx="1104900" cy="209550"/>
           </a:xfrm>
           <a:prstGeom xmlns:a="http://schemas.openxmlformats.org/drawingml/2006/main" prst="rect">
             <a:avLst/>
@@ -1421,10 +1405,10 @@
           <a:bodyPr xmlns:a="http://schemas.openxmlformats.org/drawingml/2006/main" anchor="t"/>
           <a:lstStyle xmlns:a="http://schemas.openxmlformats.org/drawingml/2006/main"/>
           <a:p xmlns:a="http://schemas.openxmlformats.org/drawingml/2006/main">
-            <a:pPr algn="ctr">
-              <a:defRPr sz="2250" b="1">
-                <a:solidFill>
-                  <a:srgbClr val="000000"/>
+            <a:pPr algn="l">
+              <a:defRPr sz="1200" b="0">
+                <a:solidFill>
+                  <a:srgbClr val="333333"/>
                 </a:solidFill>
                 <a:latin typeface="Helvetica Neue"/>
                 <a:ea typeface="Helvetica Neue"/>
@@ -1432,43 +1416,1183 @@
               </a:defRPr>
             </a:pPr>
             <a:r>
-              <a:rPr sz="2250" b="1">
+              <a:rPr sz="1200" b="0">
+                <a:solidFill>
+                  <a:srgbClr val="333333"/>
+                </a:solidFill>
+                <a:latin typeface="Helvetica Neue"/>
+                <a:ea typeface="Helvetica Neue"/>
+                <a:cs typeface="Helvetica Neue"/>
+              </a:rPr>
+              <a:t>Frame</a:t>
+            </a:r>
+          </a:p>
+        </p:txBody>
+      </p:sp>
+      <p:sp>
+        <p:nvSpPr>
+          <p:cNvPr id="7" name="Case 1 · fraud/access-code-Frame-value">
+            <a:extLst xmlns:a="http://schemas.openxmlformats.org/drawingml/2006/main">
+              <a:ext uri="{FF2B5EF4-FFF2-40B4-BE49-F238E27FC236}">
+                <a16:creationId xmlns:a16="http://schemas.microsoft.com/office/drawing/2014/main" id="{FCEF0AFA-BDC5-467D-BF14-07978101196D}"/>
+              </a:ext>
+            </a:extLst>
+          </p:cNvPr>
+          <p:cNvSpPr>
+            <a:spLocks xmlns:a="http://schemas.openxmlformats.org/drawingml/2006/main" noGrp="1"/>
+          </p:cNvSpPr>
+          <p:nvPr/>
+        </p:nvSpPr>
+        <p:spPr>
+          <a:xfrm xmlns:a="http://schemas.openxmlformats.org/drawingml/2006/main">
+            <a:off x="1866900" y="2762250"/>
+            <a:ext cx="2076450" cy="209550"/>
+          </a:xfrm>
+          <a:prstGeom xmlns:a="http://schemas.openxmlformats.org/drawingml/2006/main" prst="rect">
+            <a:avLst/>
+          </a:prstGeom>
+          <a:noFill xmlns:a="http://schemas.openxmlformats.org/drawingml/2006/main"/>
+          <a:ln xmlns:a="http://schemas.openxmlformats.org/drawingml/2006/main" w="0">
+            <a:noFill/>
+            <a:prstDash val="solid"/>
+          </a:ln>
+        </p:spPr>
+        <p:txBody>
+          <a:bodyPr xmlns:a="http://schemas.openxmlformats.org/drawingml/2006/main" anchor="t"/>
+          <a:lstStyle xmlns:a="http://schemas.openxmlformats.org/drawingml/2006/main"/>
+          <a:p xmlns:a="http://schemas.openxmlformats.org/drawingml/2006/main">
+            <a:pPr algn="l">
+              <a:defRPr sz="1200" b="1">
                 <a:solidFill>
                   <a:srgbClr val="000000"/>
                 </a:solidFill>
                 <a:latin typeface="Helvetica Neue"/>
                 <a:ea typeface="Helvetica Neue"/>
                 <a:cs typeface="Helvetica Neue"/>
+              </a:defRPr>
+            </a:pPr>
+            <a:r>
+              <a:rPr sz="1200" b="1">
+                <a:solidFill>
+                  <a:srgbClr val="000000"/>
+                </a:solidFill>
+                <a:latin typeface="Helvetica Neue"/>
+                <a:ea typeface="Helvetica Neue"/>
+                <a:cs typeface="Helvetica Neue"/>
               </a:rPr>
-              <a:t>→</a:t>
-            </a:r>
-          </a:p>
-        </p:txBody>
-      </p:sp>
-      <p:sp>
-        <p:nvSpPr>
-          <p:cNvPr id="8" name="Case 1-new-panel">
-            <a:extLst xmlns:a="http://schemas.openxmlformats.org/drawingml/2006/main">
-              <a:ext uri="{FF2B5EF4-FFF2-40B4-BE49-F238E27FC236}">
-                <a16:creationId xmlns:a16="http://schemas.microsoft.com/office/drawing/2014/main" id="{9867D205-1667-445D-86C7-998283C28C99}"/>
-              </a:ext>
-            </a:extLst>
-          </p:cNvPr>
-          <p:cNvSpPr>
-            <a:spLocks xmlns:a="http://schemas.openxmlformats.org/drawingml/2006/main" noGrp="1"/>
-          </p:cNvSpPr>
-          <p:nvPr/>
-        </p:nvSpPr>
-        <p:spPr>
-          <a:xfrm xmlns:a="http://schemas.openxmlformats.org/drawingml/2006/main">
-            <a:off x="4419600" y="1885950"/>
-            <a:ext cx="3524250" cy="1257300"/>
+              <a:t>Rewards_and_punishments</a:t>
+            </a:r>
+          </a:p>
+        </p:txBody>
+      </p:sp>
+      <p:sp>
+        <p:nvSpPr>
+          <p:cNvPr id="8" name="Case 1 · fraud/access-code-BERT frame-label">
+            <a:extLst xmlns:a="http://schemas.openxmlformats.org/drawingml/2006/main">
+              <a:ext uri="{FF2B5EF4-FFF2-40B4-BE49-F238E27FC236}">
+                <a16:creationId xmlns:a16="http://schemas.microsoft.com/office/drawing/2014/main" id="{875AA9C1-20BA-403B-A996-3C0D235E2FC5}"/>
+              </a:ext>
+            </a:extLst>
+          </p:cNvPr>
+          <p:cNvSpPr>
+            <a:spLocks xmlns:a="http://schemas.openxmlformats.org/drawingml/2006/main" noGrp="1"/>
+          </p:cNvSpPr>
+          <p:nvPr/>
+        </p:nvSpPr>
+        <p:spPr>
+          <a:xfrm xmlns:a="http://schemas.openxmlformats.org/drawingml/2006/main">
+            <a:off x="685800" y="3086100"/>
+            <a:ext cx="1104900" cy="209550"/>
+          </a:xfrm>
+          <a:prstGeom xmlns:a="http://schemas.openxmlformats.org/drawingml/2006/main" prst="rect">
+            <a:avLst/>
+          </a:prstGeom>
+          <a:noFill xmlns:a="http://schemas.openxmlformats.org/drawingml/2006/main"/>
+          <a:ln xmlns:a="http://schemas.openxmlformats.org/drawingml/2006/main" w="0">
+            <a:noFill/>
+            <a:prstDash val="solid"/>
+          </a:ln>
+        </p:spPr>
+        <p:txBody>
+          <a:bodyPr xmlns:a="http://schemas.openxmlformats.org/drawingml/2006/main" anchor="t"/>
+          <a:lstStyle xmlns:a="http://schemas.openxmlformats.org/drawingml/2006/main"/>
+          <a:p xmlns:a="http://schemas.openxmlformats.org/drawingml/2006/main">
+            <a:pPr algn="l">
+              <a:defRPr sz="1200" b="0">
+                <a:solidFill>
+                  <a:srgbClr val="333333"/>
+                </a:solidFill>
+                <a:latin typeface="Helvetica Neue"/>
+                <a:ea typeface="Helvetica Neue"/>
+                <a:cs typeface="Helvetica Neue"/>
+              </a:defRPr>
+            </a:pPr>
+            <a:r>
+              <a:rPr sz="1200" b="0">
+                <a:solidFill>
+                  <a:srgbClr val="333333"/>
+                </a:solidFill>
+                <a:latin typeface="Helvetica Neue"/>
+                <a:ea typeface="Helvetica Neue"/>
+                <a:cs typeface="Helvetica Neue"/>
+              </a:rPr>
+              <a:t>BERT frame</a:t>
+            </a:r>
+          </a:p>
+        </p:txBody>
+      </p:sp>
+      <p:sp>
+        <p:nvSpPr>
+          <p:cNvPr id="9" name="Case 1 · fraud/access-code-BERT frame-value">
+            <a:extLst xmlns:a="http://schemas.openxmlformats.org/drawingml/2006/main">
+              <a:ext uri="{FF2B5EF4-FFF2-40B4-BE49-F238E27FC236}">
+                <a16:creationId xmlns:a16="http://schemas.microsoft.com/office/drawing/2014/main" id="{04E61A87-D7F6-4B39-A658-16B5E340CB2D}"/>
+              </a:ext>
+            </a:extLst>
+          </p:cNvPr>
+          <p:cNvSpPr>
+            <a:spLocks xmlns:a="http://schemas.openxmlformats.org/drawingml/2006/main" noGrp="1"/>
+          </p:cNvSpPr>
+          <p:nvPr/>
+        </p:nvSpPr>
+        <p:spPr>
+          <a:xfrm xmlns:a="http://schemas.openxmlformats.org/drawingml/2006/main">
+            <a:off x="1866900" y="3086100"/>
+            <a:ext cx="2076450" cy="209550"/>
+          </a:xfrm>
+          <a:prstGeom xmlns:a="http://schemas.openxmlformats.org/drawingml/2006/main" prst="rect">
+            <a:avLst/>
+          </a:prstGeom>
+          <a:noFill xmlns:a="http://schemas.openxmlformats.org/drawingml/2006/main"/>
+          <a:ln xmlns:a="http://schemas.openxmlformats.org/drawingml/2006/main" w="0">
+            <a:noFill/>
+            <a:prstDash val="solid"/>
+          </a:ln>
+        </p:spPr>
+        <p:txBody>
+          <a:bodyPr xmlns:a="http://schemas.openxmlformats.org/drawingml/2006/main" anchor="t"/>
+          <a:lstStyle xmlns:a="http://schemas.openxmlformats.org/drawingml/2006/main"/>
+          <a:p xmlns:a="http://schemas.openxmlformats.org/drawingml/2006/main">
+            <a:pPr algn="l">
+              <a:defRPr sz="1200" b="1">
+                <a:solidFill>
+                  <a:srgbClr val="000000"/>
+                </a:solidFill>
+                <a:latin typeface="Helvetica Neue"/>
+                <a:ea typeface="Helvetica Neue"/>
+                <a:cs typeface="Helvetica Neue"/>
+              </a:defRPr>
+            </a:pPr>
+            <a:r>
+              <a:rPr sz="1200" b="1">
+                <a:solidFill>
+                  <a:srgbClr val="000000"/>
+                </a:solidFill>
+                <a:latin typeface="Helvetica Neue"/>
+                <a:ea typeface="Helvetica Neue"/>
+                <a:cs typeface="Helvetica Neue"/>
+              </a:rPr>
+              <a:t>0.9691 → 0.9716</a:t>
+            </a:r>
+          </a:p>
+        </p:txBody>
+      </p:sp>
+      <p:sp>
+        <p:nvSpPr>
+          <p:cNvPr id="10" name="Case 1 · fraud/access-code-Filled FEs-label">
+            <a:extLst xmlns:a="http://schemas.openxmlformats.org/drawingml/2006/main">
+              <a:ext uri="{FF2B5EF4-FFF2-40B4-BE49-F238E27FC236}">
+                <a16:creationId xmlns:a16="http://schemas.microsoft.com/office/drawing/2014/main" id="{E5E94731-66AC-48A8-9E55-252060980526}"/>
+              </a:ext>
+            </a:extLst>
+          </p:cNvPr>
+          <p:cNvSpPr>
+            <a:spLocks xmlns:a="http://schemas.openxmlformats.org/drawingml/2006/main" noGrp="1"/>
+          </p:cNvSpPr>
+          <p:nvPr/>
+        </p:nvSpPr>
+        <p:spPr>
+          <a:xfrm xmlns:a="http://schemas.openxmlformats.org/drawingml/2006/main">
+            <a:off x="685800" y="3409950"/>
+            <a:ext cx="1104900" cy="209550"/>
+          </a:xfrm>
+          <a:prstGeom xmlns:a="http://schemas.openxmlformats.org/drawingml/2006/main" prst="rect">
+            <a:avLst/>
+          </a:prstGeom>
+          <a:noFill xmlns:a="http://schemas.openxmlformats.org/drawingml/2006/main"/>
+          <a:ln xmlns:a="http://schemas.openxmlformats.org/drawingml/2006/main" w="0">
+            <a:noFill/>
+            <a:prstDash val="solid"/>
+          </a:ln>
+        </p:spPr>
+        <p:txBody>
+          <a:bodyPr xmlns:a="http://schemas.openxmlformats.org/drawingml/2006/main" anchor="t"/>
+          <a:lstStyle xmlns:a="http://schemas.openxmlformats.org/drawingml/2006/main"/>
+          <a:p xmlns:a="http://schemas.openxmlformats.org/drawingml/2006/main">
+            <a:pPr algn="l">
+              <a:defRPr sz="1200" b="0">
+                <a:solidFill>
+                  <a:srgbClr val="333333"/>
+                </a:solidFill>
+                <a:latin typeface="Helvetica Neue"/>
+                <a:ea typeface="Helvetica Neue"/>
+                <a:cs typeface="Helvetica Neue"/>
+              </a:defRPr>
+            </a:pPr>
+            <a:r>
+              <a:rPr sz="1200" b="0">
+                <a:solidFill>
+                  <a:srgbClr val="333333"/>
+                </a:solidFill>
+                <a:latin typeface="Helvetica Neue"/>
+                <a:ea typeface="Helvetica Neue"/>
+                <a:cs typeface="Helvetica Neue"/>
+              </a:rPr>
+              <a:t>Filled FEs</a:t>
+            </a:r>
+          </a:p>
+        </p:txBody>
+      </p:sp>
+      <p:sp>
+        <p:nvSpPr>
+          <p:cNvPr id="11" name="Case 1 · fraud/access-code-Filled FEs-value">
+            <a:extLst xmlns:a="http://schemas.openxmlformats.org/drawingml/2006/main">
+              <a:ext uri="{FF2B5EF4-FFF2-40B4-BE49-F238E27FC236}">
+                <a16:creationId xmlns:a16="http://schemas.microsoft.com/office/drawing/2014/main" id="{97F8E886-0CC7-492F-9FDD-1C87F79C9449}"/>
+              </a:ext>
+            </a:extLst>
+          </p:cNvPr>
+          <p:cNvSpPr>
+            <a:spLocks xmlns:a="http://schemas.openxmlformats.org/drawingml/2006/main" noGrp="1"/>
+          </p:cNvSpPr>
+          <p:nvPr/>
+        </p:nvSpPr>
+        <p:spPr>
+          <a:xfrm xmlns:a="http://schemas.openxmlformats.org/drawingml/2006/main">
+            <a:off x="1866900" y="3409950"/>
+            <a:ext cx="2076450" cy="209550"/>
+          </a:xfrm>
+          <a:prstGeom xmlns:a="http://schemas.openxmlformats.org/drawingml/2006/main" prst="rect">
+            <a:avLst/>
+          </a:prstGeom>
+          <a:noFill xmlns:a="http://schemas.openxmlformats.org/drawingml/2006/main"/>
+          <a:ln xmlns:a="http://schemas.openxmlformats.org/drawingml/2006/main" w="0">
+            <a:noFill/>
+            <a:prstDash val="solid"/>
+          </a:ln>
+        </p:spPr>
+        <p:txBody>
+          <a:bodyPr xmlns:a="http://schemas.openxmlformats.org/drawingml/2006/main" anchor="t"/>
+          <a:lstStyle xmlns:a="http://schemas.openxmlformats.org/drawingml/2006/main"/>
+          <a:p xmlns:a="http://schemas.openxmlformats.org/drawingml/2006/main">
+            <a:pPr algn="l">
+              <a:defRPr sz="1200" b="1">
+                <a:solidFill>
+                  <a:srgbClr val="000000"/>
+                </a:solidFill>
+                <a:latin typeface="Helvetica Neue"/>
+                <a:ea typeface="Helvetica Neue"/>
+                <a:cs typeface="Helvetica Neue"/>
+              </a:defRPr>
+            </a:pPr>
+            <a:r>
+              <a:rPr sz="1200" b="1">
+                <a:solidFill>
+                  <a:srgbClr val="000000"/>
+                </a:solidFill>
+                <a:latin typeface="Helvetica Neue"/>
+                <a:ea typeface="Helvetica Neue"/>
+                <a:cs typeface="Helvetica Neue"/>
+              </a:rPr>
+              <a:t>4 → 4</a:t>
+            </a:r>
+          </a:p>
+        </p:txBody>
+      </p:sp>
+      <p:sp>
+        <p:nvSpPr>
+          <p:cNvPr id="12" name="Case 2 · EI ERB work-item routing-title">
+            <a:extLst xmlns:a="http://schemas.openxmlformats.org/drawingml/2006/main">
+              <a:ext uri="{FF2B5EF4-FFF2-40B4-BE49-F238E27FC236}">
+                <a16:creationId xmlns:a16="http://schemas.microsoft.com/office/drawing/2014/main" id="{D4C538BF-8620-4847-A6BA-0DC657AEFD07}"/>
+              </a:ext>
+            </a:extLst>
+          </p:cNvPr>
+          <p:cNvSpPr>
+            <a:spLocks xmlns:a="http://schemas.openxmlformats.org/drawingml/2006/main" noGrp="1"/>
+          </p:cNvSpPr>
+          <p:nvPr/>
+        </p:nvSpPr>
+        <p:spPr>
+          <a:xfrm xmlns:a="http://schemas.openxmlformats.org/drawingml/2006/main">
+            <a:off x="533400" y="3733800"/>
+            <a:ext cx="3429000" cy="266700"/>
+          </a:xfrm>
+          <a:prstGeom xmlns:a="http://schemas.openxmlformats.org/drawingml/2006/main" prst="rect">
+            <a:avLst/>
+          </a:prstGeom>
+          <a:noFill xmlns:a="http://schemas.openxmlformats.org/drawingml/2006/main"/>
+          <a:ln xmlns:a="http://schemas.openxmlformats.org/drawingml/2006/main" w="0">
+            <a:noFill/>
+            <a:prstDash val="solid"/>
+          </a:ln>
+        </p:spPr>
+        <p:txBody>
+          <a:bodyPr xmlns:a="http://schemas.openxmlformats.org/drawingml/2006/main" anchor="t"/>
+          <a:lstStyle xmlns:a="http://schemas.openxmlformats.org/drawingml/2006/main"/>
+          <a:p xmlns:a="http://schemas.openxmlformats.org/drawingml/2006/main">
+            <a:pPr algn="l">
+              <a:defRPr sz="1575" b="1">
+                <a:solidFill>
+                  <a:srgbClr val="000000"/>
+                </a:solidFill>
+                <a:latin typeface="Helvetica Neue"/>
+                <a:ea typeface="Helvetica Neue"/>
+                <a:cs typeface="Helvetica Neue"/>
+              </a:defRPr>
+            </a:pPr>
+            <a:r>
+              <a:rPr sz="1575" b="1">
+                <a:solidFill>
+                  <a:srgbClr val="000000"/>
+                </a:solidFill>
+                <a:latin typeface="Helvetica Neue"/>
+                <a:ea typeface="Helvetica Neue"/>
+                <a:cs typeface="Helvetica Neue"/>
+              </a:rPr>
+              <a:t>Case 2 · EI ERB work-item routing</a:t>
+            </a:r>
+          </a:p>
+        </p:txBody>
+      </p:sp>
+      <p:sp>
+        <p:nvSpPr>
+          <p:cNvPr id="13" name="Case 2 · EI ERB work-item routing-Frame-label">
+            <a:extLst xmlns:a="http://schemas.openxmlformats.org/drawingml/2006/main">
+              <a:ext uri="{FF2B5EF4-FFF2-40B4-BE49-F238E27FC236}">
+                <a16:creationId xmlns:a16="http://schemas.microsoft.com/office/drawing/2014/main" id="{11A558B2-0AA6-42D1-B1BF-8E9CF89F9C3F}"/>
+              </a:ext>
+            </a:extLst>
+          </p:cNvPr>
+          <p:cNvSpPr>
+            <a:spLocks xmlns:a="http://schemas.openxmlformats.org/drawingml/2006/main" noGrp="1"/>
+          </p:cNvSpPr>
+          <p:nvPr/>
+        </p:nvSpPr>
+        <p:spPr>
+          <a:xfrm xmlns:a="http://schemas.openxmlformats.org/drawingml/2006/main">
+            <a:off x="685800" y="4133850"/>
+            <a:ext cx="1104900" cy="209550"/>
+          </a:xfrm>
+          <a:prstGeom xmlns:a="http://schemas.openxmlformats.org/drawingml/2006/main" prst="rect">
+            <a:avLst/>
+          </a:prstGeom>
+          <a:noFill xmlns:a="http://schemas.openxmlformats.org/drawingml/2006/main"/>
+          <a:ln xmlns:a="http://schemas.openxmlformats.org/drawingml/2006/main" w="0">
+            <a:noFill/>
+            <a:prstDash val="solid"/>
+          </a:ln>
+        </p:spPr>
+        <p:txBody>
+          <a:bodyPr xmlns:a="http://schemas.openxmlformats.org/drawingml/2006/main" anchor="t"/>
+          <a:lstStyle xmlns:a="http://schemas.openxmlformats.org/drawingml/2006/main"/>
+          <a:p xmlns:a="http://schemas.openxmlformats.org/drawingml/2006/main">
+            <a:pPr algn="l">
+              <a:defRPr sz="1200" b="0">
+                <a:solidFill>
+                  <a:srgbClr val="333333"/>
+                </a:solidFill>
+                <a:latin typeface="Helvetica Neue"/>
+                <a:ea typeface="Helvetica Neue"/>
+                <a:cs typeface="Helvetica Neue"/>
+              </a:defRPr>
+            </a:pPr>
+            <a:r>
+              <a:rPr sz="1200" b="0">
+                <a:solidFill>
+                  <a:srgbClr val="333333"/>
+                </a:solidFill>
+                <a:latin typeface="Helvetica Neue"/>
+                <a:ea typeface="Helvetica Neue"/>
+                <a:cs typeface="Helvetica Neue"/>
+              </a:rPr>
+              <a:t>Frame</a:t>
+            </a:r>
+          </a:p>
+        </p:txBody>
+      </p:sp>
+      <p:sp>
+        <p:nvSpPr>
+          <p:cNvPr id="14" name="Case 2 · EI ERB work-item routing-Frame-value">
+            <a:extLst xmlns:a="http://schemas.openxmlformats.org/drawingml/2006/main">
+              <a:ext uri="{FF2B5EF4-FFF2-40B4-BE49-F238E27FC236}">
+                <a16:creationId xmlns:a16="http://schemas.microsoft.com/office/drawing/2014/main" id="{4AAE28CC-BE3F-4714-A528-D427B1C55692}"/>
+              </a:ext>
+            </a:extLst>
+          </p:cNvPr>
+          <p:cNvSpPr>
+            <a:spLocks xmlns:a="http://schemas.openxmlformats.org/drawingml/2006/main" noGrp="1"/>
+          </p:cNvSpPr>
+          <p:nvPr/>
+        </p:nvSpPr>
+        <p:spPr>
+          <a:xfrm xmlns:a="http://schemas.openxmlformats.org/drawingml/2006/main">
+            <a:off x="1866900" y="4133850"/>
+            <a:ext cx="2076450" cy="209550"/>
+          </a:xfrm>
+          <a:prstGeom xmlns:a="http://schemas.openxmlformats.org/drawingml/2006/main" prst="rect">
+            <a:avLst/>
+          </a:prstGeom>
+          <a:noFill xmlns:a="http://schemas.openxmlformats.org/drawingml/2006/main"/>
+          <a:ln xmlns:a="http://schemas.openxmlformats.org/drawingml/2006/main" w="0">
+            <a:noFill/>
+            <a:prstDash val="solid"/>
+          </a:ln>
+        </p:spPr>
+        <p:txBody>
+          <a:bodyPr xmlns:a="http://schemas.openxmlformats.org/drawingml/2006/main" anchor="t"/>
+          <a:lstStyle xmlns:a="http://schemas.openxmlformats.org/drawingml/2006/main"/>
+          <a:p xmlns:a="http://schemas.openxmlformats.org/drawingml/2006/main">
+            <a:pPr algn="l">
+              <a:defRPr sz="1200" b="1">
+                <a:solidFill>
+                  <a:srgbClr val="000000"/>
+                </a:solidFill>
+                <a:latin typeface="Helvetica Neue"/>
+                <a:ea typeface="Helvetica Neue"/>
+                <a:cs typeface="Helvetica Neue"/>
+              </a:defRPr>
+            </a:pPr>
+            <a:r>
+              <a:rPr sz="1200" b="1">
+                <a:solidFill>
+                  <a:srgbClr val="000000"/>
+                </a:solidFill>
+                <a:latin typeface="Helvetica Neue"/>
+                <a:ea typeface="Helvetica Neue"/>
+                <a:cs typeface="Helvetica Neue"/>
+              </a:rPr>
+              <a:t>Rewards_and_punishments</a:t>
+            </a:r>
+          </a:p>
+        </p:txBody>
+      </p:sp>
+      <p:sp>
+        <p:nvSpPr>
+          <p:cNvPr id="15" name="Case 2 · EI ERB work-item routing-BERT frame-label">
+            <a:extLst xmlns:a="http://schemas.openxmlformats.org/drawingml/2006/main">
+              <a:ext uri="{FF2B5EF4-FFF2-40B4-BE49-F238E27FC236}">
+                <a16:creationId xmlns:a16="http://schemas.microsoft.com/office/drawing/2014/main" id="{C9F2AE15-DBD3-41CD-9D9B-19BF02DE84D3}"/>
+              </a:ext>
+            </a:extLst>
+          </p:cNvPr>
+          <p:cNvSpPr>
+            <a:spLocks xmlns:a="http://schemas.openxmlformats.org/drawingml/2006/main" noGrp="1"/>
+          </p:cNvSpPr>
+          <p:nvPr/>
+        </p:nvSpPr>
+        <p:spPr>
+          <a:xfrm xmlns:a="http://schemas.openxmlformats.org/drawingml/2006/main">
+            <a:off x="685800" y="4457700"/>
+            <a:ext cx="1104900" cy="209550"/>
+          </a:xfrm>
+          <a:prstGeom xmlns:a="http://schemas.openxmlformats.org/drawingml/2006/main" prst="rect">
+            <a:avLst/>
+          </a:prstGeom>
+          <a:noFill xmlns:a="http://schemas.openxmlformats.org/drawingml/2006/main"/>
+          <a:ln xmlns:a="http://schemas.openxmlformats.org/drawingml/2006/main" w="0">
+            <a:noFill/>
+            <a:prstDash val="solid"/>
+          </a:ln>
+        </p:spPr>
+        <p:txBody>
+          <a:bodyPr xmlns:a="http://schemas.openxmlformats.org/drawingml/2006/main" anchor="t"/>
+          <a:lstStyle xmlns:a="http://schemas.openxmlformats.org/drawingml/2006/main"/>
+          <a:p xmlns:a="http://schemas.openxmlformats.org/drawingml/2006/main">
+            <a:pPr algn="l">
+              <a:defRPr sz="1200" b="0">
+                <a:solidFill>
+                  <a:srgbClr val="333333"/>
+                </a:solidFill>
+                <a:latin typeface="Helvetica Neue"/>
+                <a:ea typeface="Helvetica Neue"/>
+                <a:cs typeface="Helvetica Neue"/>
+              </a:defRPr>
+            </a:pPr>
+            <a:r>
+              <a:rPr sz="1200" b="0">
+                <a:solidFill>
+                  <a:srgbClr val="333333"/>
+                </a:solidFill>
+                <a:latin typeface="Helvetica Neue"/>
+                <a:ea typeface="Helvetica Neue"/>
+                <a:cs typeface="Helvetica Neue"/>
+              </a:rPr>
+              <a:t>BERT frame</a:t>
+            </a:r>
+          </a:p>
+        </p:txBody>
+      </p:sp>
+      <p:sp>
+        <p:nvSpPr>
+          <p:cNvPr id="16" name="Case 2 · EI ERB work-item routing-BERT frame-value">
+            <a:extLst xmlns:a="http://schemas.openxmlformats.org/drawingml/2006/main">
+              <a:ext uri="{FF2B5EF4-FFF2-40B4-BE49-F238E27FC236}">
+                <a16:creationId xmlns:a16="http://schemas.microsoft.com/office/drawing/2014/main" id="{95AEDF3E-6EA1-43F4-BE7B-61B34832B5DA}"/>
+              </a:ext>
+            </a:extLst>
+          </p:cNvPr>
+          <p:cNvSpPr>
+            <a:spLocks xmlns:a="http://schemas.openxmlformats.org/drawingml/2006/main" noGrp="1"/>
+          </p:cNvSpPr>
+          <p:nvPr/>
+        </p:nvSpPr>
+        <p:spPr>
+          <a:xfrm xmlns:a="http://schemas.openxmlformats.org/drawingml/2006/main">
+            <a:off x="1866900" y="4457700"/>
+            <a:ext cx="2076450" cy="209550"/>
+          </a:xfrm>
+          <a:prstGeom xmlns:a="http://schemas.openxmlformats.org/drawingml/2006/main" prst="rect">
+            <a:avLst/>
+          </a:prstGeom>
+          <a:noFill xmlns:a="http://schemas.openxmlformats.org/drawingml/2006/main"/>
+          <a:ln xmlns:a="http://schemas.openxmlformats.org/drawingml/2006/main" w="0">
+            <a:noFill/>
+            <a:prstDash val="solid"/>
+          </a:ln>
+        </p:spPr>
+        <p:txBody>
+          <a:bodyPr xmlns:a="http://schemas.openxmlformats.org/drawingml/2006/main" anchor="t"/>
+          <a:lstStyle xmlns:a="http://schemas.openxmlformats.org/drawingml/2006/main"/>
+          <a:p xmlns:a="http://schemas.openxmlformats.org/drawingml/2006/main">
+            <a:pPr algn="l">
+              <a:defRPr sz="1200" b="1">
+                <a:solidFill>
+                  <a:srgbClr val="000000"/>
+                </a:solidFill>
+                <a:latin typeface="Helvetica Neue"/>
+                <a:ea typeface="Helvetica Neue"/>
+                <a:cs typeface="Helvetica Neue"/>
+              </a:defRPr>
+            </a:pPr>
+            <a:r>
+              <a:rPr sz="1200" b="1">
+                <a:solidFill>
+                  <a:srgbClr val="000000"/>
+                </a:solidFill>
+                <a:latin typeface="Helvetica Neue"/>
+                <a:ea typeface="Helvetica Neue"/>
+                <a:cs typeface="Helvetica Neue"/>
+              </a:rPr>
+              <a:t>0.9715 → 0.9787</a:t>
+            </a:r>
+          </a:p>
+        </p:txBody>
+      </p:sp>
+      <p:sp>
+        <p:nvSpPr>
+          <p:cNvPr id="17" name="Case 2 · EI ERB work-item routing-Filled FEs-label">
+            <a:extLst xmlns:a="http://schemas.openxmlformats.org/drawingml/2006/main">
+              <a:ext uri="{FF2B5EF4-FFF2-40B4-BE49-F238E27FC236}">
+                <a16:creationId xmlns:a16="http://schemas.microsoft.com/office/drawing/2014/main" id="{9A83DE39-C480-4697-B9B5-D2A227844D75}"/>
+              </a:ext>
+            </a:extLst>
+          </p:cNvPr>
+          <p:cNvSpPr>
+            <a:spLocks xmlns:a="http://schemas.openxmlformats.org/drawingml/2006/main" noGrp="1"/>
+          </p:cNvSpPr>
+          <p:nvPr/>
+        </p:nvSpPr>
+        <p:spPr>
+          <a:xfrm xmlns:a="http://schemas.openxmlformats.org/drawingml/2006/main">
+            <a:off x="685800" y="4781550"/>
+            <a:ext cx="1104900" cy="209550"/>
+          </a:xfrm>
+          <a:prstGeom xmlns:a="http://schemas.openxmlformats.org/drawingml/2006/main" prst="rect">
+            <a:avLst/>
+          </a:prstGeom>
+          <a:noFill xmlns:a="http://schemas.openxmlformats.org/drawingml/2006/main"/>
+          <a:ln xmlns:a="http://schemas.openxmlformats.org/drawingml/2006/main" w="0">
+            <a:noFill/>
+            <a:prstDash val="solid"/>
+          </a:ln>
+        </p:spPr>
+        <p:txBody>
+          <a:bodyPr xmlns:a="http://schemas.openxmlformats.org/drawingml/2006/main" anchor="t"/>
+          <a:lstStyle xmlns:a="http://schemas.openxmlformats.org/drawingml/2006/main"/>
+          <a:p xmlns:a="http://schemas.openxmlformats.org/drawingml/2006/main">
+            <a:pPr algn="l">
+              <a:defRPr sz="1200" b="0">
+                <a:solidFill>
+                  <a:srgbClr val="333333"/>
+                </a:solidFill>
+                <a:latin typeface="Helvetica Neue"/>
+                <a:ea typeface="Helvetica Neue"/>
+                <a:cs typeface="Helvetica Neue"/>
+              </a:defRPr>
+            </a:pPr>
+            <a:r>
+              <a:rPr sz="1200" b="0">
+                <a:solidFill>
+                  <a:srgbClr val="333333"/>
+                </a:solidFill>
+                <a:latin typeface="Helvetica Neue"/>
+                <a:ea typeface="Helvetica Neue"/>
+                <a:cs typeface="Helvetica Neue"/>
+              </a:rPr>
+              <a:t>Filled FEs</a:t>
+            </a:r>
+          </a:p>
+        </p:txBody>
+      </p:sp>
+      <p:sp>
+        <p:nvSpPr>
+          <p:cNvPr id="18" name="Case 2 · EI ERB work-item routing-Filled FEs-value">
+            <a:extLst xmlns:a="http://schemas.openxmlformats.org/drawingml/2006/main">
+              <a:ext uri="{FF2B5EF4-FFF2-40B4-BE49-F238E27FC236}">
+                <a16:creationId xmlns:a16="http://schemas.microsoft.com/office/drawing/2014/main" id="{D9A81E5F-C598-4038-8114-869689A22E0F}"/>
+              </a:ext>
+            </a:extLst>
+          </p:cNvPr>
+          <p:cNvSpPr>
+            <a:spLocks xmlns:a="http://schemas.openxmlformats.org/drawingml/2006/main" noGrp="1"/>
+          </p:cNvSpPr>
+          <p:nvPr/>
+        </p:nvSpPr>
+        <p:spPr>
+          <a:xfrm xmlns:a="http://schemas.openxmlformats.org/drawingml/2006/main">
+            <a:off x="1866900" y="4781550"/>
+            <a:ext cx="2076450" cy="209550"/>
+          </a:xfrm>
+          <a:prstGeom xmlns:a="http://schemas.openxmlformats.org/drawingml/2006/main" prst="rect">
+            <a:avLst/>
+          </a:prstGeom>
+          <a:noFill xmlns:a="http://schemas.openxmlformats.org/drawingml/2006/main"/>
+          <a:ln xmlns:a="http://schemas.openxmlformats.org/drawingml/2006/main" w="0">
+            <a:noFill/>
+            <a:prstDash val="solid"/>
+          </a:ln>
+        </p:spPr>
+        <p:txBody>
+          <a:bodyPr xmlns:a="http://schemas.openxmlformats.org/drawingml/2006/main" anchor="t"/>
+          <a:lstStyle xmlns:a="http://schemas.openxmlformats.org/drawingml/2006/main"/>
+          <a:p xmlns:a="http://schemas.openxmlformats.org/drawingml/2006/main">
+            <a:pPr algn="l">
+              <a:defRPr sz="1200" b="1">
+                <a:solidFill>
+                  <a:srgbClr val="000000"/>
+                </a:solidFill>
+                <a:latin typeface="Helvetica Neue"/>
+                <a:ea typeface="Helvetica Neue"/>
+                <a:cs typeface="Helvetica Neue"/>
+              </a:defRPr>
+            </a:pPr>
+            <a:r>
+              <a:rPr sz="1200" b="1">
+                <a:solidFill>
+                  <a:srgbClr val="000000"/>
+                </a:solidFill>
+                <a:latin typeface="Helvetica Neue"/>
+                <a:ea typeface="Helvetica Neue"/>
+                <a:cs typeface="Helvetica Neue"/>
+              </a:rPr>
+              <a:t>3 → 3</a:t>
+            </a:r>
+          </a:p>
+        </p:txBody>
+      </p:sp>
+      <p:sp>
+        <p:nvSpPr>
+          <p:cNvPr id="19" name="bert-qa-note">
+            <a:extLst xmlns:a="http://schemas.openxmlformats.org/drawingml/2006/main">
+              <a:ext uri="{FF2B5EF4-FFF2-40B4-BE49-F238E27FC236}">
+                <a16:creationId xmlns:a16="http://schemas.microsoft.com/office/drawing/2014/main" id="{95A6BAC1-696B-40F1-828F-26AC744D0BDA}"/>
+              </a:ext>
+            </a:extLst>
+          </p:cNvPr>
+          <p:cNvSpPr>
+            <a:spLocks xmlns:a="http://schemas.openxmlformats.org/drawingml/2006/main" noGrp="1"/>
+          </p:cNvSpPr>
+          <p:nvPr/>
+        </p:nvSpPr>
+        <p:spPr>
+          <a:xfrm xmlns:a="http://schemas.openxmlformats.org/drawingml/2006/main">
+            <a:off x="533400" y="5124450"/>
+            <a:ext cx="3333750" cy="742950"/>
+          </a:xfrm>
+          <a:prstGeom xmlns:a="http://schemas.openxmlformats.org/drawingml/2006/main" prst="rect">
+            <a:avLst/>
+          </a:prstGeom>
+          <a:noFill xmlns:a="http://schemas.openxmlformats.org/drawingml/2006/main"/>
+          <a:ln xmlns:a="http://schemas.openxmlformats.org/drawingml/2006/main" w="0">
+            <a:noFill/>
+            <a:prstDash val="solid"/>
+          </a:ln>
+        </p:spPr>
+        <p:txBody>
+          <a:bodyPr xmlns:a="http://schemas.openxmlformats.org/drawingml/2006/main" anchor="t"/>
+          <a:lstStyle xmlns:a="http://schemas.openxmlformats.org/drawingml/2006/main"/>
+          <a:p xmlns:a="http://schemas.openxmlformats.org/drawingml/2006/main">
+            <a:pPr algn="l">
+              <a:defRPr sz="1200" b="0">
+                <a:solidFill>
+                  <a:srgbClr val="333333"/>
+                </a:solidFill>
+                <a:latin typeface="Helvetica Neue"/>
+                <a:ea typeface="Helvetica Neue"/>
+                <a:cs typeface="Helvetica Neue"/>
+              </a:defRPr>
+            </a:pPr>
+            <a:r>
+              <a:rPr sz="1200" b="0">
+                <a:solidFill>
+                  <a:srgbClr val="333333"/>
+                </a:solidFill>
+                <a:latin typeface="Helvetica Neue"/>
+                <a:ea typeface="Helvetica Neue"/>
+                <a:cs typeface="Helvetica Neue"/>
+              </a:rPr>
+              <a:t>Rule score stays 1.0000 for both. Combined score also rises slightly. BERT QA accepted FEs: 0 to 0, so the shown spans are from the current rule/span extractor.</a:t>
+            </a:r>
+          </a:p>
+        </p:txBody>
+      </p:sp>
+      <p:sp>
+        <p:nvSpPr>
+          <p:cNvPr id="20" name="table-title">
+            <a:extLst xmlns:a="http://schemas.openxmlformats.org/drawingml/2006/main">
+              <a:ext uri="{FF2B5EF4-FFF2-40B4-BE49-F238E27FC236}">
+                <a16:creationId xmlns:a16="http://schemas.microsoft.com/office/drawing/2014/main" id="{15336B42-4781-4BA4-AA1B-E61AF8C151FC}"/>
+              </a:ext>
+            </a:extLst>
+          </p:cNvPr>
+          <p:cNvSpPr>
+            <a:spLocks xmlns:a="http://schemas.openxmlformats.org/drawingml/2006/main" noGrp="1"/>
+          </p:cNvSpPr>
+          <p:nvPr/>
+        </p:nvSpPr>
+        <p:spPr>
+          <a:xfrm xmlns:a="http://schemas.openxmlformats.org/drawingml/2006/main">
+            <a:off x="4400550" y="1581150"/>
+            <a:ext cx="4762500" cy="247650"/>
+          </a:xfrm>
+          <a:prstGeom xmlns:a="http://schemas.openxmlformats.org/drawingml/2006/main" prst="rect">
+            <a:avLst/>
+          </a:prstGeom>
+          <a:noFill xmlns:a="http://schemas.openxmlformats.org/drawingml/2006/main"/>
+          <a:ln xmlns:a="http://schemas.openxmlformats.org/drawingml/2006/main" w="0">
+            <a:noFill/>
+            <a:prstDash val="solid"/>
+          </a:ln>
+        </p:spPr>
+        <p:txBody>
+          <a:bodyPr xmlns:a="http://schemas.openxmlformats.org/drawingml/2006/main" anchor="t"/>
+          <a:lstStyle xmlns:a="http://schemas.openxmlformats.org/drawingml/2006/main"/>
+          <a:p xmlns:a="http://schemas.openxmlformats.org/drawingml/2006/main">
+            <a:pPr algn="l">
+              <a:defRPr sz="1800" b="1">
+                <a:solidFill>
+                  <a:srgbClr val="000000"/>
+                </a:solidFill>
+                <a:latin typeface="Helvetica Neue"/>
+                <a:ea typeface="Helvetica Neue"/>
+                <a:cs typeface="Helvetica Neue"/>
+              </a:defRPr>
+            </a:pPr>
+            <a:r>
+              <a:rPr sz="1800" b="1">
+                <a:solidFill>
+                  <a:srgbClr val="000000"/>
+                </a:solidFill>
+                <a:latin typeface="Helvetica Neue"/>
+                <a:ea typeface="Helvetica Neue"/>
+                <a:cs typeface="Helvetica Neue"/>
+              </a:rPr>
+              <a:t>Element content comparison</a:t>
+            </a:r>
+          </a:p>
+        </p:txBody>
+      </p:sp>
+      <p:sp>
+        <p:nvSpPr>
+          <p:cNvPr id="21" name="header-0">
+            <a:extLst xmlns:a="http://schemas.openxmlformats.org/drawingml/2006/main">
+              <a:ext uri="{FF2B5EF4-FFF2-40B4-BE49-F238E27FC236}">
+                <a16:creationId xmlns:a16="http://schemas.microsoft.com/office/drawing/2014/main" id="{35B48DC6-EF3F-4FAC-84B1-E78FF984925C}"/>
+              </a:ext>
+            </a:extLst>
+          </p:cNvPr>
+          <p:cNvSpPr>
+            <a:spLocks xmlns:a="http://schemas.openxmlformats.org/drawingml/2006/main" noGrp="1"/>
+          </p:cNvSpPr>
+          <p:nvPr/>
+        </p:nvSpPr>
+        <p:spPr>
+          <a:xfrm xmlns:a="http://schemas.openxmlformats.org/drawingml/2006/main">
+            <a:off x="4400550" y="1924050"/>
+            <a:ext cx="1581150" cy="323850"/>
           </a:xfrm>
           <a:prstGeom xmlns:a="http://schemas.openxmlformats.org/drawingml/2006/main" prst="rect">
             <a:avLst/>
           </a:prstGeom>
           <a:solidFill xmlns:a="http://schemas.openxmlformats.org/drawingml/2006/main">
-            <a:srgbClr val="E8F6FD"/>
+            <a:srgbClr val="000000"/>
+          </a:solidFill>
+          <a:ln xmlns:a="http://schemas.openxmlformats.org/drawingml/2006/main" w="9525">
+            <a:solidFill>
+              <a:srgbClr val="000000"/>
+            </a:solidFill>
+            <a:prstDash val="solid"/>
+          </a:ln>
+        </p:spPr>
+      </p:sp>
+      <p:sp>
+        <p:nvSpPr>
+          <p:cNvPr id="22" name="header-text-0">
+            <a:extLst xmlns:a="http://schemas.openxmlformats.org/drawingml/2006/main">
+              <a:ext uri="{FF2B5EF4-FFF2-40B4-BE49-F238E27FC236}">
+                <a16:creationId xmlns:a16="http://schemas.microsoft.com/office/drawing/2014/main" id="{A95079E9-6DC8-44D2-8B31-16A07923EC01}"/>
+              </a:ext>
+            </a:extLst>
+          </p:cNvPr>
+          <p:cNvSpPr>
+            <a:spLocks xmlns:a="http://schemas.openxmlformats.org/drawingml/2006/main" noGrp="1"/>
+          </p:cNvSpPr>
+          <p:nvPr/>
+        </p:nvSpPr>
+        <p:spPr>
+          <a:xfrm xmlns:a="http://schemas.openxmlformats.org/drawingml/2006/main">
+            <a:off x="4495800" y="2000250"/>
+            <a:ext cx="1390650" cy="209550"/>
+          </a:xfrm>
+          <a:prstGeom xmlns:a="http://schemas.openxmlformats.org/drawingml/2006/main" prst="rect">
+            <a:avLst/>
+          </a:prstGeom>
+          <a:noFill xmlns:a="http://schemas.openxmlformats.org/drawingml/2006/main"/>
+          <a:ln xmlns:a="http://schemas.openxmlformats.org/drawingml/2006/main" w="0">
+            <a:noFill/>
+            <a:prstDash val="solid"/>
+          </a:ln>
+        </p:spPr>
+        <p:txBody>
+          <a:bodyPr xmlns:a="http://schemas.openxmlformats.org/drawingml/2006/main" anchor="t"/>
+          <a:lstStyle xmlns:a="http://schemas.openxmlformats.org/drawingml/2006/main"/>
+          <a:p xmlns:a="http://schemas.openxmlformats.org/drawingml/2006/main">
+            <a:pPr algn="l">
+              <a:defRPr sz="1125" b="1">
+                <a:solidFill>
+                  <a:srgbClr val="FFFFFF"/>
+                </a:solidFill>
+                <a:latin typeface="Helvetica Neue"/>
+                <a:ea typeface="Helvetica Neue"/>
+                <a:cs typeface="Helvetica Neue"/>
+              </a:defRPr>
+            </a:pPr>
+            <a:r>
+              <a:rPr sz="1125" b="1">
+                <a:solidFill>
+                  <a:srgbClr val="FFFFFF"/>
+                </a:solidFill>
+                <a:latin typeface="Helvetica Neue"/>
+                <a:ea typeface="Helvetica Neue"/>
+                <a:cs typeface="Helvetica Neue"/>
+              </a:rPr>
+              <a:t>Element</a:t>
+            </a:r>
+          </a:p>
+        </p:txBody>
+      </p:sp>
+      <p:sp>
+        <p:nvSpPr>
+          <p:cNvPr id="23" name="header-1">
+            <a:extLst xmlns:a="http://schemas.openxmlformats.org/drawingml/2006/main">
+              <a:ext uri="{FF2B5EF4-FFF2-40B4-BE49-F238E27FC236}">
+                <a16:creationId xmlns:a16="http://schemas.microsoft.com/office/drawing/2014/main" id="{F7014A24-CE35-4E6C-8FDE-9838E89C3E33}"/>
+              </a:ext>
+            </a:extLst>
+          </p:cNvPr>
+          <p:cNvSpPr>
+            <a:spLocks xmlns:a="http://schemas.openxmlformats.org/drawingml/2006/main" noGrp="1"/>
+          </p:cNvSpPr>
+          <p:nvPr/>
+        </p:nvSpPr>
+        <p:spPr>
+          <a:xfrm xmlns:a="http://schemas.openxmlformats.org/drawingml/2006/main">
+            <a:off x="5981700" y="1924050"/>
+            <a:ext cx="2076450" cy="323850"/>
+          </a:xfrm>
+          <a:prstGeom xmlns:a="http://schemas.openxmlformats.org/drawingml/2006/main" prst="rect">
+            <a:avLst/>
+          </a:prstGeom>
+          <a:solidFill xmlns:a="http://schemas.openxmlformats.org/drawingml/2006/main">
+            <a:srgbClr val="000000"/>
+          </a:solidFill>
+          <a:ln xmlns:a="http://schemas.openxmlformats.org/drawingml/2006/main" w="9525">
+            <a:solidFill>
+              <a:srgbClr val="000000"/>
+            </a:solidFill>
+            <a:prstDash val="solid"/>
+          </a:ln>
+        </p:spPr>
+      </p:sp>
+      <p:sp>
+        <p:nvSpPr>
+          <p:cNvPr id="24" name="header-text-1">
+            <a:extLst xmlns:a="http://schemas.openxmlformats.org/drawingml/2006/main">
+              <a:ext uri="{FF2B5EF4-FFF2-40B4-BE49-F238E27FC236}">
+                <a16:creationId xmlns:a16="http://schemas.microsoft.com/office/drawing/2014/main" id="{6BD18886-068E-46A7-9323-30F5AE887970}"/>
+              </a:ext>
+            </a:extLst>
+          </p:cNvPr>
+          <p:cNvSpPr>
+            <a:spLocks xmlns:a="http://schemas.openxmlformats.org/drawingml/2006/main" noGrp="1"/>
+          </p:cNvSpPr>
+          <p:nvPr/>
+        </p:nvSpPr>
+        <p:spPr>
+          <a:xfrm xmlns:a="http://schemas.openxmlformats.org/drawingml/2006/main">
+            <a:off x="6076950" y="2000250"/>
+            <a:ext cx="1885950" cy="209550"/>
+          </a:xfrm>
+          <a:prstGeom xmlns:a="http://schemas.openxmlformats.org/drawingml/2006/main" prst="rect">
+            <a:avLst/>
+          </a:prstGeom>
+          <a:noFill xmlns:a="http://schemas.openxmlformats.org/drawingml/2006/main"/>
+          <a:ln xmlns:a="http://schemas.openxmlformats.org/drawingml/2006/main" w="0">
+            <a:noFill/>
+            <a:prstDash val="solid"/>
+          </a:ln>
+        </p:spPr>
+        <p:txBody>
+          <a:bodyPr xmlns:a="http://schemas.openxmlformats.org/drawingml/2006/main" anchor="t"/>
+          <a:lstStyle xmlns:a="http://schemas.openxmlformats.org/drawingml/2006/main"/>
+          <a:p xmlns:a="http://schemas.openxmlformats.org/drawingml/2006/main">
+            <a:pPr algn="l">
+              <a:defRPr sz="1125" b="1">
+                <a:solidFill>
+                  <a:srgbClr val="FFFFFF"/>
+                </a:solidFill>
+                <a:latin typeface="Helvetica Neue"/>
+                <a:ea typeface="Helvetica Neue"/>
+                <a:cs typeface="Helvetica Neue"/>
+              </a:defRPr>
+            </a:pPr>
+            <a:r>
+              <a:rPr sz="1125" b="1">
+                <a:solidFill>
+                  <a:srgbClr val="FFFFFF"/>
+                </a:solidFill>
+                <a:latin typeface="Helvetica Neue"/>
+                <a:ea typeface="Helvetica Neue"/>
+                <a:cs typeface="Helvetica Neue"/>
+              </a:rPr>
+              <a:t>Old extraction</a:t>
+            </a:r>
+          </a:p>
+        </p:txBody>
+      </p:sp>
+      <p:sp>
+        <p:nvSpPr>
+          <p:cNvPr id="25" name="header-2">
+            <a:extLst xmlns:a="http://schemas.openxmlformats.org/drawingml/2006/main">
+              <a:ext uri="{FF2B5EF4-FFF2-40B4-BE49-F238E27FC236}">
+                <a16:creationId xmlns:a16="http://schemas.microsoft.com/office/drawing/2014/main" id="{83EEE41F-068A-4CA5-A5E3-EAB31B2E48E7}"/>
+              </a:ext>
+            </a:extLst>
+          </p:cNvPr>
+          <p:cNvSpPr>
+            <a:spLocks xmlns:a="http://schemas.openxmlformats.org/drawingml/2006/main" noGrp="1"/>
+          </p:cNvSpPr>
+          <p:nvPr/>
+        </p:nvSpPr>
+        <p:spPr>
+          <a:xfrm xmlns:a="http://schemas.openxmlformats.org/drawingml/2006/main">
+            <a:off x="8058150" y="1924050"/>
+            <a:ext cx="2095500" cy="323850"/>
+          </a:xfrm>
+          <a:prstGeom xmlns:a="http://schemas.openxmlformats.org/drawingml/2006/main" prst="rect">
+            <a:avLst/>
+          </a:prstGeom>
+          <a:solidFill xmlns:a="http://schemas.openxmlformats.org/drawingml/2006/main">
+            <a:srgbClr val="000000"/>
+          </a:solidFill>
+          <a:ln xmlns:a="http://schemas.openxmlformats.org/drawingml/2006/main" w="9525">
+            <a:solidFill>
+              <a:srgbClr val="000000"/>
+            </a:solidFill>
+            <a:prstDash val="solid"/>
+          </a:ln>
+        </p:spPr>
+      </p:sp>
+      <p:sp>
+        <p:nvSpPr>
+          <p:cNvPr id="26" name="header-text-2">
+            <a:extLst xmlns:a="http://schemas.openxmlformats.org/drawingml/2006/main">
+              <a:ext uri="{FF2B5EF4-FFF2-40B4-BE49-F238E27FC236}">
+                <a16:creationId xmlns:a16="http://schemas.microsoft.com/office/drawing/2014/main" id="{4EF8158E-71AD-4AEC-9BAF-D62AFE57C7EE}"/>
+              </a:ext>
+            </a:extLst>
+          </p:cNvPr>
+          <p:cNvSpPr>
+            <a:spLocks xmlns:a="http://schemas.openxmlformats.org/drawingml/2006/main" noGrp="1"/>
+          </p:cNvSpPr>
+          <p:nvPr/>
+        </p:nvSpPr>
+        <p:spPr>
+          <a:xfrm xmlns:a="http://schemas.openxmlformats.org/drawingml/2006/main">
+            <a:off x="8153400" y="2000250"/>
+            <a:ext cx="1905000" cy="209550"/>
+          </a:xfrm>
+          <a:prstGeom xmlns:a="http://schemas.openxmlformats.org/drawingml/2006/main" prst="rect">
+            <a:avLst/>
+          </a:prstGeom>
+          <a:noFill xmlns:a="http://schemas.openxmlformats.org/drawingml/2006/main"/>
+          <a:ln xmlns:a="http://schemas.openxmlformats.org/drawingml/2006/main" w="0">
+            <a:noFill/>
+            <a:prstDash val="solid"/>
+          </a:ln>
+        </p:spPr>
+        <p:txBody>
+          <a:bodyPr xmlns:a="http://schemas.openxmlformats.org/drawingml/2006/main" anchor="t"/>
+          <a:lstStyle xmlns:a="http://schemas.openxmlformats.org/drawingml/2006/main"/>
+          <a:p xmlns:a="http://schemas.openxmlformats.org/drawingml/2006/main">
+            <a:pPr algn="l">
+              <a:defRPr sz="1125" b="1">
+                <a:solidFill>
+                  <a:srgbClr val="FFFFFF"/>
+                </a:solidFill>
+                <a:latin typeface="Helvetica Neue"/>
+                <a:ea typeface="Helvetica Neue"/>
+                <a:cs typeface="Helvetica Neue"/>
+              </a:defRPr>
+            </a:pPr>
+            <a:r>
+              <a:rPr sz="1125" b="1">
+                <a:solidFill>
+                  <a:srgbClr val="FFFFFF"/>
+                </a:solidFill>
+                <a:latin typeface="Helvetica Neue"/>
+                <a:ea typeface="Helvetica Neue"/>
+                <a:cs typeface="Helvetica Neue"/>
+              </a:rPr>
+              <a:t>New extraction</a:t>
+            </a:r>
+          </a:p>
+        </p:txBody>
+      </p:sp>
+      <p:sp>
+        <p:nvSpPr>
+          <p:cNvPr id="27" name="header-3">
+            <a:extLst xmlns:a="http://schemas.openxmlformats.org/drawingml/2006/main">
+              <a:ext uri="{FF2B5EF4-FFF2-40B4-BE49-F238E27FC236}">
+                <a16:creationId xmlns:a16="http://schemas.microsoft.com/office/drawing/2014/main" id="{2DDCAC87-AC59-4EB3-AD40-698B2BF8CB65}"/>
+              </a:ext>
+            </a:extLst>
+          </p:cNvPr>
+          <p:cNvSpPr>
+            <a:spLocks xmlns:a="http://schemas.openxmlformats.org/drawingml/2006/main" noGrp="1"/>
+          </p:cNvSpPr>
+          <p:nvPr/>
+        </p:nvSpPr>
+        <p:spPr>
+          <a:xfrm xmlns:a="http://schemas.openxmlformats.org/drawingml/2006/main">
+            <a:off x="10153650" y="1924050"/>
+            <a:ext cx="2324100" cy="323850"/>
+          </a:xfrm>
+          <a:prstGeom xmlns:a="http://schemas.openxmlformats.org/drawingml/2006/main" prst="rect">
+            <a:avLst/>
+          </a:prstGeom>
+          <a:solidFill xmlns:a="http://schemas.openxmlformats.org/drawingml/2006/main">
+            <a:srgbClr val="000000"/>
+          </a:solidFill>
+          <a:ln xmlns:a="http://schemas.openxmlformats.org/drawingml/2006/main" w="9525">
+            <a:solidFill>
+              <a:srgbClr val="000000"/>
+            </a:solidFill>
+            <a:prstDash val="solid"/>
+          </a:ln>
+        </p:spPr>
+      </p:sp>
+      <p:sp>
+        <p:nvSpPr>
+          <p:cNvPr id="28" name="header-text-3">
+            <a:extLst xmlns:a="http://schemas.openxmlformats.org/drawingml/2006/main">
+              <a:ext uri="{FF2B5EF4-FFF2-40B4-BE49-F238E27FC236}">
+                <a16:creationId xmlns:a16="http://schemas.microsoft.com/office/drawing/2014/main" id="{2B8A8344-5B57-4576-BF5B-FD754970A53B}"/>
+              </a:ext>
+            </a:extLst>
+          </p:cNvPr>
+          <p:cNvSpPr>
+            <a:spLocks xmlns:a="http://schemas.openxmlformats.org/drawingml/2006/main" noGrp="1"/>
+          </p:cNvSpPr>
+          <p:nvPr/>
+        </p:nvSpPr>
+        <p:spPr>
+          <a:xfrm xmlns:a="http://schemas.openxmlformats.org/drawingml/2006/main">
+            <a:off x="10248900" y="2000250"/>
+            <a:ext cx="2133600" cy="209550"/>
+          </a:xfrm>
+          <a:prstGeom xmlns:a="http://schemas.openxmlformats.org/drawingml/2006/main" prst="rect">
+            <a:avLst/>
+          </a:prstGeom>
+          <a:noFill xmlns:a="http://schemas.openxmlformats.org/drawingml/2006/main"/>
+          <a:ln xmlns:a="http://schemas.openxmlformats.org/drawingml/2006/main" w="0">
+            <a:noFill/>
+            <a:prstDash val="solid"/>
+          </a:ln>
+        </p:spPr>
+        <p:txBody>
+          <a:bodyPr xmlns:a="http://schemas.openxmlformats.org/drawingml/2006/main" anchor="t"/>
+          <a:lstStyle xmlns:a="http://schemas.openxmlformats.org/drawingml/2006/main"/>
+          <a:p xmlns:a="http://schemas.openxmlformats.org/drawingml/2006/main">
+            <a:pPr algn="l">
+              <a:defRPr sz="1125" b="1">
+                <a:solidFill>
+                  <a:srgbClr val="FFFFFF"/>
+                </a:solidFill>
+                <a:latin typeface="Helvetica Neue"/>
+                <a:ea typeface="Helvetica Neue"/>
+                <a:cs typeface="Helvetica Neue"/>
+              </a:defRPr>
+            </a:pPr>
+            <a:r>
+              <a:rPr sz="1125" b="1">
+                <a:solidFill>
+                  <a:srgbClr val="FFFFFF"/>
+                </a:solidFill>
+                <a:latin typeface="Helvetica Neue"/>
+                <a:ea typeface="Helvetica Neue"/>
+                <a:cs typeface="Helvetica Neue"/>
+              </a:rPr>
+              <a:t>Interpretation</a:t>
+            </a:r>
+          </a:p>
+        </p:txBody>
+      </p:sp>
+      <p:sp>
+        <p:nvSpPr>
+          <p:cNvPr id="29" name="table-cell-0-0">
+            <a:extLst xmlns:a="http://schemas.openxmlformats.org/drawingml/2006/main">
+              <a:ext uri="{FF2B5EF4-FFF2-40B4-BE49-F238E27FC236}">
+                <a16:creationId xmlns:a16="http://schemas.microsoft.com/office/drawing/2014/main" id="{45964A43-4D7D-4C37-8DB2-5C2659065A43}"/>
+              </a:ext>
+            </a:extLst>
+          </p:cNvPr>
+          <p:cNvSpPr>
+            <a:spLocks xmlns:a="http://schemas.openxmlformats.org/drawingml/2006/main" noGrp="1"/>
+          </p:cNvSpPr>
+          <p:nvPr/>
+        </p:nvSpPr>
+        <p:spPr>
+          <a:xfrm xmlns:a="http://schemas.openxmlformats.org/drawingml/2006/main">
+            <a:off x="4400550" y="2247900"/>
+            <a:ext cx="1581150" cy="609600"/>
+          </a:xfrm>
+          <a:prstGeom xmlns:a="http://schemas.openxmlformats.org/drawingml/2006/main" prst="rect">
+            <a:avLst/>
+          </a:prstGeom>
+          <a:solidFill xmlns:a="http://schemas.openxmlformats.org/drawingml/2006/main">
+            <a:srgbClr val="FFFFFF"/>
           </a:solidFill>
           <a:ln xmlns:a="http://schemas.openxmlformats.org/drawingml/2006/main" w="9525">
             <a:solidFill>
@@ -1480,22 +2604,22 @@
       </p:sp>
       <p:sp>
         <p:nvSpPr>
-          <p:cNvPr id="9" name="Case 1-new-label">
-            <a:extLst xmlns:a="http://schemas.openxmlformats.org/drawingml/2006/main">
-              <a:ext uri="{FF2B5EF4-FFF2-40B4-BE49-F238E27FC236}">
-                <a16:creationId xmlns:a16="http://schemas.microsoft.com/office/drawing/2014/main" id="{92571E61-87D1-48D5-A982-0DA1B61E7F90}"/>
-              </a:ext>
-            </a:extLst>
-          </p:cNvPr>
-          <p:cNvSpPr>
-            <a:spLocks xmlns:a="http://schemas.openxmlformats.org/drawingml/2006/main" noGrp="1"/>
-          </p:cNvSpPr>
-          <p:nvPr/>
-        </p:nvSpPr>
-        <p:spPr>
-          <a:xfrm xmlns:a="http://schemas.openxmlformats.org/drawingml/2006/main">
-            <a:off x="4591050" y="2019300"/>
-            <a:ext cx="3143250" cy="209550"/>
+          <p:cNvPr id="30" name="table-text-0-0">
+            <a:extLst xmlns:a="http://schemas.openxmlformats.org/drawingml/2006/main">
+              <a:ext uri="{FF2B5EF4-FFF2-40B4-BE49-F238E27FC236}">
+                <a16:creationId xmlns:a16="http://schemas.microsoft.com/office/drawing/2014/main" id="{D7B72BC6-5016-4D99-95B8-F047C485AE54}"/>
+              </a:ext>
+            </a:extLst>
+          </p:cNvPr>
+          <p:cNvSpPr>
+            <a:spLocks xmlns:a="http://schemas.openxmlformats.org/drawingml/2006/main" noGrp="1"/>
+          </p:cNvSpPr>
+          <p:nvPr/>
+        </p:nvSpPr>
+        <p:spPr>
+          <a:xfrm xmlns:a="http://schemas.openxmlformats.org/drawingml/2006/main">
+            <a:off x="4495800" y="2343150"/>
+            <a:ext cx="1390650" cy="457200"/>
           </a:xfrm>
           <a:prstGeom xmlns:a="http://schemas.openxmlformats.org/drawingml/2006/main" prst="rect">
             <a:avLst/>
@@ -1511,9 +2635,9 @@
           <a:lstStyle xmlns:a="http://schemas.openxmlformats.org/drawingml/2006/main"/>
           <a:p xmlns:a="http://schemas.openxmlformats.org/drawingml/2006/main">
             <a:pPr algn="l">
-              <a:defRPr sz="1200" b="1">
-                <a:solidFill>
-                  <a:srgbClr val="000000"/>
+              <a:defRPr sz="1125" b="1">
+                <a:solidFill>
+                  <a:srgbClr val="222222"/>
                 </a:solidFill>
                 <a:latin typeface="Helvetica Neue"/>
                 <a:ea typeface="Helvetica Neue"/>
@@ -1521,211 +2645,43 @@
               </a:defRPr>
             </a:pPr>
             <a:r>
-              <a:rPr sz="1200" b="1">
-                <a:solidFill>
-                  <a:srgbClr val="000000"/>
+              <a:rPr sz="1125" b="1">
+                <a:solidFill>
+                  <a:srgbClr val="222222"/>
                 </a:solidFill>
                 <a:latin typeface="Helvetica Neue"/>
                 <a:ea typeface="Helvetica Neue"/>
                 <a:cs typeface="Helvetica Neue"/>
               </a:rPr>
-              <a:t>LLM-revised text</a:t>
-            </a:r>
-          </a:p>
-        </p:txBody>
-      </p:sp>
-      <p:sp>
-        <p:nvSpPr>
-          <p:cNvPr id="10" name="Case 1-new-text">
-            <a:extLst xmlns:a="http://schemas.openxmlformats.org/drawingml/2006/main">
-              <a:ext uri="{FF2B5EF4-FFF2-40B4-BE49-F238E27FC236}">
-                <a16:creationId xmlns:a16="http://schemas.microsoft.com/office/drawing/2014/main" id="{CC39B0AF-0D14-4707-A839-20336CFCE65E}"/>
-              </a:ext>
-            </a:extLst>
-          </p:cNvPr>
-          <p:cNvSpPr>
-            <a:spLocks xmlns:a="http://schemas.openxmlformats.org/drawingml/2006/main" noGrp="1"/>
-          </p:cNvSpPr>
-          <p:nvPr/>
-        </p:nvSpPr>
-        <p:spPr>
-          <a:xfrm xmlns:a="http://schemas.openxmlformats.org/drawingml/2006/main">
-            <a:off x="4591050" y="2286000"/>
-            <a:ext cx="3143250" cy="781050"/>
-          </a:xfrm>
-          <a:prstGeom xmlns:a="http://schemas.openxmlformats.org/drawingml/2006/main" prst="rect">
-            <a:avLst/>
-          </a:prstGeom>
-          <a:noFill xmlns:a="http://schemas.openxmlformats.org/drawingml/2006/main"/>
-          <a:ln xmlns:a="http://schemas.openxmlformats.org/drawingml/2006/main" w="0">
-            <a:noFill/>
-            <a:prstDash val="solid"/>
-          </a:ln>
-        </p:spPr>
-        <p:txBody>
-          <a:bodyPr xmlns:a="http://schemas.openxmlformats.org/drawingml/2006/main" anchor="t"/>
-          <a:lstStyle xmlns:a="http://schemas.openxmlformats.org/drawingml/2006/main"/>
-          <a:p xmlns:a="http://schemas.openxmlformats.org/drawingml/2006/main">
-            <a:pPr algn="l">
-              <a:defRPr sz="1200" b="0">
-                <a:solidFill>
-                  <a:srgbClr val="222222"/>
-                </a:solidFill>
-                <a:latin typeface="Helvetica Neue"/>
-                <a:ea typeface="Helvetica Neue"/>
-                <a:cs typeface="Helvetica Neue"/>
-              </a:defRPr>
-            </a:pPr>
-            <a:r>
-              <a:rPr sz="1200" b="0">
-                <a:solidFill>
-                  <a:srgbClr val="222222"/>
-                </a:solidFill>
-                <a:latin typeface="Helvetica Neue"/>
-                <a:ea typeface="Helvetica Neue"/>
-                <a:cs typeface="Helvetica Neue"/>
-              </a:rPr>
-              <a:t>If fraud is suspected on an Employment Insurance (EI) or EI Emergency Response Benefit (EI ERB) claim, the agent must not issue an access code.</a:t>
-            </a:r>
-          </a:p>
-        </p:txBody>
-      </p:sp>
-      <p:sp>
-        <p:nvSpPr>
-          <p:cNvPr id="11" name="Case 1-impact">
-            <a:extLst xmlns:a="http://schemas.openxmlformats.org/drawingml/2006/main">
-              <a:ext uri="{FF2B5EF4-FFF2-40B4-BE49-F238E27FC236}">
-                <a16:creationId xmlns:a16="http://schemas.microsoft.com/office/drawing/2014/main" id="{900D3D88-5EA4-4D54-8FEF-A57B0512407E}"/>
-              </a:ext>
-            </a:extLst>
-          </p:cNvPr>
-          <p:cNvSpPr>
-            <a:spLocks xmlns:a="http://schemas.openxmlformats.org/drawingml/2006/main" noGrp="1"/>
-          </p:cNvSpPr>
-          <p:nvPr/>
-        </p:nvSpPr>
-        <p:spPr>
-          <a:xfrm xmlns:a="http://schemas.openxmlformats.org/drawingml/2006/main">
-            <a:off x="400050" y="3238500"/>
-            <a:ext cx="7543800" cy="323850"/>
-          </a:xfrm>
-          <a:prstGeom xmlns:a="http://schemas.openxmlformats.org/drawingml/2006/main" prst="rect">
-            <a:avLst/>
-          </a:prstGeom>
-          <a:noFill xmlns:a="http://schemas.openxmlformats.org/drawingml/2006/main"/>
-          <a:ln xmlns:a="http://schemas.openxmlformats.org/drawingml/2006/main" w="0">
-            <a:noFill/>
-            <a:prstDash val="solid"/>
-          </a:ln>
-        </p:spPr>
-        <p:txBody>
-          <a:bodyPr xmlns:a="http://schemas.openxmlformats.org/drawingml/2006/main" anchor="t"/>
-          <a:lstStyle xmlns:a="http://schemas.openxmlformats.org/drawingml/2006/main"/>
-          <a:p xmlns:a="http://schemas.openxmlformats.org/drawingml/2006/main">
-            <a:pPr algn="l">
-              <a:defRPr sz="1200" b="0">
-                <a:solidFill>
-                  <a:srgbClr val="333333"/>
-                </a:solidFill>
-                <a:latin typeface="Helvetica Neue"/>
-                <a:ea typeface="Helvetica Neue"/>
-                <a:cs typeface="Helvetica Neue"/>
-              </a:defRPr>
-            </a:pPr>
-            <a:r>
-              <a:rPr sz="1200" b="0">
-                <a:solidFill>
-                  <a:srgbClr val="333333"/>
-                </a:solidFill>
-                <a:latin typeface="Helvetica Neue"/>
-                <a:ea typeface="Helvetica Neue"/>
-                <a:cs typeface="Helvetica Neue"/>
-              </a:rPr>
-              <a:t>More explicit domain wording and obligation language; classification stays correct.</a:t>
-            </a:r>
-          </a:p>
-        </p:txBody>
-      </p:sp>
-      <p:sp>
-        <p:nvSpPr>
-          <p:cNvPr id="12" name="Case 2-header">
-            <a:extLst xmlns:a="http://schemas.openxmlformats.org/drawingml/2006/main">
-              <a:ext uri="{FF2B5EF4-FFF2-40B4-BE49-F238E27FC236}">
-                <a16:creationId xmlns:a16="http://schemas.microsoft.com/office/drawing/2014/main" id="{9A02C4A9-6AA2-4F93-8E9E-A12BAD9C73B8}"/>
-              </a:ext>
-            </a:extLst>
-          </p:cNvPr>
-          <p:cNvSpPr>
-            <a:spLocks xmlns:a="http://schemas.openxmlformats.org/drawingml/2006/main" noGrp="1"/>
-          </p:cNvSpPr>
-          <p:nvPr/>
-        </p:nvSpPr>
-        <p:spPr>
-          <a:xfrm xmlns:a="http://schemas.openxmlformats.org/drawingml/2006/main">
-            <a:off x="400050" y="3676650"/>
-            <a:ext cx="7239000" cy="266700"/>
-          </a:xfrm>
-          <a:prstGeom xmlns:a="http://schemas.openxmlformats.org/drawingml/2006/main" prst="rect">
-            <a:avLst/>
-          </a:prstGeom>
-          <a:noFill xmlns:a="http://schemas.openxmlformats.org/drawingml/2006/main"/>
-          <a:ln xmlns:a="http://schemas.openxmlformats.org/drawingml/2006/main" w="0">
-            <a:noFill/>
-            <a:prstDash val="solid"/>
-          </a:ln>
-        </p:spPr>
-        <p:txBody>
-          <a:bodyPr xmlns:a="http://schemas.openxmlformats.org/drawingml/2006/main" anchor="t"/>
-          <a:lstStyle xmlns:a="http://schemas.openxmlformats.org/drawingml/2006/main"/>
-          <a:p xmlns:a="http://schemas.openxmlformats.org/drawingml/2006/main">
-            <a:pPr algn="l">
-              <a:defRPr sz="1800" b="1">
-                <a:solidFill>
-                  <a:srgbClr val="000000"/>
-                </a:solidFill>
-                <a:latin typeface="Helvetica Neue"/>
-                <a:ea typeface="Helvetica Neue"/>
-                <a:cs typeface="Helvetica Neue"/>
-              </a:defRPr>
-            </a:pPr>
-            <a:r>
-              <a:rPr sz="1800" b="1">
-                <a:solidFill>
-                  <a:srgbClr val="000000"/>
-                </a:solidFill>
-                <a:latin typeface="Helvetica Neue"/>
-                <a:ea typeface="Helvetica Neue"/>
-                <a:cs typeface="Helvetica Neue"/>
-              </a:rPr>
-              <a:t>Case 2: EI ERB work-item routing scenario</a:t>
-            </a:r>
-          </a:p>
-        </p:txBody>
-      </p:sp>
-      <p:sp>
-        <p:nvSpPr>
-          <p:cNvPr id="13" name="Case 2-old-panel">
-            <a:extLst xmlns:a="http://schemas.openxmlformats.org/drawingml/2006/main">
-              <a:ext uri="{FF2B5EF4-FFF2-40B4-BE49-F238E27FC236}">
-                <a16:creationId xmlns:a16="http://schemas.microsoft.com/office/drawing/2014/main" id="{EECEC0B2-FD9D-4BCD-9960-2EC66E66AAB5}"/>
-              </a:ext>
-            </a:extLst>
-          </p:cNvPr>
-          <p:cNvSpPr>
-            <a:spLocks xmlns:a="http://schemas.openxmlformats.org/drawingml/2006/main" noGrp="1"/>
-          </p:cNvSpPr>
-          <p:nvPr/>
-        </p:nvSpPr>
-        <p:spPr>
-          <a:xfrm xmlns:a="http://schemas.openxmlformats.org/drawingml/2006/main">
-            <a:off x="400050" y="4076700"/>
-            <a:ext cx="3524250" cy="1257300"/>
+              <a:t>Case 1 · Agent</a:t>
+            </a:r>
+          </a:p>
+        </p:txBody>
+      </p:sp>
+      <p:sp>
+        <p:nvSpPr>
+          <p:cNvPr id="31" name="table-cell-0-1">
+            <a:extLst xmlns:a="http://schemas.openxmlformats.org/drawingml/2006/main">
+              <a:ext uri="{FF2B5EF4-FFF2-40B4-BE49-F238E27FC236}">
+                <a16:creationId xmlns:a16="http://schemas.microsoft.com/office/drawing/2014/main" id="{C306ADBF-4E86-4355-A259-796E8C5201AA}"/>
+              </a:ext>
+            </a:extLst>
+          </p:cNvPr>
+          <p:cNvSpPr>
+            <a:spLocks xmlns:a="http://schemas.openxmlformats.org/drawingml/2006/main" noGrp="1"/>
+          </p:cNvSpPr>
+          <p:nvPr/>
+        </p:nvSpPr>
+        <p:spPr>
+          <a:xfrm xmlns:a="http://schemas.openxmlformats.org/drawingml/2006/main">
+            <a:off x="5981700" y="2247900"/>
+            <a:ext cx="2076450" cy="609600"/>
           </a:xfrm>
           <a:prstGeom xmlns:a="http://schemas.openxmlformats.org/drawingml/2006/main" prst="rect">
             <a:avLst/>
           </a:prstGeom>
           <a:solidFill xmlns:a="http://schemas.openxmlformats.org/drawingml/2006/main">
-            <a:srgbClr val="F2F2F2"/>
+            <a:srgbClr val="FFFFFF"/>
           </a:solidFill>
           <a:ln xmlns:a="http://schemas.openxmlformats.org/drawingml/2006/main" w="9525">
             <a:solidFill>
@@ -1737,22 +2693,22 @@
       </p:sp>
       <p:sp>
         <p:nvSpPr>
-          <p:cNvPr id="14" name="Case 2-old-label">
-            <a:extLst xmlns:a="http://schemas.openxmlformats.org/drawingml/2006/main">
-              <a:ext uri="{FF2B5EF4-FFF2-40B4-BE49-F238E27FC236}">
-                <a16:creationId xmlns:a16="http://schemas.microsoft.com/office/drawing/2014/main" id="{9BB3CB7C-3F8F-4532-9A0B-53638F442719}"/>
-              </a:ext>
-            </a:extLst>
-          </p:cNvPr>
-          <p:cNvSpPr>
-            <a:spLocks xmlns:a="http://schemas.openxmlformats.org/drawingml/2006/main" noGrp="1"/>
-          </p:cNvSpPr>
-          <p:nvPr/>
-        </p:nvSpPr>
-        <p:spPr>
-          <a:xfrm xmlns:a="http://schemas.openxmlformats.org/drawingml/2006/main">
-            <a:off x="571500" y="4210050"/>
-            <a:ext cx="3143250" cy="209550"/>
+          <p:cNvPr id="32" name="table-text-0-1">
+            <a:extLst xmlns:a="http://schemas.openxmlformats.org/drawingml/2006/main">
+              <a:ext uri="{FF2B5EF4-FFF2-40B4-BE49-F238E27FC236}">
+                <a16:creationId xmlns:a16="http://schemas.microsoft.com/office/drawing/2014/main" id="{8A1695CF-9842-4907-9E7F-CF76224AC456}"/>
+              </a:ext>
+            </a:extLst>
+          </p:cNvPr>
+          <p:cNvSpPr>
+            <a:spLocks xmlns:a="http://schemas.openxmlformats.org/drawingml/2006/main" noGrp="1"/>
+          </p:cNvSpPr>
+          <p:nvPr/>
+        </p:nvSpPr>
+        <p:spPr>
+          <a:xfrm xmlns:a="http://schemas.openxmlformats.org/drawingml/2006/main">
+            <a:off x="6076950" y="2343150"/>
+            <a:ext cx="1885950" cy="457200"/>
           </a:xfrm>
           <a:prstGeom xmlns:a="http://schemas.openxmlformats.org/drawingml/2006/main" prst="rect">
             <a:avLst/>
@@ -1768,9 +2724,9 @@
           <a:lstStyle xmlns:a="http://schemas.openxmlformats.org/drawingml/2006/main"/>
           <a:p xmlns:a="http://schemas.openxmlformats.org/drawingml/2006/main">
             <a:pPr algn="l">
-              <a:defRPr sz="1200" b="1">
-                <a:solidFill>
-                  <a:srgbClr val="000000"/>
+              <a:defRPr sz="1050" b="0">
+                <a:solidFill>
+                  <a:srgbClr val="222222"/>
                 </a:solidFill>
                 <a:latin typeface="Helvetica Neue"/>
                 <a:ea typeface="Helvetica Neue"/>
@@ -1778,155 +2734,43 @@
               </a:defRPr>
             </a:pPr>
             <a:r>
-              <a:rPr sz="1200" b="1">
-                <a:solidFill>
-                  <a:srgbClr val="000000"/>
+              <a:rPr sz="1050" b="0">
+                <a:solidFill>
+                  <a:srgbClr val="222222"/>
                 </a:solidFill>
                 <a:latin typeface="Helvetica Neue"/>
                 <a:ea typeface="Helvetica Neue"/>
                 <a:cs typeface="Helvetica Neue"/>
               </a:rPr>
-              <a:t>Original demo text</a:t>
-            </a:r>
-          </a:p>
-        </p:txBody>
-      </p:sp>
-      <p:sp>
-        <p:nvSpPr>
-          <p:cNvPr id="15" name="Case 2-old-text">
-            <a:extLst xmlns:a="http://schemas.openxmlformats.org/drawingml/2006/main">
-              <a:ext uri="{FF2B5EF4-FFF2-40B4-BE49-F238E27FC236}">
-                <a16:creationId xmlns:a16="http://schemas.microsoft.com/office/drawing/2014/main" id="{A1FD8E23-3F80-4A57-8571-310596F50EBF}"/>
-              </a:ext>
-            </a:extLst>
-          </p:cNvPr>
-          <p:cNvSpPr>
-            <a:spLocks xmlns:a="http://schemas.openxmlformats.org/drawingml/2006/main" noGrp="1"/>
-          </p:cNvSpPr>
-          <p:nvPr/>
-        </p:nvSpPr>
-        <p:spPr>
-          <a:xfrm xmlns:a="http://schemas.openxmlformats.org/drawingml/2006/main">
-            <a:off x="571500" y="4476750"/>
-            <a:ext cx="3143250" cy="781050"/>
-          </a:xfrm>
-          <a:prstGeom xmlns:a="http://schemas.openxmlformats.org/drawingml/2006/main" prst="rect">
-            <a:avLst/>
-          </a:prstGeom>
-          <a:noFill xmlns:a="http://schemas.openxmlformats.org/drawingml/2006/main"/>
-          <a:ln xmlns:a="http://schemas.openxmlformats.org/drawingml/2006/main" w="0">
-            <a:noFill/>
-            <a:prstDash val="solid"/>
-          </a:ln>
-        </p:spPr>
-        <p:txBody>
-          <a:bodyPr xmlns:a="http://schemas.openxmlformats.org/drawingml/2006/main" anchor="t"/>
-          <a:lstStyle xmlns:a="http://schemas.openxmlformats.org/drawingml/2006/main"/>
-          <a:p xmlns:a="http://schemas.openxmlformats.org/drawingml/2006/main">
-            <a:pPr algn="l">
-              <a:defRPr sz="1200" b="0">
-                <a:solidFill>
-                  <a:srgbClr val="222222"/>
-                </a:solidFill>
-                <a:latin typeface="Helvetica Neue"/>
-                <a:ea typeface="Helvetica Neue"/>
-                <a:cs typeface="Helvetica Neue"/>
-              </a:defRPr>
-            </a:pPr>
-            <a:r>
-              <a:rPr sz="1200" b="0">
-                <a:solidFill>
-                  <a:srgbClr val="222222"/>
-                </a:solidFill>
-                <a:latin typeface="Helvetica Neue"/>
-                <a:ea typeface="Helvetica Neue"/>
-                <a:cs typeface="Helvetica Neue"/>
-              </a:rPr>
-              <a:t>Any WIs related to an EI Emergency Response Benefit (EI ERB) claim are processed by a specialized team.</a:t>
-            </a:r>
-          </a:p>
-        </p:txBody>
-      </p:sp>
-      <p:sp>
-        <p:nvSpPr>
-          <p:cNvPr id="16" name="Case 2-arrow">
-            <a:extLst xmlns:a="http://schemas.openxmlformats.org/drawingml/2006/main">
-              <a:ext uri="{FF2B5EF4-FFF2-40B4-BE49-F238E27FC236}">
-                <a16:creationId xmlns:a16="http://schemas.microsoft.com/office/drawing/2014/main" id="{BAD0F60F-EF4A-4DBB-9FF3-EEFD645D860D}"/>
-              </a:ext>
-            </a:extLst>
-          </p:cNvPr>
-          <p:cNvSpPr>
-            <a:spLocks xmlns:a="http://schemas.openxmlformats.org/drawingml/2006/main" noGrp="1"/>
-          </p:cNvSpPr>
-          <p:nvPr/>
-        </p:nvSpPr>
-        <p:spPr>
-          <a:xfrm xmlns:a="http://schemas.openxmlformats.org/drawingml/2006/main">
-            <a:off x="4057650" y="4533900"/>
-            <a:ext cx="342900" cy="342900"/>
-          </a:xfrm>
-          <a:prstGeom xmlns:a="http://schemas.openxmlformats.org/drawingml/2006/main" prst="rect">
-            <a:avLst/>
-          </a:prstGeom>
-          <a:noFill xmlns:a="http://schemas.openxmlformats.org/drawingml/2006/main"/>
-          <a:ln xmlns:a="http://schemas.openxmlformats.org/drawingml/2006/main" w="0">
-            <a:noFill/>
-            <a:prstDash val="solid"/>
-          </a:ln>
-        </p:spPr>
-        <p:txBody>
-          <a:bodyPr xmlns:a="http://schemas.openxmlformats.org/drawingml/2006/main" anchor="t"/>
-          <a:lstStyle xmlns:a="http://schemas.openxmlformats.org/drawingml/2006/main"/>
-          <a:p xmlns:a="http://schemas.openxmlformats.org/drawingml/2006/main">
-            <a:pPr algn="ctr">
-              <a:defRPr sz="2250" b="1">
-                <a:solidFill>
-                  <a:srgbClr val="000000"/>
-                </a:solidFill>
-                <a:latin typeface="Helvetica Neue"/>
-                <a:ea typeface="Helvetica Neue"/>
-                <a:cs typeface="Helvetica Neue"/>
-              </a:defRPr>
-            </a:pPr>
-            <a:r>
-              <a:rPr sz="2250" b="1">
-                <a:solidFill>
-                  <a:srgbClr val="000000"/>
-                </a:solidFill>
-                <a:latin typeface="Helvetica Neue"/>
-                <a:ea typeface="Helvetica Neue"/>
-                <a:cs typeface="Helvetica Neue"/>
-              </a:rPr>
-              <a:t>→</a:t>
-            </a:r>
-          </a:p>
-        </p:txBody>
-      </p:sp>
-      <p:sp>
-        <p:nvSpPr>
-          <p:cNvPr id="17" name="Case 2-new-panel">
-            <a:extLst xmlns:a="http://schemas.openxmlformats.org/drawingml/2006/main">
-              <a:ext uri="{FF2B5EF4-FFF2-40B4-BE49-F238E27FC236}">
-                <a16:creationId xmlns:a16="http://schemas.microsoft.com/office/drawing/2014/main" id="{6AC965BD-BF6F-49BD-A2DE-6A0AB3BD352A}"/>
-              </a:ext>
-            </a:extLst>
-          </p:cNvPr>
-          <p:cNvSpPr>
-            <a:spLocks xmlns:a="http://schemas.openxmlformats.org/drawingml/2006/main" noGrp="1"/>
-          </p:cNvSpPr>
-          <p:nvPr/>
-        </p:nvSpPr>
-        <p:spPr>
-          <a:xfrm xmlns:a="http://schemas.openxmlformats.org/drawingml/2006/main">
-            <a:off x="4419600" y="4076700"/>
-            <a:ext cx="3524250" cy="1257300"/>
+              <a:t>the agent</a:t>
+            </a:r>
+          </a:p>
+        </p:txBody>
+      </p:sp>
+      <p:sp>
+        <p:nvSpPr>
+          <p:cNvPr id="33" name="table-cell-0-2">
+            <a:extLst xmlns:a="http://schemas.openxmlformats.org/drawingml/2006/main">
+              <a:ext uri="{FF2B5EF4-FFF2-40B4-BE49-F238E27FC236}">
+                <a16:creationId xmlns:a16="http://schemas.microsoft.com/office/drawing/2014/main" id="{E7286B7C-C530-458E-AFEE-C0D64EFEEB1C}"/>
+              </a:ext>
+            </a:extLst>
+          </p:cNvPr>
+          <p:cNvSpPr>
+            <a:spLocks xmlns:a="http://schemas.openxmlformats.org/drawingml/2006/main" noGrp="1"/>
+          </p:cNvSpPr>
+          <p:nvPr/>
+        </p:nvSpPr>
+        <p:spPr>
+          <a:xfrm xmlns:a="http://schemas.openxmlformats.org/drawingml/2006/main">
+            <a:off x="8058150" y="2247900"/>
+            <a:ext cx="2095500" cy="609600"/>
           </a:xfrm>
           <a:prstGeom xmlns:a="http://schemas.openxmlformats.org/drawingml/2006/main" prst="rect">
             <a:avLst/>
           </a:prstGeom>
           <a:solidFill xmlns:a="http://schemas.openxmlformats.org/drawingml/2006/main">
-            <a:srgbClr val="E8F6FD"/>
+            <a:srgbClr val="FFFFFF"/>
           </a:solidFill>
           <a:ln xmlns:a="http://schemas.openxmlformats.org/drawingml/2006/main" w="9525">
             <a:solidFill>
@@ -1938,22 +2782,22 @@
       </p:sp>
       <p:sp>
         <p:nvSpPr>
-          <p:cNvPr id="18" name="Case 2-new-label">
-            <a:extLst xmlns:a="http://schemas.openxmlformats.org/drawingml/2006/main">
-              <a:ext uri="{FF2B5EF4-FFF2-40B4-BE49-F238E27FC236}">
-                <a16:creationId xmlns:a16="http://schemas.microsoft.com/office/drawing/2014/main" id="{55D38B1F-1472-42D3-B9D8-A1EDDD3C4EA8}"/>
-              </a:ext>
-            </a:extLst>
-          </p:cNvPr>
-          <p:cNvSpPr>
-            <a:spLocks xmlns:a="http://schemas.openxmlformats.org/drawingml/2006/main" noGrp="1"/>
-          </p:cNvSpPr>
-          <p:nvPr/>
-        </p:nvSpPr>
-        <p:spPr>
-          <a:xfrm xmlns:a="http://schemas.openxmlformats.org/drawingml/2006/main">
-            <a:off x="4591050" y="4210050"/>
-            <a:ext cx="3143250" cy="209550"/>
+          <p:cNvPr id="34" name="table-text-0-2">
+            <a:extLst xmlns:a="http://schemas.openxmlformats.org/drawingml/2006/main">
+              <a:ext uri="{FF2B5EF4-FFF2-40B4-BE49-F238E27FC236}">
+                <a16:creationId xmlns:a16="http://schemas.microsoft.com/office/drawing/2014/main" id="{D5ADD5BE-A9D1-4728-9B73-7815AC4151A8}"/>
+              </a:ext>
+            </a:extLst>
+          </p:cNvPr>
+          <p:cNvSpPr>
+            <a:spLocks xmlns:a="http://schemas.openxmlformats.org/drawingml/2006/main" noGrp="1"/>
+          </p:cNvSpPr>
+          <p:nvPr/>
+        </p:nvSpPr>
+        <p:spPr>
+          <a:xfrm xmlns:a="http://schemas.openxmlformats.org/drawingml/2006/main">
+            <a:off x="8153400" y="2343150"/>
+            <a:ext cx="1905000" cy="457200"/>
           </a:xfrm>
           <a:prstGeom xmlns:a="http://schemas.openxmlformats.org/drawingml/2006/main" prst="rect">
             <a:avLst/>
@@ -1969,9 +2813,9 @@
           <a:lstStyle xmlns:a="http://schemas.openxmlformats.org/drawingml/2006/main"/>
           <a:p xmlns:a="http://schemas.openxmlformats.org/drawingml/2006/main">
             <a:pPr algn="l">
-              <a:defRPr sz="1200" b="1">
-                <a:solidFill>
-                  <a:srgbClr val="000000"/>
+              <a:defRPr sz="1050" b="0">
+                <a:solidFill>
+                  <a:srgbClr val="222222"/>
                 </a:solidFill>
                 <a:latin typeface="Helvetica Neue"/>
                 <a:ea typeface="Helvetica Neue"/>
@@ -1979,155 +2823,43 @@
               </a:defRPr>
             </a:pPr>
             <a:r>
-              <a:rPr sz="1200" b="1">
-                <a:solidFill>
-                  <a:srgbClr val="000000"/>
+              <a:rPr sz="1050" b="0">
+                <a:solidFill>
+                  <a:srgbClr val="222222"/>
                 </a:solidFill>
                 <a:latin typeface="Helvetica Neue"/>
                 <a:ea typeface="Helvetica Neue"/>
                 <a:cs typeface="Helvetica Neue"/>
               </a:rPr>
-              <a:t>LLM-revised text</a:t>
-            </a:r>
-          </a:p>
-        </p:txBody>
-      </p:sp>
-      <p:sp>
-        <p:nvSpPr>
-          <p:cNvPr id="19" name="Case 2-new-text">
-            <a:extLst xmlns:a="http://schemas.openxmlformats.org/drawingml/2006/main">
-              <a:ext uri="{FF2B5EF4-FFF2-40B4-BE49-F238E27FC236}">
-                <a16:creationId xmlns:a16="http://schemas.microsoft.com/office/drawing/2014/main" id="{5A709AC6-FDD5-4F52-AB76-51E041E8C1D3}"/>
-              </a:ext>
-            </a:extLst>
-          </p:cNvPr>
-          <p:cNvSpPr>
-            <a:spLocks xmlns:a="http://schemas.openxmlformats.org/drawingml/2006/main" noGrp="1"/>
-          </p:cNvSpPr>
-          <p:nvPr/>
-        </p:nvSpPr>
-        <p:spPr>
-          <a:xfrm xmlns:a="http://schemas.openxmlformats.org/drawingml/2006/main">
-            <a:off x="4591050" y="4476750"/>
-            <a:ext cx="3143250" cy="781050"/>
-          </a:xfrm>
-          <a:prstGeom xmlns:a="http://schemas.openxmlformats.org/drawingml/2006/main" prst="rect">
-            <a:avLst/>
-          </a:prstGeom>
-          <a:noFill xmlns:a="http://schemas.openxmlformats.org/drawingml/2006/main"/>
-          <a:ln xmlns:a="http://schemas.openxmlformats.org/drawingml/2006/main" w="0">
-            <a:noFill/>
-            <a:prstDash val="solid"/>
-          </a:ln>
-        </p:spPr>
-        <p:txBody>
-          <a:bodyPr xmlns:a="http://schemas.openxmlformats.org/drawingml/2006/main" anchor="t"/>
-          <a:lstStyle xmlns:a="http://schemas.openxmlformats.org/drawingml/2006/main"/>
-          <a:p xmlns:a="http://schemas.openxmlformats.org/drawingml/2006/main">
-            <a:pPr algn="l">
-              <a:defRPr sz="1200" b="0">
-                <a:solidFill>
-                  <a:srgbClr val="222222"/>
-                </a:solidFill>
-                <a:latin typeface="Helvetica Neue"/>
-                <a:ea typeface="Helvetica Neue"/>
-                <a:cs typeface="Helvetica Neue"/>
-              </a:defRPr>
-            </a:pPr>
-            <a:r>
-              <a:rPr sz="1200" b="0">
-                <a:solidFill>
-                  <a:srgbClr val="222222"/>
-                </a:solidFill>
-                <a:latin typeface="Helvetica Neue"/>
-                <a:ea typeface="Helvetica Neue"/>
-                <a:cs typeface="Helvetica Neue"/>
-              </a:rPr>
-              <a:t>Any work items (WIs) related to an EI Emergency Response Benefit (EI ERB) claim are processed by a specialized team.</a:t>
-            </a:r>
-          </a:p>
-        </p:txBody>
-      </p:sp>
-      <p:sp>
-        <p:nvSpPr>
-          <p:cNvPr id="20" name="Case 2-impact">
-            <a:extLst xmlns:a="http://schemas.openxmlformats.org/drawingml/2006/main">
-              <a:ext uri="{FF2B5EF4-FFF2-40B4-BE49-F238E27FC236}">
-                <a16:creationId xmlns:a16="http://schemas.microsoft.com/office/drawing/2014/main" id="{5CF762A1-9348-44A9-B919-6CA389A124BF}"/>
-              </a:ext>
-            </a:extLst>
-          </p:cNvPr>
-          <p:cNvSpPr>
-            <a:spLocks xmlns:a="http://schemas.openxmlformats.org/drawingml/2006/main" noGrp="1"/>
-          </p:cNvSpPr>
-          <p:nvPr/>
-        </p:nvSpPr>
-        <p:spPr>
-          <a:xfrm xmlns:a="http://schemas.openxmlformats.org/drawingml/2006/main">
-            <a:off x="400050" y="5429250"/>
-            <a:ext cx="7543800" cy="323850"/>
-          </a:xfrm>
-          <a:prstGeom xmlns:a="http://schemas.openxmlformats.org/drawingml/2006/main" prst="rect">
-            <a:avLst/>
-          </a:prstGeom>
-          <a:noFill xmlns:a="http://schemas.openxmlformats.org/drawingml/2006/main"/>
-          <a:ln xmlns:a="http://schemas.openxmlformats.org/drawingml/2006/main" w="0">
-            <a:noFill/>
-            <a:prstDash val="solid"/>
-          </a:ln>
-        </p:spPr>
-        <p:txBody>
-          <a:bodyPr xmlns:a="http://schemas.openxmlformats.org/drawingml/2006/main" anchor="t"/>
-          <a:lstStyle xmlns:a="http://schemas.openxmlformats.org/drawingml/2006/main"/>
-          <a:p xmlns:a="http://schemas.openxmlformats.org/drawingml/2006/main">
-            <a:pPr algn="l">
-              <a:defRPr sz="1200" b="0">
-                <a:solidFill>
-                  <a:srgbClr val="333333"/>
-                </a:solidFill>
-                <a:latin typeface="Helvetica Neue"/>
-                <a:ea typeface="Helvetica Neue"/>
-                <a:cs typeface="Helvetica Neue"/>
-              </a:defRPr>
-            </a:pPr>
-            <a:r>
-              <a:rPr sz="1200" b="0">
-                <a:solidFill>
-                  <a:srgbClr val="333333"/>
-                </a:solidFill>
-                <a:latin typeface="Helvetica Neue"/>
-                <a:ea typeface="Helvetica Neue"/>
-                <a:cs typeface="Helvetica Neue"/>
-              </a:rPr>
-              <a:t>Expanded acronym improves readability and gives the frame scorer a clearer cue.</a:t>
-            </a:r>
-          </a:p>
-        </p:txBody>
-      </p:sp>
-      <p:sp>
-        <p:nvSpPr>
-          <p:cNvPr id="21" name="metrics-panel">
-            <a:extLst xmlns:a="http://schemas.openxmlformats.org/drawingml/2006/main">
-              <a:ext uri="{FF2B5EF4-FFF2-40B4-BE49-F238E27FC236}">
-                <a16:creationId xmlns:a16="http://schemas.microsoft.com/office/drawing/2014/main" id="{BEAA7DD1-BD23-47C7-99FA-1581B93E9585}"/>
-              </a:ext>
-            </a:extLst>
-          </p:cNvPr>
-          <p:cNvSpPr>
-            <a:spLocks xmlns:a="http://schemas.openxmlformats.org/drawingml/2006/main" noGrp="1"/>
-          </p:cNvSpPr>
-          <p:nvPr/>
-        </p:nvSpPr>
-        <p:spPr>
-          <a:xfrm xmlns:a="http://schemas.openxmlformats.org/drawingml/2006/main">
-            <a:off x="8153400" y="1485900"/>
-            <a:ext cx="3638550" cy="4171950"/>
+              <a:t>the agent</a:t>
+            </a:r>
+          </a:p>
+        </p:txBody>
+      </p:sp>
+      <p:sp>
+        <p:nvSpPr>
+          <p:cNvPr id="35" name="table-cell-0-3">
+            <a:extLst xmlns:a="http://schemas.openxmlformats.org/drawingml/2006/main">
+              <a:ext uri="{FF2B5EF4-FFF2-40B4-BE49-F238E27FC236}">
+                <a16:creationId xmlns:a16="http://schemas.microsoft.com/office/drawing/2014/main" id="{CFA0D229-E3AA-4294-B8A9-0D76F2E0C2DB}"/>
+              </a:ext>
+            </a:extLst>
+          </p:cNvPr>
+          <p:cNvSpPr>
+            <a:spLocks xmlns:a="http://schemas.openxmlformats.org/drawingml/2006/main" noGrp="1"/>
+          </p:cNvSpPr>
+          <p:nvPr/>
+        </p:nvSpPr>
+        <p:spPr>
+          <a:xfrm xmlns:a="http://schemas.openxmlformats.org/drawingml/2006/main">
+            <a:off x="10153650" y="2247900"/>
+            <a:ext cx="2324100" cy="609600"/>
           </a:xfrm>
           <a:prstGeom xmlns:a="http://schemas.openxmlformats.org/drawingml/2006/main" prst="rect">
             <a:avLst/>
           </a:prstGeom>
           <a:solidFill xmlns:a="http://schemas.openxmlformats.org/drawingml/2006/main">
-            <a:srgbClr val="F7F7F7"/>
+            <a:srgbClr val="FFFFFF"/>
           </a:solidFill>
           <a:ln xmlns:a="http://schemas.openxmlformats.org/drawingml/2006/main" w="9525">
             <a:solidFill>
@@ -2139,22 +2871,22 @@
       </p:sp>
       <p:sp>
         <p:nvSpPr>
-          <p:cNvPr id="22" name="metrics-title">
-            <a:extLst xmlns:a="http://schemas.openxmlformats.org/drawingml/2006/main">
-              <a:ext uri="{FF2B5EF4-FFF2-40B4-BE49-F238E27FC236}">
-                <a16:creationId xmlns:a16="http://schemas.microsoft.com/office/drawing/2014/main" id="{8ED273FF-6902-4880-8AFF-DA5B397CF1B6}"/>
-              </a:ext>
-            </a:extLst>
-          </p:cNvPr>
-          <p:cNvSpPr>
-            <a:spLocks xmlns:a="http://schemas.openxmlformats.org/drawingml/2006/main" noGrp="1"/>
-          </p:cNvSpPr>
-          <p:nvPr/>
-        </p:nvSpPr>
-        <p:spPr>
-          <a:xfrm xmlns:a="http://schemas.openxmlformats.org/drawingml/2006/main">
-            <a:off x="8401050" y="1714500"/>
-            <a:ext cx="3143250" cy="304800"/>
+          <p:cNvPr id="36" name="table-text-0-3">
+            <a:extLst xmlns:a="http://schemas.openxmlformats.org/drawingml/2006/main">
+              <a:ext uri="{FF2B5EF4-FFF2-40B4-BE49-F238E27FC236}">
+                <a16:creationId xmlns:a16="http://schemas.microsoft.com/office/drawing/2014/main" id="{C849E0F1-B1B9-4EF3-A0AC-36403CC57A99}"/>
+              </a:ext>
+            </a:extLst>
+          </p:cNvPr>
+          <p:cNvSpPr>
+            <a:spLocks xmlns:a="http://schemas.openxmlformats.org/drawingml/2006/main" noGrp="1"/>
+          </p:cNvSpPr>
+          <p:nvPr/>
+        </p:nvSpPr>
+        <p:spPr>
+          <a:xfrm xmlns:a="http://schemas.openxmlformats.org/drawingml/2006/main">
+            <a:off x="10248900" y="2343150"/>
+            <a:ext cx="2133600" cy="457200"/>
           </a:xfrm>
           <a:prstGeom xmlns:a="http://schemas.openxmlformats.org/drawingml/2006/main" prst="rect">
             <a:avLst/>
@@ -2170,9 +2902,9 @@
           <a:lstStyle xmlns:a="http://schemas.openxmlformats.org/drawingml/2006/main"/>
           <a:p xmlns:a="http://schemas.openxmlformats.org/drawingml/2006/main">
             <a:pPr algn="l">
-              <a:defRPr sz="1800" b="1">
-                <a:solidFill>
-                  <a:srgbClr val="000000"/>
+              <a:defRPr sz="1050" b="0">
+                <a:solidFill>
+                  <a:srgbClr val="222222"/>
                 </a:solidFill>
                 <a:latin typeface="Helvetica Neue"/>
                 <a:ea typeface="Helvetica Neue"/>
@@ -2180,37 +2912,70 @@
               </a:defRPr>
             </a:pPr>
             <a:r>
-              <a:rPr sz="1800" b="1">
-                <a:solidFill>
-                  <a:srgbClr val="000000"/>
+              <a:rPr sz="1050" b="0">
+                <a:solidFill>
+                  <a:srgbClr val="222222"/>
                 </a:solidFill>
                 <a:latin typeface="Helvetica Neue"/>
                 <a:ea typeface="Helvetica Neue"/>
                 <a:cs typeface="Helvetica Neue"/>
               </a:rPr>
-              <a:t>Actual mapper output</a:t>
-            </a:r>
-          </a:p>
-        </p:txBody>
-      </p:sp>
-      <p:sp>
-        <p:nvSpPr>
-          <p:cNvPr id="23" name="metrics-note">
-            <a:extLst xmlns:a="http://schemas.openxmlformats.org/drawingml/2006/main">
-              <a:ext uri="{FF2B5EF4-FFF2-40B4-BE49-F238E27FC236}">
-                <a16:creationId xmlns:a16="http://schemas.microsoft.com/office/drawing/2014/main" id="{2C2ADA1A-7125-4974-94F2-A7AABC045629}"/>
-              </a:ext>
-            </a:extLst>
-          </p:cNvPr>
-          <p:cNvSpPr>
-            <a:spLocks xmlns:a="http://schemas.openxmlformats.org/drawingml/2006/main" noGrp="1"/>
-          </p:cNvSpPr>
-          <p:nvPr/>
-        </p:nvSpPr>
-        <p:spPr>
-          <a:xfrm xmlns:a="http://schemas.openxmlformats.org/drawingml/2006/main">
-            <a:off x="8401050" y="2076450"/>
-            <a:ext cx="3048000" cy="590550"/>
+              <a:t>same; correct</a:t>
+            </a:r>
+          </a:p>
+        </p:txBody>
+      </p:sp>
+      <p:sp>
+        <p:nvSpPr>
+          <p:cNvPr id="37" name="table-cell-1-0">
+            <a:extLst xmlns:a="http://schemas.openxmlformats.org/drawingml/2006/main">
+              <a:ext uri="{FF2B5EF4-FFF2-40B4-BE49-F238E27FC236}">
+                <a16:creationId xmlns:a16="http://schemas.microsoft.com/office/drawing/2014/main" id="{AD4F3434-A558-48CC-BE04-7A08CB9BEFD8}"/>
+              </a:ext>
+            </a:extLst>
+          </p:cNvPr>
+          <p:cNvSpPr>
+            <a:spLocks xmlns:a="http://schemas.openxmlformats.org/drawingml/2006/main" noGrp="1"/>
+          </p:cNvSpPr>
+          <p:nvPr/>
+        </p:nvSpPr>
+        <p:spPr>
+          <a:xfrm xmlns:a="http://schemas.openxmlformats.org/drawingml/2006/main">
+            <a:off x="4400550" y="2857500"/>
+            <a:ext cx="1581150" cy="723900"/>
+          </a:xfrm>
+          <a:prstGeom xmlns:a="http://schemas.openxmlformats.org/drawingml/2006/main" prst="rect">
+            <a:avLst/>
+          </a:prstGeom>
+          <a:solidFill xmlns:a="http://schemas.openxmlformats.org/drawingml/2006/main">
+            <a:srgbClr val="F7F7F7"/>
+          </a:solidFill>
+          <a:ln xmlns:a="http://schemas.openxmlformats.org/drawingml/2006/main" w="9525">
+            <a:solidFill>
+              <a:srgbClr val="B8BCC4"/>
+            </a:solidFill>
+            <a:prstDash val="solid"/>
+          </a:ln>
+        </p:spPr>
+      </p:sp>
+      <p:sp>
+        <p:nvSpPr>
+          <p:cNvPr id="38" name="table-text-1-0">
+            <a:extLst xmlns:a="http://schemas.openxmlformats.org/drawingml/2006/main">
+              <a:ext uri="{FF2B5EF4-FFF2-40B4-BE49-F238E27FC236}">
+                <a16:creationId xmlns:a16="http://schemas.microsoft.com/office/drawing/2014/main" id="{F0ED0566-402A-4E81-845E-CFD5E9A55634}"/>
+              </a:ext>
+            </a:extLst>
+          </p:cNvPr>
+          <p:cNvSpPr>
+            <a:spLocks xmlns:a="http://schemas.openxmlformats.org/drawingml/2006/main" noGrp="1"/>
+          </p:cNvSpPr>
+          <p:nvPr/>
+        </p:nvSpPr>
+        <p:spPr>
+          <a:xfrm xmlns:a="http://schemas.openxmlformats.org/drawingml/2006/main">
+            <a:off x="4495800" y="2952750"/>
+            <a:ext cx="1390650" cy="571500"/>
           </a:xfrm>
           <a:prstGeom xmlns:a="http://schemas.openxmlformats.org/drawingml/2006/main" prst="rect">
             <a:avLst/>
@@ -2226,9 +2991,9 @@
           <a:lstStyle xmlns:a="http://schemas.openxmlformats.org/drawingml/2006/main"/>
           <a:p xmlns:a="http://schemas.openxmlformats.org/drawingml/2006/main">
             <a:pPr algn="l">
-              <a:defRPr sz="1200" b="0">
-                <a:solidFill>
-                  <a:srgbClr val="333333"/>
+              <a:defRPr sz="1125" b="1">
+                <a:solidFill>
+                  <a:srgbClr val="222222"/>
                 </a:solidFill>
                 <a:latin typeface="Helvetica Neue"/>
                 <a:ea typeface="Helvetica Neue"/>
@@ -2236,37 +3001,70 @@
               </a:defRPr>
             </a:pPr>
             <a:r>
-              <a:rPr sz="1200" b="0">
-                <a:solidFill>
-                  <a:srgbClr val="333333"/>
+              <a:rPr sz="1125" b="1">
+                <a:solidFill>
+                  <a:srgbClr val="222222"/>
                 </a:solidFill>
                 <a:latin typeface="Helvetica Neue"/>
                 <a:ea typeface="Helvetica Neue"/>
                 <a:cs typeface="Helvetica Neue"/>
               </a:rPr>
-              <a:t>All four runs produced one event mapped to Rewards_and_punishments. New examples raised BERT confidence by +0.0025 and +0.0072.</a:t>
-            </a:r>
-          </a:p>
-        </p:txBody>
-      </p:sp>
-      <p:sp>
-        <p:nvSpPr>
-          <p:cNvPr id="24" name="metric-label-302">
-            <a:extLst xmlns:a="http://schemas.openxmlformats.org/drawingml/2006/main">
-              <a:ext uri="{FF2B5EF4-FFF2-40B4-BE49-F238E27FC236}">
-                <a16:creationId xmlns:a16="http://schemas.microsoft.com/office/drawing/2014/main" id="{EB7D771F-0045-43C4-8C27-640763D13488}"/>
-              </a:ext>
-            </a:extLst>
-          </p:cNvPr>
-          <p:cNvSpPr>
-            <a:spLocks xmlns:a="http://schemas.openxmlformats.org/drawingml/2006/main" noGrp="1"/>
-          </p:cNvSpPr>
-          <p:nvPr/>
-        </p:nvSpPr>
-        <p:spPr>
-          <a:xfrm xmlns:a="http://schemas.openxmlformats.org/drawingml/2006/main">
-            <a:off x="8401050" y="2876550"/>
-            <a:ext cx="1485900" cy="209550"/>
+              <a:t>Case 1 · Response</a:t>
+            </a:r>
+          </a:p>
+        </p:txBody>
+      </p:sp>
+      <p:sp>
+        <p:nvSpPr>
+          <p:cNvPr id="39" name="table-cell-1-1">
+            <a:extLst xmlns:a="http://schemas.openxmlformats.org/drawingml/2006/main">
+              <a:ext uri="{FF2B5EF4-FFF2-40B4-BE49-F238E27FC236}">
+                <a16:creationId xmlns:a16="http://schemas.microsoft.com/office/drawing/2014/main" id="{22E0E8C2-FB45-4853-A38B-32587AE417EE}"/>
+              </a:ext>
+            </a:extLst>
+          </p:cNvPr>
+          <p:cNvSpPr>
+            <a:spLocks xmlns:a="http://schemas.openxmlformats.org/drawingml/2006/main" noGrp="1"/>
+          </p:cNvSpPr>
+          <p:nvPr/>
+        </p:nvSpPr>
+        <p:spPr>
+          <a:xfrm xmlns:a="http://schemas.openxmlformats.org/drawingml/2006/main">
+            <a:off x="5981700" y="2857500"/>
+            <a:ext cx="2076450" cy="723900"/>
+          </a:xfrm>
+          <a:prstGeom xmlns:a="http://schemas.openxmlformats.org/drawingml/2006/main" prst="rect">
+            <a:avLst/>
+          </a:prstGeom>
+          <a:solidFill xmlns:a="http://schemas.openxmlformats.org/drawingml/2006/main">
+            <a:srgbClr val="F7F7F7"/>
+          </a:solidFill>
+          <a:ln xmlns:a="http://schemas.openxmlformats.org/drawingml/2006/main" w="9525">
+            <a:solidFill>
+              <a:srgbClr val="B8BCC4"/>
+            </a:solidFill>
+            <a:prstDash val="solid"/>
+          </a:ln>
+        </p:spPr>
+      </p:sp>
+      <p:sp>
+        <p:nvSpPr>
+          <p:cNvPr id="40" name="table-text-1-1">
+            <a:extLst xmlns:a="http://schemas.openxmlformats.org/drawingml/2006/main">
+              <a:ext uri="{FF2B5EF4-FFF2-40B4-BE49-F238E27FC236}">
+                <a16:creationId xmlns:a16="http://schemas.microsoft.com/office/drawing/2014/main" id="{F66533AB-0321-43D8-8BDB-A5FC935904C4}"/>
+              </a:ext>
+            </a:extLst>
+          </p:cNvPr>
+          <p:cNvSpPr>
+            <a:spLocks xmlns:a="http://schemas.openxmlformats.org/drawingml/2006/main" noGrp="1"/>
+          </p:cNvSpPr>
+          <p:nvPr/>
+        </p:nvSpPr>
+        <p:spPr>
+          <a:xfrm xmlns:a="http://schemas.openxmlformats.org/drawingml/2006/main">
+            <a:off x="6076950" y="2952750"/>
+            <a:ext cx="1885950" cy="571500"/>
           </a:xfrm>
           <a:prstGeom xmlns:a="http://schemas.openxmlformats.org/drawingml/2006/main" prst="rect">
             <a:avLst/>
@@ -2282,9 +3080,9 @@
           <a:lstStyle xmlns:a="http://schemas.openxmlformats.org/drawingml/2006/main"/>
           <a:p xmlns:a="http://schemas.openxmlformats.org/drawingml/2006/main">
             <a:pPr algn="l">
-              <a:defRPr sz="1200" b="0">
-                <a:solidFill>
-                  <a:srgbClr val="333333"/>
+              <a:defRPr sz="1050" b="0">
+                <a:solidFill>
+                  <a:srgbClr val="222222"/>
                 </a:solidFill>
                 <a:latin typeface="Helvetica Neue"/>
                 <a:ea typeface="Helvetica Neue"/>
@@ -2292,37 +3090,70 @@
               </a:defRPr>
             </a:pPr>
             <a:r>
-              <a:rPr sz="1200" b="0">
-                <a:solidFill>
-                  <a:srgbClr val="333333"/>
+              <a:rPr sz="1050" b="0">
+                <a:solidFill>
+                  <a:srgbClr val="222222"/>
                 </a:solidFill>
                 <a:latin typeface="Helvetica Neue"/>
                 <a:ea typeface="Helvetica Neue"/>
                 <a:cs typeface="Helvetica Neue"/>
               </a:rPr>
-              <a:t>Frame</a:t>
-            </a:r>
-          </a:p>
-        </p:txBody>
-      </p:sp>
-      <p:sp>
-        <p:nvSpPr>
-          <p:cNvPr id="25" name="metric-value-302">
-            <a:extLst xmlns:a="http://schemas.openxmlformats.org/drawingml/2006/main">
-              <a:ext uri="{FF2B5EF4-FFF2-40B4-BE49-F238E27FC236}">
-                <a16:creationId xmlns:a16="http://schemas.microsoft.com/office/drawing/2014/main" id="{2ABAE7A8-EE56-4F73-95F0-66F0AC744437}"/>
-              </a:ext>
-            </a:extLst>
-          </p:cNvPr>
-          <p:cNvSpPr>
-            <a:spLocks xmlns:a="http://schemas.openxmlformats.org/drawingml/2006/main" noGrp="1"/>
-          </p:cNvSpPr>
-          <p:nvPr/>
-        </p:nvSpPr>
-        <p:spPr>
-          <a:xfrm xmlns:a="http://schemas.openxmlformats.org/drawingml/2006/main">
-            <a:off x="9886950" y="2876550"/>
-            <a:ext cx="1828800" cy="209550"/>
+              <a:t>…agent does not issue the access code</a:t>
+            </a:r>
+          </a:p>
+        </p:txBody>
+      </p:sp>
+      <p:sp>
+        <p:nvSpPr>
+          <p:cNvPr id="41" name="table-cell-1-2">
+            <a:extLst xmlns:a="http://schemas.openxmlformats.org/drawingml/2006/main">
+              <a:ext uri="{FF2B5EF4-FFF2-40B4-BE49-F238E27FC236}">
+                <a16:creationId xmlns:a16="http://schemas.microsoft.com/office/drawing/2014/main" id="{385CD5BC-4BEB-45EC-B6E8-69FF626CDCE2}"/>
+              </a:ext>
+            </a:extLst>
+          </p:cNvPr>
+          <p:cNvSpPr>
+            <a:spLocks xmlns:a="http://schemas.openxmlformats.org/drawingml/2006/main" noGrp="1"/>
+          </p:cNvSpPr>
+          <p:nvPr/>
+        </p:nvSpPr>
+        <p:spPr>
+          <a:xfrm xmlns:a="http://schemas.openxmlformats.org/drawingml/2006/main">
+            <a:off x="8058150" y="2857500"/>
+            <a:ext cx="2095500" cy="723900"/>
+          </a:xfrm>
+          <a:prstGeom xmlns:a="http://schemas.openxmlformats.org/drawingml/2006/main" prst="rect">
+            <a:avLst/>
+          </a:prstGeom>
+          <a:solidFill xmlns:a="http://schemas.openxmlformats.org/drawingml/2006/main">
+            <a:srgbClr val="F7F7F7"/>
+          </a:solidFill>
+          <a:ln xmlns:a="http://schemas.openxmlformats.org/drawingml/2006/main" w="9525">
+            <a:solidFill>
+              <a:srgbClr val="B8BCC4"/>
+            </a:solidFill>
+            <a:prstDash val="solid"/>
+          </a:ln>
+        </p:spPr>
+      </p:sp>
+      <p:sp>
+        <p:nvSpPr>
+          <p:cNvPr id="42" name="table-text-1-2">
+            <a:extLst xmlns:a="http://schemas.openxmlformats.org/drawingml/2006/main">
+              <a:ext uri="{FF2B5EF4-FFF2-40B4-BE49-F238E27FC236}">
+                <a16:creationId xmlns:a16="http://schemas.microsoft.com/office/drawing/2014/main" id="{F19CD0E1-E96D-474E-9D17-A54A50CCC797}"/>
+              </a:ext>
+            </a:extLst>
+          </p:cNvPr>
+          <p:cNvSpPr>
+            <a:spLocks xmlns:a="http://schemas.openxmlformats.org/drawingml/2006/main" noGrp="1"/>
+          </p:cNvSpPr>
+          <p:nvPr/>
+        </p:nvSpPr>
+        <p:spPr>
+          <a:xfrm xmlns:a="http://schemas.openxmlformats.org/drawingml/2006/main">
+            <a:off x="8153400" y="2952750"/>
+            <a:ext cx="1905000" cy="571500"/>
           </a:xfrm>
           <a:prstGeom xmlns:a="http://schemas.openxmlformats.org/drawingml/2006/main" prst="rect">
             <a:avLst/>
@@ -2338,9 +3169,9 @@
           <a:lstStyle xmlns:a="http://schemas.openxmlformats.org/drawingml/2006/main"/>
           <a:p xmlns:a="http://schemas.openxmlformats.org/drawingml/2006/main">
             <a:pPr algn="l">
-              <a:defRPr sz="1200" b="1">
-                <a:solidFill>
-                  <a:srgbClr val="000000"/>
+              <a:defRPr sz="1050" b="0">
+                <a:solidFill>
+                  <a:srgbClr val="222222"/>
                 </a:solidFill>
                 <a:latin typeface="Helvetica Neue"/>
                 <a:ea typeface="Helvetica Neue"/>
@@ -2348,37 +3179,70 @@
               </a:defRPr>
             </a:pPr>
             <a:r>
-              <a:rPr sz="1200" b="1">
-                <a:solidFill>
-                  <a:srgbClr val="000000"/>
+              <a:rPr sz="1050" b="0">
+                <a:solidFill>
+                  <a:srgbClr val="222222"/>
                 </a:solidFill>
                 <a:latin typeface="Helvetica Neue"/>
                 <a:ea typeface="Helvetica Neue"/>
                 <a:cs typeface="Helvetica Neue"/>
               </a:rPr>
-              <a:t>4/4 correct</a:t>
-            </a:r>
-          </a:p>
-        </p:txBody>
-      </p:sp>
-      <p:sp>
-        <p:nvSpPr>
-          <p:cNvPr id="26" name="metric-label-336">
-            <a:extLst xmlns:a="http://schemas.openxmlformats.org/drawingml/2006/main">
-              <a:ext uri="{FF2B5EF4-FFF2-40B4-BE49-F238E27FC236}">
-                <a16:creationId xmlns:a16="http://schemas.microsoft.com/office/drawing/2014/main" id="{B8857761-FB92-4D70-9028-34C148AE82D5}"/>
-              </a:ext>
-            </a:extLst>
-          </p:cNvPr>
-          <p:cNvSpPr>
-            <a:spLocks xmlns:a="http://schemas.openxmlformats.org/drawingml/2006/main" noGrp="1"/>
-          </p:cNvSpPr>
-          <p:nvPr/>
-        </p:nvSpPr>
-        <p:spPr>
-          <a:xfrm xmlns:a="http://schemas.openxmlformats.org/drawingml/2006/main">
-            <a:off x="8401050" y="3200400"/>
-            <a:ext cx="1485900" cy="209550"/>
+              <a:t>…agent must not issue an access code</a:t>
+            </a:r>
+          </a:p>
+        </p:txBody>
+      </p:sp>
+      <p:sp>
+        <p:nvSpPr>
+          <p:cNvPr id="43" name="table-cell-1-3">
+            <a:extLst xmlns:a="http://schemas.openxmlformats.org/drawingml/2006/main">
+              <a:ext uri="{FF2B5EF4-FFF2-40B4-BE49-F238E27FC236}">
+                <a16:creationId xmlns:a16="http://schemas.microsoft.com/office/drawing/2014/main" id="{B36A4E6A-F4F9-4160-AE92-7E4730AB5B98}"/>
+              </a:ext>
+            </a:extLst>
+          </p:cNvPr>
+          <p:cNvSpPr>
+            <a:spLocks xmlns:a="http://schemas.openxmlformats.org/drawingml/2006/main" noGrp="1"/>
+          </p:cNvSpPr>
+          <p:nvPr/>
+        </p:nvSpPr>
+        <p:spPr>
+          <a:xfrm xmlns:a="http://schemas.openxmlformats.org/drawingml/2006/main">
+            <a:off x="10153650" y="2857500"/>
+            <a:ext cx="2324100" cy="723900"/>
+          </a:xfrm>
+          <a:prstGeom xmlns:a="http://schemas.openxmlformats.org/drawingml/2006/main" prst="rect">
+            <a:avLst/>
+          </a:prstGeom>
+          <a:solidFill xmlns:a="http://schemas.openxmlformats.org/drawingml/2006/main">
+            <a:srgbClr val="F7F7F7"/>
+          </a:solidFill>
+          <a:ln xmlns:a="http://schemas.openxmlformats.org/drawingml/2006/main" w="9525">
+            <a:solidFill>
+              <a:srgbClr val="B8BCC4"/>
+            </a:solidFill>
+            <a:prstDash val="solid"/>
+          </a:ln>
+        </p:spPr>
+      </p:sp>
+      <p:sp>
+        <p:nvSpPr>
+          <p:cNvPr id="44" name="table-text-1-3">
+            <a:extLst xmlns:a="http://schemas.openxmlformats.org/drawingml/2006/main">
+              <a:ext uri="{FF2B5EF4-FFF2-40B4-BE49-F238E27FC236}">
+                <a16:creationId xmlns:a16="http://schemas.microsoft.com/office/drawing/2014/main" id="{DA01E675-86A1-4E48-BEAD-727369658506}"/>
+              </a:ext>
+            </a:extLst>
+          </p:cNvPr>
+          <p:cNvSpPr>
+            <a:spLocks xmlns:a="http://schemas.openxmlformats.org/drawingml/2006/main" noGrp="1"/>
+          </p:cNvSpPr>
+          <p:nvPr/>
+        </p:nvSpPr>
+        <p:spPr>
+          <a:xfrm xmlns:a="http://schemas.openxmlformats.org/drawingml/2006/main">
+            <a:off x="10248900" y="2952750"/>
+            <a:ext cx="2133600" cy="571500"/>
           </a:xfrm>
           <a:prstGeom xmlns:a="http://schemas.openxmlformats.org/drawingml/2006/main" prst="rect">
             <a:avLst/>
@@ -2394,9 +3258,9 @@
           <a:lstStyle xmlns:a="http://schemas.openxmlformats.org/drawingml/2006/main"/>
           <a:p xmlns:a="http://schemas.openxmlformats.org/drawingml/2006/main">
             <a:pPr algn="l">
-              <a:defRPr sz="1200" b="0">
-                <a:solidFill>
-                  <a:srgbClr val="333333"/>
+              <a:defRPr sz="1050" b="0">
+                <a:solidFill>
+                  <a:srgbClr val="222222"/>
                 </a:solidFill>
                 <a:latin typeface="Helvetica Neue"/>
                 <a:ea typeface="Helvetica Neue"/>
@@ -2404,37 +3268,70 @@
               </a:defRPr>
             </a:pPr>
             <a:r>
-              <a:rPr sz="1200" b="0">
-                <a:solidFill>
-                  <a:srgbClr val="333333"/>
+              <a:rPr sz="1050" b="0">
+                <a:solidFill>
+                  <a:srgbClr val="222222"/>
                 </a:solidFill>
                 <a:latin typeface="Helvetica Neue"/>
                 <a:ea typeface="Helvetica Neue"/>
                 <a:cs typeface="Helvetica Neue"/>
               </a:rPr>
-              <a:t>Rule score</a:t>
-            </a:r>
-          </a:p>
-        </p:txBody>
-      </p:sp>
-      <p:sp>
-        <p:nvSpPr>
-          <p:cNvPr id="27" name="metric-value-336">
-            <a:extLst xmlns:a="http://schemas.openxmlformats.org/drawingml/2006/main">
-              <a:ext uri="{FF2B5EF4-FFF2-40B4-BE49-F238E27FC236}">
-                <a16:creationId xmlns:a16="http://schemas.microsoft.com/office/drawing/2014/main" id="{A52438FB-3460-4579-BC5E-0D40E547E91A}"/>
-              </a:ext>
-            </a:extLst>
-          </p:cNvPr>
-          <p:cNvSpPr>
-            <a:spLocks xmlns:a="http://schemas.openxmlformats.org/drawingml/2006/main" noGrp="1"/>
-          </p:cNvSpPr>
-          <p:nvPr/>
-        </p:nvSpPr>
-        <p:spPr>
-          <a:xfrm xmlns:a="http://schemas.openxmlformats.org/drawingml/2006/main">
-            <a:off x="9886950" y="3200400"/>
-            <a:ext cx="1828800" cy="209550"/>
+              <a:t>new wording is more policy-like; span still starts too early</a:t>
+            </a:r>
+          </a:p>
+        </p:txBody>
+      </p:sp>
+      <p:sp>
+        <p:nvSpPr>
+          <p:cNvPr id="45" name="table-cell-2-0">
+            <a:extLst xmlns:a="http://schemas.openxmlformats.org/drawingml/2006/main">
+              <a:ext uri="{FF2B5EF4-FFF2-40B4-BE49-F238E27FC236}">
+                <a16:creationId xmlns:a16="http://schemas.microsoft.com/office/drawing/2014/main" id="{B4A3EEA8-2FE4-4FA3-B689-3DE0EF6D9AB0}"/>
+              </a:ext>
+            </a:extLst>
+          </p:cNvPr>
+          <p:cNvSpPr>
+            <a:spLocks xmlns:a="http://schemas.openxmlformats.org/drawingml/2006/main" noGrp="1"/>
+          </p:cNvSpPr>
+          <p:nvPr/>
+        </p:nvSpPr>
+        <p:spPr>
+          <a:xfrm xmlns:a="http://schemas.openxmlformats.org/drawingml/2006/main">
+            <a:off x="4400550" y="3581400"/>
+            <a:ext cx="1581150" cy="723900"/>
+          </a:xfrm>
+          <a:prstGeom xmlns:a="http://schemas.openxmlformats.org/drawingml/2006/main" prst="rect">
+            <a:avLst/>
+          </a:prstGeom>
+          <a:solidFill xmlns:a="http://schemas.openxmlformats.org/drawingml/2006/main">
+            <a:srgbClr val="FFFFFF"/>
+          </a:solidFill>
+          <a:ln xmlns:a="http://schemas.openxmlformats.org/drawingml/2006/main" w="9525">
+            <a:solidFill>
+              <a:srgbClr val="B8BCC4"/>
+            </a:solidFill>
+            <a:prstDash val="solid"/>
+          </a:ln>
+        </p:spPr>
+      </p:sp>
+      <p:sp>
+        <p:nvSpPr>
+          <p:cNvPr id="46" name="table-text-2-0">
+            <a:extLst xmlns:a="http://schemas.openxmlformats.org/drawingml/2006/main">
+              <a:ext uri="{FF2B5EF4-FFF2-40B4-BE49-F238E27FC236}">
+                <a16:creationId xmlns:a16="http://schemas.microsoft.com/office/drawing/2014/main" id="{58361C13-A1F7-4884-8AFE-03FBE3905267}"/>
+              </a:ext>
+            </a:extLst>
+          </p:cNvPr>
+          <p:cNvSpPr>
+            <a:spLocks xmlns:a="http://schemas.openxmlformats.org/drawingml/2006/main" noGrp="1"/>
+          </p:cNvSpPr>
+          <p:nvPr/>
+        </p:nvSpPr>
+        <p:spPr>
+          <a:xfrm xmlns:a="http://schemas.openxmlformats.org/drawingml/2006/main">
+            <a:off x="4495800" y="3676650"/>
+            <a:ext cx="1390650" cy="571500"/>
           </a:xfrm>
           <a:prstGeom xmlns:a="http://schemas.openxmlformats.org/drawingml/2006/main" prst="rect">
             <a:avLst/>
@@ -2450,9 +3347,9 @@
           <a:lstStyle xmlns:a="http://schemas.openxmlformats.org/drawingml/2006/main"/>
           <a:p xmlns:a="http://schemas.openxmlformats.org/drawingml/2006/main">
             <a:pPr algn="l">
-              <a:defRPr sz="1200" b="1">
-                <a:solidFill>
-                  <a:srgbClr val="000000"/>
+              <a:defRPr sz="1125" b="1">
+                <a:solidFill>
+                  <a:srgbClr val="222222"/>
                 </a:solidFill>
                 <a:latin typeface="Helvetica Neue"/>
                 <a:ea typeface="Helvetica Neue"/>
@@ -2460,37 +3357,70 @@
               </a:defRPr>
             </a:pPr>
             <a:r>
-              <a:rPr sz="1200" b="1">
-                <a:solidFill>
-                  <a:srgbClr val="000000"/>
+              <a:rPr sz="1125" b="1">
+                <a:solidFill>
+                  <a:srgbClr val="222222"/>
                 </a:solidFill>
                 <a:latin typeface="Helvetica Neue"/>
                 <a:ea typeface="Helvetica Neue"/>
                 <a:cs typeface="Helvetica Neue"/>
               </a:rPr>
-              <a:t>1.0000 for all</a:t>
-            </a:r>
-          </a:p>
-        </p:txBody>
-      </p:sp>
-      <p:sp>
-        <p:nvSpPr>
-          <p:cNvPr id="28" name="metric-label-370">
-            <a:extLst xmlns:a="http://schemas.openxmlformats.org/drawingml/2006/main">
-              <a:ext uri="{FF2B5EF4-FFF2-40B4-BE49-F238E27FC236}">
-                <a16:creationId xmlns:a16="http://schemas.microsoft.com/office/drawing/2014/main" id="{E2D81483-8F04-4D84-9499-73F340ECA059}"/>
-              </a:ext>
-            </a:extLst>
-          </p:cNvPr>
-          <p:cNvSpPr>
-            <a:spLocks xmlns:a="http://schemas.openxmlformats.org/drawingml/2006/main" noGrp="1"/>
-          </p:cNvSpPr>
-          <p:nvPr/>
-        </p:nvSpPr>
-        <p:spPr>
-          <a:xfrm xmlns:a="http://schemas.openxmlformats.org/drawingml/2006/main">
-            <a:off x="8401050" y="3524250"/>
-            <a:ext cx="1485900" cy="209550"/>
+              <a:t>Case 1 · Reason</a:t>
+            </a:r>
+          </a:p>
+        </p:txBody>
+      </p:sp>
+      <p:sp>
+        <p:nvSpPr>
+          <p:cNvPr id="47" name="table-cell-2-1">
+            <a:extLst xmlns:a="http://schemas.openxmlformats.org/drawingml/2006/main">
+              <a:ext uri="{FF2B5EF4-FFF2-40B4-BE49-F238E27FC236}">
+                <a16:creationId xmlns:a16="http://schemas.microsoft.com/office/drawing/2014/main" id="{4E68D4F8-2C4E-4411-9FE2-F89BEED69781}"/>
+              </a:ext>
+            </a:extLst>
+          </p:cNvPr>
+          <p:cNvSpPr>
+            <a:spLocks xmlns:a="http://schemas.openxmlformats.org/drawingml/2006/main" noGrp="1"/>
+          </p:cNvSpPr>
+          <p:nvPr/>
+        </p:nvSpPr>
+        <p:spPr>
+          <a:xfrm xmlns:a="http://schemas.openxmlformats.org/drawingml/2006/main">
+            <a:off x="5981700" y="3581400"/>
+            <a:ext cx="2076450" cy="723900"/>
+          </a:xfrm>
+          <a:prstGeom xmlns:a="http://schemas.openxmlformats.org/drawingml/2006/main" prst="rect">
+            <a:avLst/>
+          </a:prstGeom>
+          <a:solidFill xmlns:a="http://schemas.openxmlformats.org/drawingml/2006/main">
+            <a:srgbClr val="FFFFFF"/>
+          </a:solidFill>
+          <a:ln xmlns:a="http://schemas.openxmlformats.org/drawingml/2006/main" w="9525">
+            <a:solidFill>
+              <a:srgbClr val="B8BCC4"/>
+            </a:solidFill>
+            <a:prstDash val="solid"/>
+          </a:ln>
+        </p:spPr>
+      </p:sp>
+      <p:sp>
+        <p:nvSpPr>
+          <p:cNvPr id="48" name="table-text-2-1">
+            <a:extLst xmlns:a="http://schemas.openxmlformats.org/drawingml/2006/main">
+              <a:ext uri="{FF2B5EF4-FFF2-40B4-BE49-F238E27FC236}">
+                <a16:creationId xmlns:a16="http://schemas.microsoft.com/office/drawing/2014/main" id="{FD943E53-9E4C-4C58-BA74-FE93FA719ECC}"/>
+              </a:ext>
+            </a:extLst>
+          </p:cNvPr>
+          <p:cNvSpPr>
+            <a:spLocks xmlns:a="http://schemas.openxmlformats.org/drawingml/2006/main" noGrp="1"/>
+          </p:cNvSpPr>
+          <p:nvPr/>
+        </p:nvSpPr>
+        <p:spPr>
+          <a:xfrm xmlns:a="http://schemas.openxmlformats.org/drawingml/2006/main">
+            <a:off x="6076950" y="3676650"/>
+            <a:ext cx="1885950" cy="571500"/>
           </a:xfrm>
           <a:prstGeom xmlns:a="http://schemas.openxmlformats.org/drawingml/2006/main" prst="rect">
             <a:avLst/>
@@ -2506,9 +3436,9 @@
           <a:lstStyle xmlns:a="http://schemas.openxmlformats.org/drawingml/2006/main"/>
           <a:p xmlns:a="http://schemas.openxmlformats.org/drawingml/2006/main">
             <a:pPr algn="l">
-              <a:defRPr sz="1200" b="0">
-                <a:solidFill>
-                  <a:srgbClr val="333333"/>
+              <a:defRPr sz="1050" b="0">
+                <a:solidFill>
+                  <a:srgbClr val="222222"/>
                 </a:solidFill>
                 <a:latin typeface="Helvetica Neue"/>
                 <a:ea typeface="Helvetica Neue"/>
@@ -2516,37 +3446,70 @@
               </a:defRPr>
             </a:pPr>
             <a:r>
-              <a:rPr sz="1200" b="0">
-                <a:solidFill>
-                  <a:srgbClr val="333333"/>
+              <a:rPr sz="1050" b="0">
+                <a:solidFill>
+                  <a:srgbClr val="222222"/>
                 </a:solidFill>
                 <a:latin typeface="Helvetica Neue"/>
                 <a:ea typeface="Helvetica Neue"/>
                 <a:cs typeface="Helvetica Neue"/>
               </a:rPr>
-              <a:t>Case 1 BERT</a:t>
-            </a:r>
-          </a:p>
-        </p:txBody>
-      </p:sp>
-      <p:sp>
-        <p:nvSpPr>
-          <p:cNvPr id="29" name="metric-value-370">
-            <a:extLst xmlns:a="http://schemas.openxmlformats.org/drawingml/2006/main">
-              <a:ext uri="{FF2B5EF4-FFF2-40B4-BE49-F238E27FC236}">
-                <a16:creationId xmlns:a16="http://schemas.microsoft.com/office/drawing/2014/main" id="{3E01C335-C7B0-43FC-87D3-23058A5947C0}"/>
-              </a:ext>
-            </a:extLst>
-          </p:cNvPr>
-          <p:cNvSpPr>
-            <a:spLocks xmlns:a="http://schemas.openxmlformats.org/drawingml/2006/main" noGrp="1"/>
-          </p:cNvSpPr>
-          <p:nvPr/>
-        </p:nvSpPr>
-        <p:spPr>
-          <a:xfrm xmlns:a="http://schemas.openxmlformats.org/drawingml/2006/main">
-            <a:off x="9886950" y="3524250"/>
-            <a:ext cx="1828800" cy="209550"/>
+              <a:t>fraudulent activity is suspected …</a:t>
+            </a:r>
+          </a:p>
+        </p:txBody>
+      </p:sp>
+      <p:sp>
+        <p:nvSpPr>
+          <p:cNvPr id="49" name="table-cell-2-2">
+            <a:extLst xmlns:a="http://schemas.openxmlformats.org/drawingml/2006/main">
+              <a:ext uri="{FF2B5EF4-FFF2-40B4-BE49-F238E27FC236}">
+                <a16:creationId xmlns:a16="http://schemas.microsoft.com/office/drawing/2014/main" id="{F87AFED8-4DB3-4252-AA2E-8C650CBF9494}"/>
+              </a:ext>
+            </a:extLst>
+          </p:cNvPr>
+          <p:cNvSpPr>
+            <a:spLocks xmlns:a="http://schemas.openxmlformats.org/drawingml/2006/main" noGrp="1"/>
+          </p:cNvSpPr>
+          <p:nvPr/>
+        </p:nvSpPr>
+        <p:spPr>
+          <a:xfrm xmlns:a="http://schemas.openxmlformats.org/drawingml/2006/main">
+            <a:off x="8058150" y="3581400"/>
+            <a:ext cx="2095500" cy="723900"/>
+          </a:xfrm>
+          <a:prstGeom xmlns:a="http://schemas.openxmlformats.org/drawingml/2006/main" prst="rect">
+            <a:avLst/>
+          </a:prstGeom>
+          <a:solidFill xmlns:a="http://schemas.openxmlformats.org/drawingml/2006/main">
+            <a:srgbClr val="FFFFFF"/>
+          </a:solidFill>
+          <a:ln xmlns:a="http://schemas.openxmlformats.org/drawingml/2006/main" w="9525">
+            <a:solidFill>
+              <a:srgbClr val="B8BCC4"/>
+            </a:solidFill>
+            <a:prstDash val="solid"/>
+          </a:ln>
+        </p:spPr>
+      </p:sp>
+      <p:sp>
+        <p:nvSpPr>
+          <p:cNvPr id="50" name="table-text-2-2">
+            <a:extLst xmlns:a="http://schemas.openxmlformats.org/drawingml/2006/main">
+              <a:ext uri="{FF2B5EF4-FFF2-40B4-BE49-F238E27FC236}">
+                <a16:creationId xmlns:a16="http://schemas.microsoft.com/office/drawing/2014/main" id="{B4E1DF51-6672-4A3D-86E5-7110366BA28B}"/>
+              </a:ext>
+            </a:extLst>
+          </p:cNvPr>
+          <p:cNvSpPr>
+            <a:spLocks xmlns:a="http://schemas.openxmlformats.org/drawingml/2006/main" noGrp="1"/>
+          </p:cNvSpPr>
+          <p:nvPr/>
+        </p:nvSpPr>
+        <p:spPr>
+          <a:xfrm xmlns:a="http://schemas.openxmlformats.org/drawingml/2006/main">
+            <a:off x="8153400" y="3676650"/>
+            <a:ext cx="1905000" cy="571500"/>
           </a:xfrm>
           <a:prstGeom xmlns:a="http://schemas.openxmlformats.org/drawingml/2006/main" prst="rect">
             <a:avLst/>
@@ -2562,9 +3525,9 @@
           <a:lstStyle xmlns:a="http://schemas.openxmlformats.org/drawingml/2006/main"/>
           <a:p xmlns:a="http://schemas.openxmlformats.org/drawingml/2006/main">
             <a:pPr algn="l">
-              <a:defRPr sz="1200" b="1">
-                <a:solidFill>
-                  <a:srgbClr val="000000"/>
+              <a:defRPr sz="1050" b="0">
+                <a:solidFill>
+                  <a:srgbClr val="222222"/>
                 </a:solidFill>
                 <a:latin typeface="Helvetica Neue"/>
                 <a:ea typeface="Helvetica Neue"/>
@@ -2572,37 +3535,70 @@
               </a:defRPr>
             </a:pPr>
             <a:r>
-              <a:rPr sz="1200" b="1">
-                <a:solidFill>
-                  <a:srgbClr val="000000"/>
+              <a:rPr sz="1050" b="0">
+                <a:solidFill>
+                  <a:srgbClr val="222222"/>
                 </a:solidFill>
                 <a:latin typeface="Helvetica Neue"/>
                 <a:ea typeface="Helvetica Neue"/>
                 <a:cs typeface="Helvetica Neue"/>
               </a:rPr>
-              <a:t>0.9691 → 0.9716</a:t>
-            </a:r>
-          </a:p>
-        </p:txBody>
-      </p:sp>
-      <p:sp>
-        <p:nvSpPr>
-          <p:cNvPr id="30" name="metric-label-404">
-            <a:extLst xmlns:a="http://schemas.openxmlformats.org/drawingml/2006/main">
-              <a:ext uri="{FF2B5EF4-FFF2-40B4-BE49-F238E27FC236}">
-                <a16:creationId xmlns:a16="http://schemas.microsoft.com/office/drawing/2014/main" id="{49BDB388-5E68-4D34-BFAC-9152BAD95D6F}"/>
-              </a:ext>
-            </a:extLst>
-          </p:cNvPr>
-          <p:cNvSpPr>
-            <a:spLocks xmlns:a="http://schemas.openxmlformats.org/drawingml/2006/main" noGrp="1"/>
-          </p:cNvSpPr>
-          <p:nvPr/>
-        </p:nvSpPr>
-        <p:spPr>
-          <a:xfrm xmlns:a="http://schemas.openxmlformats.org/drawingml/2006/main">
-            <a:off x="8401050" y="3848100"/>
-            <a:ext cx="1485900" cy="209550"/>
+              <a:t>fraud is suspected on Employment Insurance …</a:t>
+            </a:r>
+          </a:p>
+        </p:txBody>
+      </p:sp>
+      <p:sp>
+        <p:nvSpPr>
+          <p:cNvPr id="51" name="table-cell-2-3">
+            <a:extLst xmlns:a="http://schemas.openxmlformats.org/drawingml/2006/main">
+              <a:ext uri="{FF2B5EF4-FFF2-40B4-BE49-F238E27FC236}">
+                <a16:creationId xmlns:a16="http://schemas.microsoft.com/office/drawing/2014/main" id="{C20E0D1A-3A96-4030-8F2D-EFB72B045321}"/>
+              </a:ext>
+            </a:extLst>
+          </p:cNvPr>
+          <p:cNvSpPr>
+            <a:spLocks xmlns:a="http://schemas.openxmlformats.org/drawingml/2006/main" noGrp="1"/>
+          </p:cNvSpPr>
+          <p:nvPr/>
+        </p:nvSpPr>
+        <p:spPr>
+          <a:xfrm xmlns:a="http://schemas.openxmlformats.org/drawingml/2006/main">
+            <a:off x="10153650" y="3581400"/>
+            <a:ext cx="2324100" cy="723900"/>
+          </a:xfrm>
+          <a:prstGeom xmlns:a="http://schemas.openxmlformats.org/drawingml/2006/main" prst="rect">
+            <a:avLst/>
+          </a:prstGeom>
+          <a:solidFill xmlns:a="http://schemas.openxmlformats.org/drawingml/2006/main">
+            <a:srgbClr val="FFFFFF"/>
+          </a:solidFill>
+          <a:ln xmlns:a="http://schemas.openxmlformats.org/drawingml/2006/main" w="9525">
+            <a:solidFill>
+              <a:srgbClr val="B8BCC4"/>
+            </a:solidFill>
+            <a:prstDash val="solid"/>
+          </a:ln>
+        </p:spPr>
+      </p:sp>
+      <p:sp>
+        <p:nvSpPr>
+          <p:cNvPr id="52" name="table-text-2-3">
+            <a:extLst xmlns:a="http://schemas.openxmlformats.org/drawingml/2006/main">
+              <a:ext uri="{FF2B5EF4-FFF2-40B4-BE49-F238E27FC236}">
+                <a16:creationId xmlns:a16="http://schemas.microsoft.com/office/drawing/2014/main" id="{C12ABDE9-FD92-427B-BAA8-0CC4997D65A9}"/>
+              </a:ext>
+            </a:extLst>
+          </p:cNvPr>
+          <p:cNvSpPr>
+            <a:spLocks xmlns:a="http://schemas.openxmlformats.org/drawingml/2006/main" noGrp="1"/>
+          </p:cNvSpPr>
+          <p:nvPr/>
+        </p:nvSpPr>
+        <p:spPr>
+          <a:xfrm xmlns:a="http://schemas.openxmlformats.org/drawingml/2006/main">
+            <a:off x="10248900" y="3676650"/>
+            <a:ext cx="2133600" cy="571500"/>
           </a:xfrm>
           <a:prstGeom xmlns:a="http://schemas.openxmlformats.org/drawingml/2006/main" prst="rect">
             <a:avLst/>
@@ -2618,9 +3614,9 @@
           <a:lstStyle xmlns:a="http://schemas.openxmlformats.org/drawingml/2006/main"/>
           <a:p xmlns:a="http://schemas.openxmlformats.org/drawingml/2006/main">
             <a:pPr algn="l">
-              <a:defRPr sz="1200" b="0">
-                <a:solidFill>
-                  <a:srgbClr val="333333"/>
+              <a:defRPr sz="1050" b="0">
+                <a:solidFill>
+                  <a:srgbClr val="222222"/>
                 </a:solidFill>
                 <a:latin typeface="Helvetica Neue"/>
                 <a:ea typeface="Helvetica Neue"/>
@@ -2628,37 +3624,70 @@
               </a:defRPr>
             </a:pPr>
             <a:r>
-              <a:rPr sz="1200" b="0">
-                <a:solidFill>
-                  <a:srgbClr val="333333"/>
+              <a:rPr sz="1050" b="0">
+                <a:solidFill>
+                  <a:srgbClr val="222222"/>
                 </a:solidFill>
                 <a:latin typeface="Helvetica Neue"/>
                 <a:ea typeface="Helvetica Neue"/>
                 <a:cs typeface="Helvetica Neue"/>
               </a:rPr>
-              <a:t>Case 1 combined</a:t>
-            </a:r>
-          </a:p>
-        </p:txBody>
-      </p:sp>
-      <p:sp>
-        <p:nvSpPr>
-          <p:cNvPr id="31" name="metric-value-404">
-            <a:extLst xmlns:a="http://schemas.openxmlformats.org/drawingml/2006/main">
-              <a:ext uri="{FF2B5EF4-FFF2-40B4-BE49-F238E27FC236}">
-                <a16:creationId xmlns:a16="http://schemas.microsoft.com/office/drawing/2014/main" id="{FF0EFE52-AD2E-4ABA-8FCF-D9A92D5D3882}"/>
-              </a:ext>
-            </a:extLst>
-          </p:cNvPr>
-          <p:cNvSpPr>
-            <a:spLocks xmlns:a="http://schemas.openxmlformats.org/drawingml/2006/main" noGrp="1"/>
-          </p:cNvSpPr>
-          <p:nvPr/>
-        </p:nvSpPr>
-        <p:spPr>
-          <a:xfrm xmlns:a="http://schemas.openxmlformats.org/drawingml/2006/main">
-            <a:off x="9886950" y="3848100"/>
-            <a:ext cx="1828800" cy="209550"/>
+              <a:t>new wording is clearer; span still includes action clause</a:t>
+            </a:r>
+          </a:p>
+        </p:txBody>
+      </p:sp>
+      <p:sp>
+        <p:nvSpPr>
+          <p:cNvPr id="53" name="table-cell-3-0">
+            <a:extLst xmlns:a="http://schemas.openxmlformats.org/drawingml/2006/main">
+              <a:ext uri="{FF2B5EF4-FFF2-40B4-BE49-F238E27FC236}">
+                <a16:creationId xmlns:a16="http://schemas.microsoft.com/office/drawing/2014/main" id="{D8F636B0-3890-4210-B949-CDC1B989BC19}"/>
+              </a:ext>
+            </a:extLst>
+          </p:cNvPr>
+          <p:cNvSpPr>
+            <a:spLocks xmlns:a="http://schemas.openxmlformats.org/drawingml/2006/main" noGrp="1"/>
+          </p:cNvSpPr>
+          <p:nvPr/>
+        </p:nvSpPr>
+        <p:spPr>
+          <a:xfrm xmlns:a="http://schemas.openxmlformats.org/drawingml/2006/main">
+            <a:off x="4400550" y="4305300"/>
+            <a:ext cx="1581150" cy="723900"/>
+          </a:xfrm>
+          <a:prstGeom xmlns:a="http://schemas.openxmlformats.org/drawingml/2006/main" prst="rect">
+            <a:avLst/>
+          </a:prstGeom>
+          <a:solidFill xmlns:a="http://schemas.openxmlformats.org/drawingml/2006/main">
+            <a:srgbClr val="F7F7F7"/>
+          </a:solidFill>
+          <a:ln xmlns:a="http://schemas.openxmlformats.org/drawingml/2006/main" w="9525">
+            <a:solidFill>
+              <a:srgbClr val="B8BCC4"/>
+            </a:solidFill>
+            <a:prstDash val="solid"/>
+          </a:ln>
+        </p:spPr>
+      </p:sp>
+      <p:sp>
+        <p:nvSpPr>
+          <p:cNvPr id="54" name="table-text-3-0">
+            <a:extLst xmlns:a="http://schemas.openxmlformats.org/drawingml/2006/main">
+              <a:ext uri="{FF2B5EF4-FFF2-40B4-BE49-F238E27FC236}">
+                <a16:creationId xmlns:a16="http://schemas.microsoft.com/office/drawing/2014/main" id="{B81438D4-380A-4EC6-B35B-4B7DE5F0D127}"/>
+              </a:ext>
+            </a:extLst>
+          </p:cNvPr>
+          <p:cNvSpPr>
+            <a:spLocks xmlns:a="http://schemas.openxmlformats.org/drawingml/2006/main" noGrp="1"/>
+          </p:cNvSpPr>
+          <p:nvPr/>
+        </p:nvSpPr>
+        <p:spPr>
+          <a:xfrm xmlns:a="http://schemas.openxmlformats.org/drawingml/2006/main">
+            <a:off x="4495800" y="4400550"/>
+            <a:ext cx="1390650" cy="571500"/>
           </a:xfrm>
           <a:prstGeom xmlns:a="http://schemas.openxmlformats.org/drawingml/2006/main" prst="rect">
             <a:avLst/>
@@ -2674,9 +3703,9 @@
           <a:lstStyle xmlns:a="http://schemas.openxmlformats.org/drawingml/2006/main"/>
           <a:p xmlns:a="http://schemas.openxmlformats.org/drawingml/2006/main">
             <a:pPr algn="l">
-              <a:defRPr sz="1200" b="1">
-                <a:solidFill>
-                  <a:srgbClr val="000000"/>
+              <a:defRPr sz="1125" b="1">
+                <a:solidFill>
+                  <a:srgbClr val="222222"/>
                 </a:solidFill>
                 <a:latin typeface="Helvetica Neue"/>
                 <a:ea typeface="Helvetica Neue"/>
@@ -2684,37 +3713,70 @@
               </a:defRPr>
             </a:pPr>
             <a:r>
-              <a:rPr sz="1200" b="1">
-                <a:solidFill>
-                  <a:srgbClr val="000000"/>
+              <a:rPr sz="1125" b="1">
+                <a:solidFill>
+                  <a:srgbClr val="222222"/>
                 </a:solidFill>
                 <a:latin typeface="Helvetica Neue"/>
                 <a:ea typeface="Helvetica Neue"/>
                 <a:cs typeface="Helvetica Neue"/>
               </a:rPr>
-              <a:t>0.9969 → 0.9972</a:t>
-            </a:r>
-          </a:p>
-        </p:txBody>
-      </p:sp>
-      <p:sp>
-        <p:nvSpPr>
-          <p:cNvPr id="32" name="metric-label-438">
-            <a:extLst xmlns:a="http://schemas.openxmlformats.org/drawingml/2006/main">
-              <a:ext uri="{FF2B5EF4-FFF2-40B4-BE49-F238E27FC236}">
-                <a16:creationId xmlns:a16="http://schemas.microsoft.com/office/drawing/2014/main" id="{1A75A3DD-6C70-4EFA-87E3-71C99DD9382E}"/>
-              </a:ext>
-            </a:extLst>
-          </p:cNvPr>
-          <p:cNvSpPr>
-            <a:spLocks xmlns:a="http://schemas.openxmlformats.org/drawingml/2006/main" noGrp="1"/>
-          </p:cNvSpPr>
-          <p:nvPr/>
-        </p:nvSpPr>
-        <p:spPr>
-          <a:xfrm xmlns:a="http://schemas.openxmlformats.org/drawingml/2006/main">
-            <a:off x="8401050" y="4171950"/>
-            <a:ext cx="1485900" cy="209550"/>
+              <a:t>Case 2 · Response</a:t>
+            </a:r>
+          </a:p>
+        </p:txBody>
+      </p:sp>
+      <p:sp>
+        <p:nvSpPr>
+          <p:cNvPr id="55" name="table-cell-3-1">
+            <a:extLst xmlns:a="http://schemas.openxmlformats.org/drawingml/2006/main">
+              <a:ext uri="{FF2B5EF4-FFF2-40B4-BE49-F238E27FC236}">
+                <a16:creationId xmlns:a16="http://schemas.microsoft.com/office/drawing/2014/main" id="{48AFEA05-91E5-4D0F-81EE-C0F9A0C3523D}"/>
+              </a:ext>
+            </a:extLst>
+          </p:cNvPr>
+          <p:cNvSpPr>
+            <a:spLocks xmlns:a="http://schemas.openxmlformats.org/drawingml/2006/main" noGrp="1"/>
+          </p:cNvSpPr>
+          <p:nvPr/>
+        </p:nvSpPr>
+        <p:spPr>
+          <a:xfrm xmlns:a="http://schemas.openxmlformats.org/drawingml/2006/main">
+            <a:off x="5981700" y="4305300"/>
+            <a:ext cx="2076450" cy="723900"/>
+          </a:xfrm>
+          <a:prstGeom xmlns:a="http://schemas.openxmlformats.org/drawingml/2006/main" prst="rect">
+            <a:avLst/>
+          </a:prstGeom>
+          <a:solidFill xmlns:a="http://schemas.openxmlformats.org/drawingml/2006/main">
+            <a:srgbClr val="F7F7F7"/>
+          </a:solidFill>
+          <a:ln xmlns:a="http://schemas.openxmlformats.org/drawingml/2006/main" w="9525">
+            <a:solidFill>
+              <a:srgbClr val="B8BCC4"/>
+            </a:solidFill>
+            <a:prstDash val="solid"/>
+          </a:ln>
+        </p:spPr>
+      </p:sp>
+      <p:sp>
+        <p:nvSpPr>
+          <p:cNvPr id="56" name="table-text-3-1">
+            <a:extLst xmlns:a="http://schemas.openxmlformats.org/drawingml/2006/main">
+              <a:ext uri="{FF2B5EF4-FFF2-40B4-BE49-F238E27FC236}">
+                <a16:creationId xmlns:a16="http://schemas.microsoft.com/office/drawing/2014/main" id="{391B1438-462F-40F6-AE02-EA2EF7AAD593}"/>
+              </a:ext>
+            </a:extLst>
+          </p:cNvPr>
+          <p:cNvSpPr>
+            <a:spLocks xmlns:a="http://schemas.openxmlformats.org/drawingml/2006/main" noGrp="1"/>
+          </p:cNvSpPr>
+          <p:nvPr/>
+        </p:nvSpPr>
+        <p:spPr>
+          <a:xfrm xmlns:a="http://schemas.openxmlformats.org/drawingml/2006/main">
+            <a:off x="6076950" y="4400550"/>
+            <a:ext cx="1885950" cy="571500"/>
           </a:xfrm>
           <a:prstGeom xmlns:a="http://schemas.openxmlformats.org/drawingml/2006/main" prst="rect">
             <a:avLst/>
@@ -2730,9 +3792,9 @@
           <a:lstStyle xmlns:a="http://schemas.openxmlformats.org/drawingml/2006/main"/>
           <a:p xmlns:a="http://schemas.openxmlformats.org/drawingml/2006/main">
             <a:pPr algn="l">
-              <a:defRPr sz="1200" b="0">
-                <a:solidFill>
-                  <a:srgbClr val="333333"/>
+              <a:defRPr sz="1050" b="0">
+                <a:solidFill>
+                  <a:srgbClr val="222222"/>
                 </a:solidFill>
                 <a:latin typeface="Helvetica Neue"/>
                 <a:ea typeface="Helvetica Neue"/>
@@ -2740,37 +3802,70 @@
               </a:defRPr>
             </a:pPr>
             <a:r>
-              <a:rPr sz="1200" b="0">
-                <a:solidFill>
-                  <a:srgbClr val="333333"/>
+              <a:rPr sz="1050" b="0">
+                <a:solidFill>
+                  <a:srgbClr val="222222"/>
                 </a:solidFill>
                 <a:latin typeface="Helvetica Neue"/>
                 <a:ea typeface="Helvetica Neue"/>
                 <a:cs typeface="Helvetica Neue"/>
               </a:rPr>
-              <a:t>Case 2 BERT</a:t>
-            </a:r>
-          </a:p>
-        </p:txBody>
-      </p:sp>
-      <p:sp>
-        <p:nvSpPr>
-          <p:cNvPr id="33" name="metric-value-438">
-            <a:extLst xmlns:a="http://schemas.openxmlformats.org/drawingml/2006/main">
-              <a:ext uri="{FF2B5EF4-FFF2-40B4-BE49-F238E27FC236}">
-                <a16:creationId xmlns:a16="http://schemas.microsoft.com/office/drawing/2014/main" id="{8FC0B9B1-2A9C-4D70-9E87-E0AC7A216D43}"/>
-              </a:ext>
-            </a:extLst>
-          </p:cNvPr>
-          <p:cNvSpPr>
-            <a:spLocks xmlns:a="http://schemas.openxmlformats.org/drawingml/2006/main" noGrp="1"/>
-          </p:cNvSpPr>
-          <p:nvPr/>
-        </p:nvSpPr>
-        <p:spPr>
-          <a:xfrm xmlns:a="http://schemas.openxmlformats.org/drawingml/2006/main">
-            <a:off x="9886950" y="4171950"/>
-            <a:ext cx="1828800" cy="209550"/>
+              <a:t>…claim are processed by a specialized team</a:t>
+            </a:r>
+          </a:p>
+        </p:txBody>
+      </p:sp>
+      <p:sp>
+        <p:nvSpPr>
+          <p:cNvPr id="57" name="table-cell-3-2">
+            <a:extLst xmlns:a="http://schemas.openxmlformats.org/drawingml/2006/main">
+              <a:ext uri="{FF2B5EF4-FFF2-40B4-BE49-F238E27FC236}">
+                <a16:creationId xmlns:a16="http://schemas.microsoft.com/office/drawing/2014/main" id="{BC5B38ED-2CC8-4A33-B210-815038B8BBFD}"/>
+              </a:ext>
+            </a:extLst>
+          </p:cNvPr>
+          <p:cNvSpPr>
+            <a:spLocks xmlns:a="http://schemas.openxmlformats.org/drawingml/2006/main" noGrp="1"/>
+          </p:cNvSpPr>
+          <p:nvPr/>
+        </p:nvSpPr>
+        <p:spPr>
+          <a:xfrm xmlns:a="http://schemas.openxmlformats.org/drawingml/2006/main">
+            <a:off x="8058150" y="4305300"/>
+            <a:ext cx="2095500" cy="723900"/>
+          </a:xfrm>
+          <a:prstGeom xmlns:a="http://schemas.openxmlformats.org/drawingml/2006/main" prst="rect">
+            <a:avLst/>
+          </a:prstGeom>
+          <a:solidFill xmlns:a="http://schemas.openxmlformats.org/drawingml/2006/main">
+            <a:srgbClr val="F7F7F7"/>
+          </a:solidFill>
+          <a:ln xmlns:a="http://schemas.openxmlformats.org/drawingml/2006/main" w="9525">
+            <a:solidFill>
+              <a:srgbClr val="B8BCC4"/>
+            </a:solidFill>
+            <a:prstDash val="solid"/>
+          </a:ln>
+        </p:spPr>
+      </p:sp>
+      <p:sp>
+        <p:nvSpPr>
+          <p:cNvPr id="58" name="table-text-3-2">
+            <a:extLst xmlns:a="http://schemas.openxmlformats.org/drawingml/2006/main">
+              <a:ext uri="{FF2B5EF4-FFF2-40B4-BE49-F238E27FC236}">
+                <a16:creationId xmlns:a16="http://schemas.microsoft.com/office/drawing/2014/main" id="{2DBDA01B-EB70-4124-9AD9-421D5DC268E0}"/>
+              </a:ext>
+            </a:extLst>
+          </p:cNvPr>
+          <p:cNvSpPr>
+            <a:spLocks xmlns:a="http://schemas.openxmlformats.org/drawingml/2006/main" noGrp="1"/>
+          </p:cNvSpPr>
+          <p:nvPr/>
+        </p:nvSpPr>
+        <p:spPr>
+          <a:xfrm xmlns:a="http://schemas.openxmlformats.org/drawingml/2006/main">
+            <a:off x="8153400" y="4400550"/>
+            <a:ext cx="1905000" cy="571500"/>
           </a:xfrm>
           <a:prstGeom xmlns:a="http://schemas.openxmlformats.org/drawingml/2006/main" prst="rect">
             <a:avLst/>
@@ -2786,9 +3881,9 @@
           <a:lstStyle xmlns:a="http://schemas.openxmlformats.org/drawingml/2006/main"/>
           <a:p xmlns:a="http://schemas.openxmlformats.org/drawingml/2006/main">
             <a:pPr algn="l">
-              <a:defRPr sz="1200" b="1">
-                <a:solidFill>
-                  <a:srgbClr val="000000"/>
+              <a:defRPr sz="1050" b="0">
+                <a:solidFill>
+                  <a:srgbClr val="222222"/>
                 </a:solidFill>
                 <a:latin typeface="Helvetica Neue"/>
                 <a:ea typeface="Helvetica Neue"/>
@@ -2796,37 +3891,70 @@
               </a:defRPr>
             </a:pPr>
             <a:r>
-              <a:rPr sz="1200" b="1">
-                <a:solidFill>
-                  <a:srgbClr val="000000"/>
+              <a:rPr sz="1050" b="0">
+                <a:solidFill>
+                  <a:srgbClr val="222222"/>
                 </a:solidFill>
                 <a:latin typeface="Helvetica Neue"/>
                 <a:ea typeface="Helvetica Neue"/>
                 <a:cs typeface="Helvetica Neue"/>
               </a:rPr>
-              <a:t>0.9715 → 0.9787</a:t>
-            </a:r>
-          </a:p>
-        </p:txBody>
-      </p:sp>
-      <p:sp>
-        <p:nvSpPr>
-          <p:cNvPr id="34" name="metric-label-472">
-            <a:extLst xmlns:a="http://schemas.openxmlformats.org/drawingml/2006/main">
-              <a:ext uri="{FF2B5EF4-FFF2-40B4-BE49-F238E27FC236}">
-                <a16:creationId xmlns:a16="http://schemas.microsoft.com/office/drawing/2014/main" id="{718A6C59-5095-4000-819C-34714729F0ED}"/>
-              </a:ext>
-            </a:extLst>
-          </p:cNvPr>
-          <p:cNvSpPr>
-            <a:spLocks xmlns:a="http://schemas.openxmlformats.org/drawingml/2006/main" noGrp="1"/>
-          </p:cNvSpPr>
-          <p:nvPr/>
-        </p:nvSpPr>
-        <p:spPr>
-          <a:xfrm xmlns:a="http://schemas.openxmlformats.org/drawingml/2006/main">
-            <a:off x="8401050" y="4495800"/>
-            <a:ext cx="1485900" cy="209550"/>
+              <a:t>…claim are processed by a specialized team</a:t>
+            </a:r>
+          </a:p>
+        </p:txBody>
+      </p:sp>
+      <p:sp>
+        <p:nvSpPr>
+          <p:cNvPr id="59" name="table-cell-3-3">
+            <a:extLst xmlns:a="http://schemas.openxmlformats.org/drawingml/2006/main">
+              <a:ext uri="{FF2B5EF4-FFF2-40B4-BE49-F238E27FC236}">
+                <a16:creationId xmlns:a16="http://schemas.microsoft.com/office/drawing/2014/main" id="{D292E19D-5A76-4181-9F9B-1915C85D34B7}"/>
+              </a:ext>
+            </a:extLst>
+          </p:cNvPr>
+          <p:cNvSpPr>
+            <a:spLocks xmlns:a="http://schemas.openxmlformats.org/drawingml/2006/main" noGrp="1"/>
+          </p:cNvSpPr>
+          <p:nvPr/>
+        </p:nvSpPr>
+        <p:spPr>
+          <a:xfrm xmlns:a="http://schemas.openxmlformats.org/drawingml/2006/main">
+            <a:off x="10153650" y="4305300"/>
+            <a:ext cx="2324100" cy="723900"/>
+          </a:xfrm>
+          <a:prstGeom xmlns:a="http://schemas.openxmlformats.org/drawingml/2006/main" prst="rect">
+            <a:avLst/>
+          </a:prstGeom>
+          <a:solidFill xmlns:a="http://schemas.openxmlformats.org/drawingml/2006/main">
+            <a:srgbClr val="F7F7F7"/>
+          </a:solidFill>
+          <a:ln xmlns:a="http://schemas.openxmlformats.org/drawingml/2006/main" w="9525">
+            <a:solidFill>
+              <a:srgbClr val="B8BCC4"/>
+            </a:solidFill>
+            <a:prstDash val="solid"/>
+          </a:ln>
+        </p:spPr>
+      </p:sp>
+      <p:sp>
+        <p:nvSpPr>
+          <p:cNvPr id="60" name="table-text-3-3">
+            <a:extLst xmlns:a="http://schemas.openxmlformats.org/drawingml/2006/main">
+              <a:ext uri="{FF2B5EF4-FFF2-40B4-BE49-F238E27FC236}">
+                <a16:creationId xmlns:a16="http://schemas.microsoft.com/office/drawing/2014/main" id="{2AFF9539-EA74-4A59-921E-8CB245349AB9}"/>
+              </a:ext>
+            </a:extLst>
+          </p:cNvPr>
+          <p:cNvSpPr>
+            <a:spLocks xmlns:a="http://schemas.openxmlformats.org/drawingml/2006/main" noGrp="1"/>
+          </p:cNvSpPr>
+          <p:nvPr/>
+        </p:nvSpPr>
+        <p:spPr>
+          <a:xfrm xmlns:a="http://schemas.openxmlformats.org/drawingml/2006/main">
+            <a:off x="10248900" y="4400550"/>
+            <a:ext cx="2133600" cy="571500"/>
           </a:xfrm>
           <a:prstGeom xmlns:a="http://schemas.openxmlformats.org/drawingml/2006/main" prst="rect">
             <a:avLst/>
@@ -2842,9 +3970,9 @@
           <a:lstStyle xmlns:a="http://schemas.openxmlformats.org/drawingml/2006/main"/>
           <a:p xmlns:a="http://schemas.openxmlformats.org/drawingml/2006/main">
             <a:pPr algn="l">
-              <a:defRPr sz="1200" b="0">
-                <a:solidFill>
-                  <a:srgbClr val="333333"/>
+              <a:defRPr sz="1050" b="0">
+                <a:solidFill>
+                  <a:srgbClr val="222222"/>
                 </a:solidFill>
                 <a:latin typeface="Helvetica Neue"/>
                 <a:ea typeface="Helvetica Neue"/>
@@ -2852,37 +3980,70 @@
               </a:defRPr>
             </a:pPr>
             <a:r>
-              <a:rPr sz="1200" b="0">
-                <a:solidFill>
-                  <a:srgbClr val="333333"/>
+              <a:rPr sz="1050" b="0">
+                <a:solidFill>
+                  <a:srgbClr val="222222"/>
                 </a:solidFill>
                 <a:latin typeface="Helvetica Neue"/>
                 <a:ea typeface="Helvetica Neue"/>
                 <a:cs typeface="Helvetica Neue"/>
               </a:rPr>
-              <a:t>Case 2 combined</a:t>
-            </a:r>
-          </a:p>
-        </p:txBody>
-      </p:sp>
-      <p:sp>
-        <p:nvSpPr>
-          <p:cNvPr id="35" name="metric-value-472">
-            <a:extLst xmlns:a="http://schemas.openxmlformats.org/drawingml/2006/main">
-              <a:ext uri="{FF2B5EF4-FFF2-40B4-BE49-F238E27FC236}">
-                <a16:creationId xmlns:a16="http://schemas.microsoft.com/office/drawing/2014/main" id="{21D8797A-D5FF-49BA-B4A3-FF261B603729}"/>
-              </a:ext>
-            </a:extLst>
-          </p:cNvPr>
-          <p:cNvSpPr>
-            <a:spLocks xmlns:a="http://schemas.openxmlformats.org/drawingml/2006/main" noGrp="1"/>
-          </p:cNvSpPr>
-          <p:nvPr/>
-        </p:nvSpPr>
-        <p:spPr>
-          <a:xfrm xmlns:a="http://schemas.openxmlformats.org/drawingml/2006/main">
-            <a:off x="9886950" y="4495800"/>
-            <a:ext cx="1828800" cy="209550"/>
+              <a:t>same content; action is usable but misses work-item subject</a:t>
+            </a:r>
+          </a:p>
+        </p:txBody>
+      </p:sp>
+      <p:sp>
+        <p:nvSpPr>
+          <p:cNvPr id="61" name="table-cell-4-0">
+            <a:extLst xmlns:a="http://schemas.openxmlformats.org/drawingml/2006/main">
+              <a:ext uri="{FF2B5EF4-FFF2-40B4-BE49-F238E27FC236}">
+                <a16:creationId xmlns:a16="http://schemas.microsoft.com/office/drawing/2014/main" id="{0BC3909E-8D2D-4F2D-85DA-C01CC50CDC06}"/>
+              </a:ext>
+            </a:extLst>
+          </p:cNvPr>
+          <p:cNvSpPr>
+            <a:spLocks xmlns:a="http://schemas.openxmlformats.org/drawingml/2006/main" noGrp="1"/>
+          </p:cNvSpPr>
+          <p:nvPr/>
+        </p:nvSpPr>
+        <p:spPr>
+          <a:xfrm xmlns:a="http://schemas.openxmlformats.org/drawingml/2006/main">
+            <a:off x="4400550" y="5029200"/>
+            <a:ext cx="1581150" cy="723900"/>
+          </a:xfrm>
+          <a:prstGeom xmlns:a="http://schemas.openxmlformats.org/drawingml/2006/main" prst="rect">
+            <a:avLst/>
+          </a:prstGeom>
+          <a:solidFill xmlns:a="http://schemas.openxmlformats.org/drawingml/2006/main">
+            <a:srgbClr val="FFFFFF"/>
+          </a:solidFill>
+          <a:ln xmlns:a="http://schemas.openxmlformats.org/drawingml/2006/main" w="9525">
+            <a:solidFill>
+              <a:srgbClr val="B8BCC4"/>
+            </a:solidFill>
+            <a:prstDash val="solid"/>
+          </a:ln>
+        </p:spPr>
+      </p:sp>
+      <p:sp>
+        <p:nvSpPr>
+          <p:cNvPr id="62" name="table-text-4-0">
+            <a:extLst xmlns:a="http://schemas.openxmlformats.org/drawingml/2006/main">
+              <a:ext uri="{FF2B5EF4-FFF2-40B4-BE49-F238E27FC236}">
+                <a16:creationId xmlns:a16="http://schemas.microsoft.com/office/drawing/2014/main" id="{83C3FFFE-4EDC-4DED-9F1B-44A246630974}"/>
+              </a:ext>
+            </a:extLst>
+          </p:cNvPr>
+          <p:cNvSpPr>
+            <a:spLocks xmlns:a="http://schemas.openxmlformats.org/drawingml/2006/main" noGrp="1"/>
+          </p:cNvSpPr>
+          <p:nvPr/>
+        </p:nvSpPr>
+        <p:spPr>
+          <a:xfrm xmlns:a="http://schemas.openxmlformats.org/drawingml/2006/main">
+            <a:off x="4495800" y="5124450"/>
+            <a:ext cx="1390650" cy="571500"/>
           </a:xfrm>
           <a:prstGeom xmlns:a="http://schemas.openxmlformats.org/drawingml/2006/main" prst="rect">
             <a:avLst/>
@@ -2898,9 +4059,9 @@
           <a:lstStyle xmlns:a="http://schemas.openxmlformats.org/drawingml/2006/main"/>
           <a:p xmlns:a="http://schemas.openxmlformats.org/drawingml/2006/main">
             <a:pPr algn="l">
-              <a:defRPr sz="1200" b="1">
-                <a:solidFill>
-                  <a:srgbClr val="000000"/>
+              <a:defRPr sz="1125" b="1">
+                <a:solidFill>
+                  <a:srgbClr val="222222"/>
                 </a:solidFill>
                 <a:latin typeface="Helvetica Neue"/>
                 <a:ea typeface="Helvetica Neue"/>
@@ -2908,37 +4069,70 @@
               </a:defRPr>
             </a:pPr>
             <a:r>
-              <a:rPr sz="1200" b="1">
-                <a:solidFill>
-                  <a:srgbClr val="000000"/>
+              <a:rPr sz="1125" b="1">
+                <a:solidFill>
+                  <a:srgbClr val="222222"/>
                 </a:solidFill>
                 <a:latin typeface="Helvetica Neue"/>
                 <a:ea typeface="Helvetica Neue"/>
                 <a:cs typeface="Helvetica Neue"/>
               </a:rPr>
-              <a:t>0.9972 → 0.9979</a:t>
-            </a:r>
-          </a:p>
-        </p:txBody>
-      </p:sp>
-      <p:sp>
-        <p:nvSpPr>
-          <p:cNvPr id="36" name="metric-label-506">
-            <a:extLst xmlns:a="http://schemas.openxmlformats.org/drawingml/2006/main">
-              <a:ext uri="{FF2B5EF4-FFF2-40B4-BE49-F238E27FC236}">
-                <a16:creationId xmlns:a16="http://schemas.microsoft.com/office/drawing/2014/main" id="{34F46F35-A677-4908-96B6-870128A53543}"/>
-              </a:ext>
-            </a:extLst>
-          </p:cNvPr>
-          <p:cNvSpPr>
-            <a:spLocks xmlns:a="http://schemas.openxmlformats.org/drawingml/2006/main" noGrp="1"/>
-          </p:cNvSpPr>
-          <p:nvPr/>
-        </p:nvSpPr>
-        <p:spPr>
-          <a:xfrm xmlns:a="http://schemas.openxmlformats.org/drawingml/2006/main">
-            <a:off x="8401050" y="4819650"/>
-            <a:ext cx="1485900" cy="209550"/>
+              <a:t>Case 2 · Reason/Result</a:t>
+            </a:r>
+          </a:p>
+        </p:txBody>
+      </p:sp>
+      <p:sp>
+        <p:nvSpPr>
+          <p:cNvPr id="63" name="table-cell-4-1">
+            <a:extLst xmlns:a="http://schemas.openxmlformats.org/drawingml/2006/main">
+              <a:ext uri="{FF2B5EF4-FFF2-40B4-BE49-F238E27FC236}">
+                <a16:creationId xmlns:a16="http://schemas.microsoft.com/office/drawing/2014/main" id="{6658009C-D856-4E7D-B439-7A102D407800}"/>
+              </a:ext>
+            </a:extLst>
+          </p:cNvPr>
+          <p:cNvSpPr>
+            <a:spLocks xmlns:a="http://schemas.openxmlformats.org/drawingml/2006/main" noGrp="1"/>
+          </p:cNvSpPr>
+          <p:nvPr/>
+        </p:nvSpPr>
+        <p:spPr>
+          <a:xfrm xmlns:a="http://schemas.openxmlformats.org/drawingml/2006/main">
+            <a:off x="5981700" y="5029200"/>
+            <a:ext cx="2076450" cy="723900"/>
+          </a:xfrm>
+          <a:prstGeom xmlns:a="http://schemas.openxmlformats.org/drawingml/2006/main" prst="rect">
+            <a:avLst/>
+          </a:prstGeom>
+          <a:solidFill xmlns:a="http://schemas.openxmlformats.org/drawingml/2006/main">
+            <a:srgbClr val="FFFFFF"/>
+          </a:solidFill>
+          <a:ln xmlns:a="http://schemas.openxmlformats.org/drawingml/2006/main" w="9525">
+            <a:solidFill>
+              <a:srgbClr val="B8BCC4"/>
+            </a:solidFill>
+            <a:prstDash val="solid"/>
+          </a:ln>
+        </p:spPr>
+      </p:sp>
+      <p:sp>
+        <p:nvSpPr>
+          <p:cNvPr id="64" name="table-text-4-1">
+            <a:extLst xmlns:a="http://schemas.openxmlformats.org/drawingml/2006/main">
+              <a:ext uri="{FF2B5EF4-FFF2-40B4-BE49-F238E27FC236}">
+                <a16:creationId xmlns:a16="http://schemas.microsoft.com/office/drawing/2014/main" id="{C985CBDA-1395-4CFC-93A8-04906F2F8C7C}"/>
+              </a:ext>
+            </a:extLst>
+          </p:cNvPr>
+          <p:cNvSpPr>
+            <a:spLocks xmlns:a="http://schemas.openxmlformats.org/drawingml/2006/main" noGrp="1"/>
+          </p:cNvSpPr>
+          <p:nvPr/>
+        </p:nvSpPr>
+        <p:spPr>
+          <a:xfrm xmlns:a="http://schemas.openxmlformats.org/drawingml/2006/main">
+            <a:off x="6076950" y="5124450"/>
+            <a:ext cx="1885950" cy="571500"/>
           </a:xfrm>
           <a:prstGeom xmlns:a="http://schemas.openxmlformats.org/drawingml/2006/main" prst="rect">
             <a:avLst/>
@@ -2954,9 +4148,9 @@
           <a:lstStyle xmlns:a="http://schemas.openxmlformats.org/drawingml/2006/main"/>
           <a:p xmlns:a="http://schemas.openxmlformats.org/drawingml/2006/main">
             <a:pPr algn="l">
-              <a:defRPr sz="1200" b="0">
-                <a:solidFill>
-                  <a:srgbClr val="333333"/>
+              <a:defRPr sz="1050" b="0">
+                <a:solidFill>
+                  <a:srgbClr val="222222"/>
                 </a:solidFill>
                 <a:latin typeface="Helvetica Neue"/>
                 <a:ea typeface="Helvetica Neue"/>
@@ -2964,37 +4158,70 @@
               </a:defRPr>
             </a:pPr>
             <a:r>
-              <a:rPr sz="1200" b="0">
-                <a:solidFill>
-                  <a:srgbClr val="333333"/>
+              <a:rPr sz="1050" b="0">
+                <a:solidFill>
+                  <a:srgbClr val="222222"/>
                 </a:solidFill>
                 <a:latin typeface="Helvetica Neue"/>
                 <a:ea typeface="Helvetica Neue"/>
                 <a:cs typeface="Helvetica Neue"/>
               </a:rPr>
-              <a:t>Filled FEs</a:t>
-            </a:r>
-          </a:p>
-        </p:txBody>
-      </p:sp>
-      <p:sp>
-        <p:nvSpPr>
-          <p:cNvPr id="37" name="metric-value-506">
-            <a:extLst xmlns:a="http://schemas.openxmlformats.org/drawingml/2006/main">
-              <a:ext uri="{FF2B5EF4-FFF2-40B4-BE49-F238E27FC236}">
-                <a16:creationId xmlns:a16="http://schemas.microsoft.com/office/drawing/2014/main" id="{4FCD2BF1-7514-4DFF-91A3-94BC33FD210B}"/>
-              </a:ext>
-            </a:extLst>
-          </p:cNvPr>
-          <p:cNvSpPr>
-            <a:spLocks xmlns:a="http://schemas.openxmlformats.org/drawingml/2006/main" noGrp="1"/>
-          </p:cNvSpPr>
-          <p:nvPr/>
-        </p:nvSpPr>
-        <p:spPr>
-          <a:xfrm xmlns:a="http://schemas.openxmlformats.org/drawingml/2006/main">
-            <a:off x="9886950" y="4819650"/>
-            <a:ext cx="1828800" cy="209550"/>
+              <a:t>EI Emergency Response</a:t>
+            </a:r>
+          </a:p>
+        </p:txBody>
+      </p:sp>
+      <p:sp>
+        <p:nvSpPr>
+          <p:cNvPr id="65" name="table-cell-4-2">
+            <a:extLst xmlns:a="http://schemas.openxmlformats.org/drawingml/2006/main">
+              <a:ext uri="{FF2B5EF4-FFF2-40B4-BE49-F238E27FC236}">
+                <a16:creationId xmlns:a16="http://schemas.microsoft.com/office/drawing/2014/main" id="{9C00D0BB-5A4B-4F46-BD7E-2F08BAA33F8F}"/>
+              </a:ext>
+            </a:extLst>
+          </p:cNvPr>
+          <p:cNvSpPr>
+            <a:spLocks xmlns:a="http://schemas.openxmlformats.org/drawingml/2006/main" noGrp="1"/>
+          </p:cNvSpPr>
+          <p:nvPr/>
+        </p:nvSpPr>
+        <p:spPr>
+          <a:xfrm xmlns:a="http://schemas.openxmlformats.org/drawingml/2006/main">
+            <a:off x="8058150" y="5029200"/>
+            <a:ext cx="2095500" cy="723900"/>
+          </a:xfrm>
+          <a:prstGeom xmlns:a="http://schemas.openxmlformats.org/drawingml/2006/main" prst="rect">
+            <a:avLst/>
+          </a:prstGeom>
+          <a:solidFill xmlns:a="http://schemas.openxmlformats.org/drawingml/2006/main">
+            <a:srgbClr val="FFFFFF"/>
+          </a:solidFill>
+          <a:ln xmlns:a="http://schemas.openxmlformats.org/drawingml/2006/main" w="9525">
+            <a:solidFill>
+              <a:srgbClr val="B8BCC4"/>
+            </a:solidFill>
+            <a:prstDash val="solid"/>
+          </a:ln>
+        </p:spPr>
+      </p:sp>
+      <p:sp>
+        <p:nvSpPr>
+          <p:cNvPr id="66" name="table-text-4-2">
+            <a:extLst xmlns:a="http://schemas.openxmlformats.org/drawingml/2006/main">
+              <a:ext uri="{FF2B5EF4-FFF2-40B4-BE49-F238E27FC236}">
+                <a16:creationId xmlns:a16="http://schemas.microsoft.com/office/drawing/2014/main" id="{B4677684-506D-4E8E-A1EC-99F9BD678E47}"/>
+              </a:ext>
+            </a:extLst>
+          </p:cNvPr>
+          <p:cNvSpPr>
+            <a:spLocks xmlns:a="http://schemas.openxmlformats.org/drawingml/2006/main" noGrp="1"/>
+          </p:cNvSpPr>
+          <p:nvPr/>
+        </p:nvSpPr>
+        <p:spPr>
+          <a:xfrm xmlns:a="http://schemas.openxmlformats.org/drawingml/2006/main">
+            <a:off x="8153400" y="5124450"/>
+            <a:ext cx="1905000" cy="571500"/>
           </a:xfrm>
           <a:prstGeom xmlns:a="http://schemas.openxmlformats.org/drawingml/2006/main" prst="rect">
             <a:avLst/>
@@ -3010,9 +4237,9 @@
           <a:lstStyle xmlns:a="http://schemas.openxmlformats.org/drawingml/2006/main"/>
           <a:p xmlns:a="http://schemas.openxmlformats.org/drawingml/2006/main">
             <a:pPr algn="l">
-              <a:defRPr sz="1200" b="1">
-                <a:solidFill>
-                  <a:srgbClr val="000000"/>
+              <a:defRPr sz="1050" b="0">
+                <a:solidFill>
+                  <a:srgbClr val="222222"/>
                 </a:solidFill>
                 <a:latin typeface="Helvetica Neue"/>
                 <a:ea typeface="Helvetica Neue"/>
@@ -3020,37 +4247,70 @@
               </a:defRPr>
             </a:pPr>
             <a:r>
-              <a:rPr sz="1200" b="1">
-                <a:solidFill>
-                  <a:srgbClr val="000000"/>
+              <a:rPr sz="1050" b="0">
+                <a:solidFill>
+                  <a:srgbClr val="222222"/>
                 </a:solidFill>
                 <a:latin typeface="Helvetica Neue"/>
                 <a:ea typeface="Helvetica Neue"/>
                 <a:cs typeface="Helvetica Neue"/>
               </a:rPr>
-              <a:t>4→4, 3→3</a:t>
-            </a:r>
-          </a:p>
-        </p:txBody>
-      </p:sp>
-      <p:sp>
-        <p:nvSpPr>
-          <p:cNvPr id="38" name="metric-label-540">
-            <a:extLst xmlns:a="http://schemas.openxmlformats.org/drawingml/2006/main">
-              <a:ext uri="{FF2B5EF4-FFF2-40B4-BE49-F238E27FC236}">
-                <a16:creationId xmlns:a16="http://schemas.microsoft.com/office/drawing/2014/main" id="{78597CCC-5300-4A02-A2CE-6944FEFF1977}"/>
-              </a:ext>
-            </a:extLst>
-          </p:cNvPr>
-          <p:cNvSpPr>
-            <a:spLocks xmlns:a="http://schemas.openxmlformats.org/drawingml/2006/main" noGrp="1"/>
-          </p:cNvSpPr>
-          <p:nvPr/>
-        </p:nvSpPr>
-        <p:spPr>
-          <a:xfrm xmlns:a="http://schemas.openxmlformats.org/drawingml/2006/main">
-            <a:off x="8401050" y="5143500"/>
-            <a:ext cx="1485900" cy="209550"/>
+              <a:t>EI Emergency Response</a:t>
+            </a:r>
+          </a:p>
+        </p:txBody>
+      </p:sp>
+      <p:sp>
+        <p:nvSpPr>
+          <p:cNvPr id="67" name="table-cell-4-3">
+            <a:extLst xmlns:a="http://schemas.openxmlformats.org/drawingml/2006/main">
+              <a:ext uri="{FF2B5EF4-FFF2-40B4-BE49-F238E27FC236}">
+                <a16:creationId xmlns:a16="http://schemas.microsoft.com/office/drawing/2014/main" id="{E6EC4D56-D408-44E2-827A-F3C2885CC99C}"/>
+              </a:ext>
+            </a:extLst>
+          </p:cNvPr>
+          <p:cNvSpPr>
+            <a:spLocks xmlns:a="http://schemas.openxmlformats.org/drawingml/2006/main" noGrp="1"/>
+          </p:cNvSpPr>
+          <p:nvPr/>
+        </p:nvSpPr>
+        <p:spPr>
+          <a:xfrm xmlns:a="http://schemas.openxmlformats.org/drawingml/2006/main">
+            <a:off x="10153650" y="5029200"/>
+            <a:ext cx="2324100" cy="723900"/>
+          </a:xfrm>
+          <a:prstGeom xmlns:a="http://schemas.openxmlformats.org/drawingml/2006/main" prst="rect">
+            <a:avLst/>
+          </a:prstGeom>
+          <a:solidFill xmlns:a="http://schemas.openxmlformats.org/drawingml/2006/main">
+            <a:srgbClr val="FFFFFF"/>
+          </a:solidFill>
+          <a:ln xmlns:a="http://schemas.openxmlformats.org/drawingml/2006/main" w="9525">
+            <a:solidFill>
+              <a:srgbClr val="B8BCC4"/>
+            </a:solidFill>
+            <a:prstDash val="solid"/>
+          </a:ln>
+        </p:spPr>
+      </p:sp>
+      <p:sp>
+        <p:nvSpPr>
+          <p:cNvPr id="68" name="table-text-4-3">
+            <a:extLst xmlns:a="http://schemas.openxmlformats.org/drawingml/2006/main">
+              <a:ext uri="{FF2B5EF4-FFF2-40B4-BE49-F238E27FC236}">
+                <a16:creationId xmlns:a16="http://schemas.microsoft.com/office/drawing/2014/main" id="{131C0774-BB11-4E29-BBD6-0C287D50315C}"/>
+              </a:ext>
+            </a:extLst>
+          </p:cNvPr>
+          <p:cNvSpPr>
+            <a:spLocks xmlns:a="http://schemas.openxmlformats.org/drawingml/2006/main" noGrp="1"/>
+          </p:cNvSpPr>
+          <p:nvPr/>
+        </p:nvSpPr>
+        <p:spPr>
+          <a:xfrm xmlns:a="http://schemas.openxmlformats.org/drawingml/2006/main">
+            <a:off x="10248900" y="5124450"/>
+            <a:ext cx="2133600" cy="571500"/>
           </a:xfrm>
           <a:prstGeom xmlns:a="http://schemas.openxmlformats.org/drawingml/2006/main" prst="rect">
             <a:avLst/>
@@ -3066,9 +4326,9 @@
           <a:lstStyle xmlns:a="http://schemas.openxmlformats.org/drawingml/2006/main"/>
           <a:p xmlns:a="http://schemas.openxmlformats.org/drawingml/2006/main">
             <a:pPr algn="l">
-              <a:defRPr sz="1200" b="0">
-                <a:solidFill>
-                  <a:srgbClr val="333333"/>
+              <a:defRPr sz="1050" b="0">
+                <a:solidFill>
+                  <a:srgbClr val="7A1F1F"/>
                 </a:solidFill>
                 <a:latin typeface="Helvetica Neue"/>
                 <a:ea typeface="Helvetica Neue"/>
@@ -3076,37 +4336,37 @@
               </a:defRPr>
             </a:pPr>
             <a:r>
-              <a:rPr sz="1200" b="0">
-                <a:solidFill>
-                  <a:srgbClr val="333333"/>
+              <a:rPr sz="1050" b="0">
+                <a:solidFill>
+                  <a:srgbClr val="7A1F1F"/>
                 </a:solidFill>
                 <a:latin typeface="Helvetica Neue"/>
                 <a:ea typeface="Helvetica Neue"/>
                 <a:cs typeface="Helvetica Neue"/>
               </a:rPr>
-              <a:t>BERT QA FEs</a:t>
-            </a:r>
-          </a:p>
-        </p:txBody>
-      </p:sp>
-      <p:sp>
-        <p:nvSpPr>
-          <p:cNvPr id="39" name="metric-value-540">
-            <a:extLst xmlns:a="http://schemas.openxmlformats.org/drawingml/2006/main">
-              <a:ext uri="{FF2B5EF4-FFF2-40B4-BE49-F238E27FC236}">
-                <a16:creationId xmlns:a16="http://schemas.microsoft.com/office/drawing/2014/main" id="{BEEF7F09-2C0E-4FB6-A94A-4A28F2964602}"/>
-              </a:ext>
-            </a:extLst>
-          </p:cNvPr>
-          <p:cNvSpPr>
-            <a:spLocks xmlns:a="http://schemas.openxmlformats.org/drawingml/2006/main" noGrp="1"/>
-          </p:cNvSpPr>
-          <p:nvPr/>
-        </p:nvSpPr>
-        <p:spPr>
-          <a:xfrm xmlns:a="http://schemas.openxmlformats.org/drawingml/2006/main">
-            <a:off x="9886950" y="5143500"/>
-            <a:ext cx="1828800" cy="209550"/>
+              <a:t>not meaningful; no improvement from revised wording</a:t>
+            </a:r>
+          </a:p>
+        </p:txBody>
+      </p:sp>
+      <p:sp>
+        <p:nvSpPr>
+          <p:cNvPr id="69" name="conclusion">
+            <a:extLst xmlns:a="http://schemas.openxmlformats.org/drawingml/2006/main">
+              <a:ext uri="{FF2B5EF4-FFF2-40B4-BE49-F238E27FC236}">
+                <a16:creationId xmlns:a16="http://schemas.microsoft.com/office/drawing/2014/main" id="{9AA4A703-37DB-4E4B-AC74-F773E83EA815}"/>
+              </a:ext>
+            </a:extLst>
+          </p:cNvPr>
+          <p:cNvSpPr>
+            <a:spLocks xmlns:a="http://schemas.openxmlformats.org/drawingml/2006/main" noGrp="1"/>
+          </p:cNvSpPr>
+          <p:nvPr/>
+        </p:nvSpPr>
+        <p:spPr>
+          <a:xfrm xmlns:a="http://schemas.openxmlformats.org/drawingml/2006/main">
+            <a:off x="400050" y="6076950"/>
+            <a:ext cx="10477500" cy="438150"/>
           </a:xfrm>
           <a:prstGeom xmlns:a="http://schemas.openxmlformats.org/drawingml/2006/main" prst="rect">
             <a:avLst/>
@@ -3122,7 +4382,7 @@
           <a:lstStyle xmlns:a="http://schemas.openxmlformats.org/drawingml/2006/main"/>
           <a:p xmlns:a="http://schemas.openxmlformats.org/drawingml/2006/main">
             <a:pPr algn="l">
-              <a:defRPr sz="1200" b="1">
+              <a:defRPr sz="1275" b="0">
                 <a:solidFill>
                   <a:srgbClr val="000000"/>
                 </a:solidFill>
@@ -3132,7 +4392,7 @@
               </a:defRPr>
             </a:pPr>
             <a:r>
-              <a:rPr sz="1200" b="1">
+              <a:rPr sz="1275" b="0">
                 <a:solidFill>
                   <a:srgbClr val="000000"/>
                 </a:solidFill>
@@ -3140,29 +4400,29 @@
                 <a:ea typeface="Helvetica Neue"/>
                 <a:cs typeface="Helvetica Neue"/>
               </a:rPr>
-              <a:t>0 accepted</a:t>
-            </a:r>
-          </a:p>
-        </p:txBody>
-      </p:sp>
-      <p:sp>
-        <p:nvSpPr>
-          <p:cNvPr id="40" name="conclusion">
-            <a:extLst xmlns:a="http://schemas.openxmlformats.org/drawingml/2006/main">
-              <a:ext uri="{FF2B5EF4-FFF2-40B4-BE49-F238E27FC236}">
-                <a16:creationId xmlns:a16="http://schemas.microsoft.com/office/drawing/2014/main" id="{BC7EAA2B-6A06-4ADC-9777-B530EB9CCC26}"/>
-              </a:ext>
-            </a:extLst>
-          </p:cNvPr>
-          <p:cNvSpPr>
-            <a:spLocks xmlns:a="http://schemas.openxmlformats.org/drawingml/2006/main" noGrp="1"/>
-          </p:cNvSpPr>
-          <p:nvPr/>
-        </p:nvSpPr>
-        <p:spPr>
-          <a:xfrm xmlns:a="http://schemas.openxmlformats.org/drawingml/2006/main">
-            <a:off x="400050" y="5924550"/>
-            <a:ext cx="10287000" cy="457200"/>
+              <a:t>Answer: the new source text is better for demos, and Case 1 element wording is easier to understand. But Case 2 still extracts weak Reason/Result spans, so the next improvement should target span boundaries and FE-specific extraction rules/prompts.</a:t>
+            </a:r>
+          </a:p>
+        </p:txBody>
+      </p:sp>
+      <p:sp>
+        <p:nvSpPr>
+          <p:cNvPr id="70" name="footer">
+            <a:extLst xmlns:a="http://schemas.openxmlformats.org/drawingml/2006/main">
+              <a:ext uri="{FF2B5EF4-FFF2-40B4-BE49-F238E27FC236}">
+                <a16:creationId xmlns:a16="http://schemas.microsoft.com/office/drawing/2014/main" id="{EE3E67EA-49F8-4C32-822B-6E907E6AB545}"/>
+              </a:ext>
+            </a:extLst>
+          </p:cNvPr>
+          <p:cNvSpPr>
+            <a:spLocks xmlns:a="http://schemas.openxmlformats.org/drawingml/2006/main" noGrp="1"/>
+          </p:cNvSpPr>
+          <p:nvPr/>
+        </p:nvSpPr>
+        <p:spPr>
+          <a:xfrm xmlns:a="http://schemas.openxmlformats.org/drawingml/2006/main">
+            <a:off x="400050" y="6553200"/>
+            <a:ext cx="9334500" cy="171450"/>
           </a:xfrm>
           <a:prstGeom xmlns:a="http://schemas.openxmlformats.org/drawingml/2006/main" prst="rect">
             <a:avLst/>
@@ -3178,9 +4438,9 @@
           <a:lstStyle xmlns:a="http://schemas.openxmlformats.org/drawingml/2006/main"/>
           <a:p xmlns:a="http://schemas.openxmlformats.org/drawingml/2006/main">
             <a:pPr algn="l">
-              <a:defRPr sz="1350" b="0">
-                <a:solidFill>
-                  <a:srgbClr val="000000"/>
+              <a:defRPr sz="900" b="0">
+                <a:solidFill>
+                  <a:srgbClr val="555555"/>
                 </a:solidFill>
                 <a:latin typeface="Helvetica Neue"/>
                 <a:ea typeface="Helvetica Neue"/>
@@ -3188,37 +4448,37 @@
               </a:defRPr>
             </a:pPr>
             <a:r>
-              <a:rPr sz="1350" b="0">
-                <a:solidFill>
-                  <a:srgbClr val="000000"/>
+              <a:rPr sz="900" b="0">
+                <a:solidFill>
+                  <a:srgbClr val="555555"/>
                 </a:solidFill>
                 <a:latin typeface="Helvetica Neue"/>
                 <a:ea typeface="Helvetica Neue"/>
                 <a:cs typeface="Helvetica Neue"/>
               </a:rPr>
-              <a:t>Takeaway: the revised examples are better demo text because they remove unexplained acronyms and clarify the policy action. They improve frame confidence, but they do not make element extraction more complete by themselves.</a:t>
-            </a:r>
-          </a:p>
-        </p:txBody>
-      </p:sp>
-      <p:sp>
-        <p:nvSpPr>
-          <p:cNvPr id="41" name="footer">
-            <a:extLst xmlns:a="http://schemas.openxmlformats.org/drawingml/2006/main">
-              <a:ext uri="{FF2B5EF4-FFF2-40B4-BE49-F238E27FC236}">
-                <a16:creationId xmlns:a16="http://schemas.microsoft.com/office/drawing/2014/main" id="{7CED67B2-38D5-4B7B-9C91-B1447D96B995}"/>
-              </a:ext>
-            </a:extLst>
-          </p:cNvPr>
-          <p:cNvSpPr>
-            <a:spLocks xmlns:a="http://schemas.openxmlformats.org/drawingml/2006/main" noGrp="1"/>
-          </p:cNvSpPr>
-          <p:nvPr/>
-        </p:nvSpPr>
-        <p:spPr>
-          <a:xfrm xmlns:a="http://schemas.openxmlformats.org/drawingml/2006/main">
-            <a:off x="400050" y="6477000"/>
-            <a:ext cx="9334500" cy="190500"/>
+              <a:t>Source: current demo examples, user-provided revised text photo, local mapper output generated in this repo.</a:t>
+            </a:r>
+          </a:p>
+        </p:txBody>
+      </p:sp>
+      <p:sp>
+        <p:nvSpPr>
+          <p:cNvPr id="71" name="slide-number">
+            <a:extLst xmlns:a="http://schemas.openxmlformats.org/drawingml/2006/main">
+              <a:ext uri="{FF2B5EF4-FFF2-40B4-BE49-F238E27FC236}">
+                <a16:creationId xmlns:a16="http://schemas.microsoft.com/office/drawing/2014/main" id="{F2A06EFA-16B4-409C-8A8B-A8E8F0C5EF82}"/>
+              </a:ext>
+            </a:extLst>
+          </p:cNvPr>
+          <p:cNvSpPr>
+            <a:spLocks xmlns:a="http://schemas.openxmlformats.org/drawingml/2006/main" noGrp="1"/>
+          </p:cNvSpPr>
+          <p:nvPr/>
+        </p:nvSpPr>
+        <p:spPr>
+          <a:xfrm xmlns:a="http://schemas.openxmlformats.org/drawingml/2006/main">
+            <a:off x="11277600" y="6276975"/>
+            <a:ext cx="514350" cy="238125"/>
           </a:xfrm>
           <a:prstGeom xmlns:a="http://schemas.openxmlformats.org/drawingml/2006/main" prst="rect">
             <a:avLst/>
@@ -3230,62 +4490,6 @@
           </a:ln>
         </p:spPr>
         <p:txBody>
-          <a:bodyPr xmlns:a="http://schemas.openxmlformats.org/drawingml/2006/main" anchor="t"/>
-          <a:lstStyle xmlns:a="http://schemas.openxmlformats.org/drawingml/2006/main"/>
-          <a:p xmlns:a="http://schemas.openxmlformats.org/drawingml/2006/main">
-            <a:pPr algn="l">
-              <a:defRPr sz="900" b="0">
-                <a:solidFill>
-                  <a:srgbClr val="555555"/>
-                </a:solidFill>
-                <a:latin typeface="Helvetica Neue"/>
-                <a:ea typeface="Helvetica Neue"/>
-                <a:cs typeface="Helvetica Neue"/>
-              </a:defRPr>
-            </a:pPr>
-            <a:r>
-              <a:rPr sz="900" b="0">
-                <a:solidFill>
-                  <a:srgbClr val="555555"/>
-                </a:solidFill>
-                <a:latin typeface="Helvetica Neue"/>
-                <a:ea typeface="Helvetica Neue"/>
-                <a:cs typeface="Helvetica Neue"/>
-              </a:rPr>
-              <a:t>Source: current demo examples, user-provided revised text photo, local mapper output generated in this repo.</a:t>
-            </a:r>
-          </a:p>
-        </p:txBody>
-      </p:sp>
-      <p:sp>
-        <p:nvSpPr>
-          <p:cNvPr id="42" name="slide-number">
-            <a:extLst xmlns:a="http://schemas.openxmlformats.org/drawingml/2006/main">
-              <a:ext uri="{FF2B5EF4-FFF2-40B4-BE49-F238E27FC236}">
-                <a16:creationId xmlns:a16="http://schemas.microsoft.com/office/drawing/2014/main" id="{9F64C3DA-5BD2-4433-9E2F-84C7A9F2A8BB}"/>
-              </a:ext>
-            </a:extLst>
-          </p:cNvPr>
-          <p:cNvSpPr>
-            <a:spLocks xmlns:a="http://schemas.openxmlformats.org/drawingml/2006/main" noGrp="1"/>
-          </p:cNvSpPr>
-          <p:nvPr/>
-        </p:nvSpPr>
-        <p:spPr>
-          <a:xfrm xmlns:a="http://schemas.openxmlformats.org/drawingml/2006/main">
-            <a:off x="11277600" y="6276975"/>
-            <a:ext cx="514350" cy="238125"/>
-          </a:xfrm>
-          <a:prstGeom xmlns:a="http://schemas.openxmlformats.org/drawingml/2006/main" prst="rect">
-            <a:avLst/>
-          </a:prstGeom>
-          <a:noFill xmlns:a="http://schemas.openxmlformats.org/drawingml/2006/main"/>
-          <a:ln xmlns:a="http://schemas.openxmlformats.org/drawingml/2006/main" w="0">
-            <a:noFill/>
-            <a:prstDash val="solid"/>
-          </a:ln>
-        </p:spPr>
-        <p:txBody>
           <a:bodyPr xmlns:a="http://schemas.openxmlformats.org/drawingml/2006/main" anchor="b"/>
           <a:lstStyle xmlns:a="http://schemas.openxmlformats.org/drawingml/2006/main"/>
           <a:p xmlns:a="http://schemas.openxmlformats.org/drawingml/2006/main">
@@ -3316,7 +4520,7 @@
     </p:spTree>
     <p:extLst>
       <p:ext uri="{BB962C8B-B14F-4D97-AF65-F5344CB8AC3E}">
-        <p14:creationId xmlns:p14="http://schemas.microsoft.com/office/powerpoint/2010/main" val="119953604"/>
+        <p14:creationId xmlns:p14="http://schemas.microsoft.com/office/powerpoint/2010/main" val="269620460"/>
       </p:ext>
     </p:extLst>
   </p:cSld>
